--- a/site/slides/m07-kernighan-lin/m07-kernighan-lin.pptx
+++ b/site/slides/m07-kernighan-lin/m07-kernighan-lin.pptx
@@ -4561,7 +4561,7 @@
         <p:spPr>
           <a:xfrm>
             <a:off x="563880" y="6512052"/>
-            <a:ext cx="2418587" cy="205740"/>
+            <a:ext cx="2428240" cy="205740"/>
           </a:xfrm>
           <a:prstGeom prst="rect">
             <a:avLst/>
@@ -4596,8 +4596,8 @@
         </p:nvSpPr>
         <p:spPr>
           <a:xfrm>
-            <a:off x="11108524" y="6499098"/>
-            <a:ext cx="561505" cy="222885"/>
+            <a:off x="11113770" y="6499098"/>
+            <a:ext cx="556260" cy="222885"/>
           </a:xfrm>
           <a:prstGeom prst="rect">
             <a:avLst/>
@@ -4627,42 +4627,6 @@
       <p:sp>
         <p:nvSpPr>
           <p:cNvPr id="7" name="TextBox 6"/>
-          <p:cNvSpPr txBox="1"/>
-          <p:nvPr/>
-        </p:nvSpPr>
-        <p:spPr>
-          <a:xfrm>
-            <a:off x="10855147" y="377952"/>
-            <a:ext cx="811072" cy="205740"/>
-          </a:xfrm>
-          <a:prstGeom prst="rect">
-            <a:avLst/>
-          </a:prstGeom>
-          <a:noFill/>
-        </p:spPr>
-        <p:txBody>
-          <a:bodyPr wrap="none" lIns="0" rIns="0" tIns="0" bIns="0">
-            <a:spAutoFit/>
-          </a:bodyPr>
-          <a:lstStyle/>
-          <a:p>
-            <a:pPr algn="r"/>
-            <a:r>
-              <a:rPr sz="1200" b="0">
-                <a:solidFill>
-                  <a:srgbClr val="6F8F8F"/>
-                </a:solidFill>
-                <a:latin typeface="Noto Sans SC"/>
-                <a:ea typeface="Noto Sans SC"/>
-              </a:rPr>
-              <a:t>影片 00:00</a:t>
-            </a:r>
-          </a:p>
-        </p:txBody>
-      </p:sp>
-      <p:sp>
-        <p:nvSpPr>
-          <p:cNvPr id="8" name="TextBox 7"/>
           <p:cNvSpPr txBox="1"/>
           <p:nvPr/>
         </p:nvSpPr>
@@ -4698,50 +4662,50 @@
       </p:sp>
       <p:sp>
         <p:nvSpPr>
+          <p:cNvPr id="8" name="TextBox 7"/>
+          <p:cNvSpPr txBox="1"/>
+          <p:nvPr/>
+        </p:nvSpPr>
+        <p:spPr>
+          <a:xfrm>
+            <a:off x="3586479" y="3335782"/>
+            <a:ext cx="5019040" cy="291465"/>
+          </a:xfrm>
+          <a:prstGeom prst="rect">
+            <a:avLst/>
+          </a:prstGeom>
+          <a:noFill/>
+        </p:spPr>
+        <p:txBody>
+          <a:bodyPr wrap="none" lIns="0" rIns="0" tIns="0" bIns="0">
+            <a:spAutoFit/>
+          </a:bodyPr>
+          <a:lstStyle/>
+          <a:p>
+            <a:pPr algn="ctr"/>
+            <a:r>
+              <a:rPr sz="1700" b="0">
+                <a:solidFill>
+                  <a:srgbClr val="BCD2D0"/>
+                </a:solidFill>
+                <a:latin typeface="Noto Sans SC"/>
+                <a:ea typeface="Noto Sans SC"/>
+              </a:rPr>
+              <a:t>Kernighan–Lin refinement · 成对交换与最佳前缀</a:t>
+            </a:r>
+          </a:p>
+        </p:txBody>
+      </p:sp>
+      <p:sp>
+        <p:nvSpPr>
           <p:cNvPr id="9" name="TextBox 8"/>
           <p:cNvSpPr txBox="1"/>
           <p:nvPr/>
         </p:nvSpPr>
         <p:spPr>
           <a:xfrm>
-            <a:off x="3588753" y="3335782"/>
-            <a:ext cx="5014493" cy="291465"/>
-          </a:xfrm>
-          <a:prstGeom prst="rect">
-            <a:avLst/>
-          </a:prstGeom>
-          <a:noFill/>
-        </p:spPr>
-        <p:txBody>
-          <a:bodyPr wrap="none" lIns="0" rIns="0" tIns="0" bIns="0">
-            <a:spAutoFit/>
-          </a:bodyPr>
-          <a:lstStyle/>
-          <a:p>
-            <a:pPr algn="ctr"/>
-            <a:r>
-              <a:rPr sz="1700" b="0">
-                <a:solidFill>
-                  <a:srgbClr val="BCD2D0"/>
-                </a:solidFill>
-                <a:latin typeface="Noto Sans SC"/>
-                <a:ea typeface="Noto Sans SC"/>
-              </a:rPr>
-              <a:t>Kernighan–Lin refinement · 成对交换与最佳前缀</a:t>
-            </a:r>
-          </a:p>
-        </p:txBody>
-      </p:sp>
-      <p:sp>
-        <p:nvSpPr>
-          <p:cNvPr id="10" name="TextBox 9"/>
-          <p:cNvSpPr txBox="1"/>
-          <p:nvPr/>
-        </p:nvSpPr>
-        <p:spPr>
-          <a:xfrm>
-            <a:off x="3815448" y="4136644"/>
-            <a:ext cx="4561103" cy="240030"/>
+            <a:off x="3807460" y="4136644"/>
+            <a:ext cx="4577080" cy="240030"/>
           </a:xfrm>
           <a:prstGeom prst="rect">
             <a:avLst/>
@@ -4994,7 +4958,7 @@
         <p:spPr>
           <a:xfrm>
             <a:off x="563880" y="6512052"/>
-            <a:ext cx="2418587" cy="205740"/>
+            <a:ext cx="2428240" cy="205740"/>
           </a:xfrm>
           <a:prstGeom prst="rect">
             <a:avLst/>
@@ -5029,8 +4993,8 @@
         </p:nvSpPr>
         <p:spPr>
           <a:xfrm>
-            <a:off x="11011115" y="6499098"/>
-            <a:ext cx="658914" cy="222885"/>
+            <a:off x="11018520" y="6499098"/>
+            <a:ext cx="651510" cy="222885"/>
           </a:xfrm>
           <a:prstGeom prst="rect">
             <a:avLst/>
@@ -5059,43 +5023,7 @@
       </p:sp>
       <p:sp>
         <p:nvSpPr>
-          <p:cNvPr id="9" name="TextBox 8"/>
-          <p:cNvSpPr txBox="1"/>
-          <p:nvPr/>
-        </p:nvSpPr>
-        <p:spPr>
-          <a:xfrm>
-            <a:off x="10855147" y="377952"/>
-            <a:ext cx="811072" cy="205740"/>
-          </a:xfrm>
-          <a:prstGeom prst="rect">
-            <a:avLst/>
-          </a:prstGeom>
-          <a:noFill/>
-        </p:spPr>
-        <p:txBody>
-          <a:bodyPr wrap="none" lIns="0" rIns="0" tIns="0" bIns="0">
-            <a:spAutoFit/>
-          </a:bodyPr>
-          <a:lstStyle/>
-          <a:p>
-            <a:pPr algn="r"/>
-            <a:r>
-              <a:rPr sz="1200" b="0">
-                <a:solidFill>
-                  <a:srgbClr val="6F8F8F"/>
-                </a:solidFill>
-                <a:latin typeface="Noto Sans SC"/>
-                <a:ea typeface="Noto Sans SC"/>
-              </a:rPr>
-              <a:t>影片 02:17</a:t>
-            </a:r>
-          </a:p>
-        </p:txBody>
-      </p:sp>
-      <p:sp>
-        <p:nvSpPr>
-          <p:cNvPr id="10" name="Oval 9"/>
+          <p:cNvPr id="9" name="Oval 8"/>
           <p:cNvSpPr/>
           <p:nvPr/>
         </p:nvSpPr>
@@ -5137,7 +5065,7 @@
       </p:sp>
       <p:sp>
         <p:nvSpPr>
-          <p:cNvPr id="11" name="TextBox 10"/>
+          <p:cNvPr id="10" name="TextBox 9"/>
           <p:cNvSpPr txBox="1"/>
           <p:nvPr/>
         </p:nvSpPr>
@@ -5177,7 +5105,7 @@
       </p:sp>
       <p:sp>
         <p:nvSpPr>
-          <p:cNvPr id="12" name="Oval 11"/>
+          <p:cNvPr id="11" name="Oval 10"/>
           <p:cNvSpPr/>
           <p:nvPr/>
         </p:nvSpPr>
@@ -5219,7 +5147,7 @@
       </p:sp>
       <p:sp>
         <p:nvSpPr>
-          <p:cNvPr id="13" name="TextBox 12"/>
+          <p:cNvPr id="12" name="TextBox 11"/>
           <p:cNvSpPr txBox="1"/>
           <p:nvPr/>
         </p:nvSpPr>
@@ -5259,7 +5187,7 @@
       </p:sp>
       <p:sp>
         <p:nvSpPr>
-          <p:cNvPr id="14" name="Oval 13"/>
+          <p:cNvPr id="13" name="Oval 12"/>
           <p:cNvSpPr/>
           <p:nvPr/>
         </p:nvSpPr>
@@ -5301,7 +5229,7 @@
       </p:sp>
       <p:sp>
         <p:nvSpPr>
-          <p:cNvPr id="15" name="TextBox 14"/>
+          <p:cNvPr id="14" name="TextBox 13"/>
           <p:cNvSpPr txBox="1"/>
           <p:nvPr/>
         </p:nvSpPr>
@@ -5341,7 +5269,7 @@
       </p:sp>
       <p:sp>
         <p:nvSpPr>
-          <p:cNvPr id="16" name="Oval 15"/>
+          <p:cNvPr id="15" name="Oval 14"/>
           <p:cNvSpPr/>
           <p:nvPr/>
         </p:nvSpPr>
@@ -5383,7 +5311,7 @@
       </p:sp>
       <p:sp>
         <p:nvSpPr>
-          <p:cNvPr id="17" name="TextBox 16"/>
+          <p:cNvPr id="16" name="TextBox 15"/>
           <p:cNvSpPr txBox="1"/>
           <p:nvPr/>
         </p:nvSpPr>
@@ -5423,7 +5351,7 @@
       </p:sp>
       <p:sp>
         <p:nvSpPr>
-          <p:cNvPr id="18" name="Rounded Rectangle 17"/>
+          <p:cNvPr id="17" name="Rounded Rectangle 16"/>
           <p:cNvSpPr/>
           <p:nvPr/>
         </p:nvSpPr>
@@ -5473,7 +5401,7 @@
       </p:sp>
       <p:sp>
         <p:nvSpPr>
-          <p:cNvPr id="19" name="TextBox 18"/>
+          <p:cNvPr id="18" name="TextBox 17"/>
           <p:cNvSpPr txBox="1"/>
           <p:nvPr/>
         </p:nvSpPr>
@@ -5509,13 +5437,13 @@
       </p:sp>
       <p:cxnSp>
         <p:nvCxnSpPr>
-          <p:cNvPr id="20" name="Connector 19"/>
+          <p:cNvPr id="19" name="Connector 18"/>
           <p:cNvCxnSpPr/>
           <p:nvPr/>
         </p:nvCxnSpPr>
         <p:spPr>
           <a:xfrm>
-            <a:off x="6667500" y="3492500"/>
+            <a:off x="6667500" y="2349500"/>
             <a:ext cx="3492500" cy="0"/>
           </a:xfrm>
           <a:prstGeom prst="line">
@@ -5544,14 +5472,14 @@
       </p:cxnSp>
       <p:sp>
         <p:nvSpPr>
-          <p:cNvPr id="21" name="TextBox 20"/>
-          <p:cNvSpPr txBox="1"/>
-          <p:nvPr/>
-        </p:nvSpPr>
-        <p:spPr>
-          <a:xfrm>
-            <a:off x="6473698" y="3400552"/>
-            <a:ext cx="176022" cy="205740"/>
+          <p:cNvPr id="20" name="TextBox 19"/>
+          <p:cNvSpPr txBox="1"/>
+          <p:nvPr/>
+        </p:nvSpPr>
+        <p:spPr>
+          <a:xfrm>
+            <a:off x="6475730" y="2257552"/>
+            <a:ext cx="173990" cy="205740"/>
           </a:xfrm>
           <a:prstGeom prst="rect">
             <a:avLst/>
@@ -5580,13 +5508,13 @@
       </p:sp>
       <p:sp>
         <p:nvSpPr>
-          <p:cNvPr id="22" name="Rounded Rectangle 21"/>
+          <p:cNvPr id="21" name="Rounded Rectangle 20"/>
           <p:cNvSpPr/>
           <p:nvPr/>
         </p:nvSpPr>
         <p:spPr>
           <a:xfrm>
-            <a:off x="6921500" y="3473450"/>
+            <a:off x="6921500" y="2330450"/>
             <a:ext cx="571500" cy="38100"/>
           </a:xfrm>
           <a:prstGeom prst="roundRect">
@@ -5624,14 +5552,50 @@
       </p:sp>
       <p:sp>
         <p:nvSpPr>
+          <p:cNvPr id="22" name="TextBox 21"/>
+          <p:cNvSpPr txBox="1"/>
+          <p:nvPr/>
+        </p:nvSpPr>
+        <p:spPr>
+          <a:xfrm>
+            <a:off x="7085965" y="2053336"/>
+            <a:ext cx="242570" cy="274320"/>
+          </a:xfrm>
+          <a:prstGeom prst="rect">
+            <a:avLst/>
+          </a:prstGeom>
+          <a:noFill/>
+        </p:spPr>
+        <p:txBody>
+          <a:bodyPr wrap="none" lIns="0" rIns="0" tIns="0" bIns="0">
+            <a:spAutoFit/>
+          </a:bodyPr>
+          <a:lstStyle/>
+          <a:p>
+            <a:pPr algn="ctr"/>
+            <a:r>
+              <a:rPr sz="1600" b="1">
+                <a:solidFill>
+                  <a:srgbClr val="D8BB78"/>
+                </a:solidFill>
+                <a:latin typeface="Noto Sans SC"/>
+                <a:ea typeface="Noto Sans SC"/>
+              </a:rPr>
+              <a:t>0</a:t>
+            </a:r>
+          </a:p>
+        </p:txBody>
+      </p:sp>
+      <p:sp>
+        <p:nvSpPr>
           <p:cNvPr id="23" name="TextBox 22"/>
           <p:cNvSpPr txBox="1"/>
           <p:nvPr/>
         </p:nvSpPr>
         <p:spPr>
           <a:xfrm>
-            <a:off x="7086346" y="3196336"/>
-            <a:ext cx="241808" cy="274320"/>
+            <a:off x="6986270" y="4086098"/>
+            <a:ext cx="441959" cy="222885"/>
           </a:xfrm>
           <a:prstGeom prst="rect">
             <a:avLst/>
@@ -5646,42 +5610,6 @@
           <a:p>
             <a:pPr algn="ctr"/>
             <a:r>
-              <a:rPr sz="1600" b="1">
-                <a:solidFill>
-                  <a:srgbClr val="D8BB78"/>
-                </a:solidFill>
-                <a:latin typeface="Noto Sans SC"/>
-                <a:ea typeface="Noto Sans SC"/>
-              </a:rPr>
-              <a:t>0</a:t>
-            </a:r>
-          </a:p>
-        </p:txBody>
-      </p:sp>
-      <p:sp>
-        <p:nvSpPr>
-          <p:cNvPr id="24" name="TextBox 23"/>
-          <p:cNvSpPr txBox="1"/>
-          <p:nvPr/>
-        </p:nvSpPr>
-        <p:spPr>
-          <a:xfrm>
-            <a:off x="6983539" y="4086098"/>
-            <a:ext cx="447420" cy="222885"/>
-          </a:xfrm>
-          <a:prstGeom prst="rect">
-            <a:avLst/>
-          </a:prstGeom>
-          <a:noFill/>
-        </p:spPr>
-        <p:txBody>
-          <a:bodyPr wrap="none" lIns="0" rIns="0" tIns="0" bIns="0">
-            <a:spAutoFit/>
-          </a:bodyPr>
-          <a:lstStyle/>
-          <a:p>
-            <a:pPr algn="ctr"/>
-            <a:r>
               <a:rPr sz="1300" b="0">
                 <a:solidFill>
                   <a:srgbClr val="BCD2D0"/>
@@ -5696,7 +5624,7 @@
       </p:sp>
       <p:sp>
         <p:nvSpPr>
-          <p:cNvPr id="25" name="Rounded Rectangle 24"/>
+          <p:cNvPr id="24" name="Rounded Rectangle 23"/>
           <p:cNvSpPr/>
           <p:nvPr/>
         </p:nvSpPr>
@@ -5741,13 +5669,13 @@
       </p:sp>
       <p:sp>
         <p:nvSpPr>
-          <p:cNvPr id="26" name="Rounded Rectangle 25"/>
+          <p:cNvPr id="25" name="Rounded Rectangle 24"/>
           <p:cNvSpPr/>
           <p:nvPr/>
         </p:nvSpPr>
         <p:spPr>
           <a:xfrm>
-            <a:off x="7937500" y="3492500"/>
+            <a:off x="7937500" y="2349500"/>
             <a:ext cx="571500" cy="914400"/>
           </a:xfrm>
           <a:prstGeom prst="roundRect">
@@ -5785,14 +5713,50 @@
       </p:sp>
       <p:sp>
         <p:nvSpPr>
+          <p:cNvPr id="26" name="TextBox 25"/>
+          <p:cNvSpPr txBox="1"/>
+          <p:nvPr/>
+        </p:nvSpPr>
+        <p:spPr>
+          <a:xfrm>
+            <a:off x="8063865" y="3310636"/>
+            <a:ext cx="318770" cy="274320"/>
+          </a:xfrm>
+          <a:prstGeom prst="rect">
+            <a:avLst/>
+          </a:prstGeom>
+          <a:noFill/>
+        </p:spPr>
+        <p:txBody>
+          <a:bodyPr wrap="none" lIns="0" rIns="0" tIns="0" bIns="0">
+            <a:spAutoFit/>
+          </a:bodyPr>
+          <a:lstStyle/>
+          <a:p>
+            <a:pPr algn="ctr"/>
+            <a:r>
+              <a:rPr sz="1600" b="1">
+                <a:solidFill>
+                  <a:srgbClr val="DB7B72"/>
+                </a:solidFill>
+                <a:latin typeface="Noto Sans SC"/>
+                <a:ea typeface="Noto Sans SC"/>
+              </a:rPr>
+              <a:t>-8</a:t>
+            </a:r>
+          </a:p>
+        </p:txBody>
+      </p:sp>
+      <p:sp>
+        <p:nvSpPr>
           <p:cNvPr id="27" name="TextBox 26"/>
           <p:cNvSpPr txBox="1"/>
           <p:nvPr/>
         </p:nvSpPr>
         <p:spPr>
           <a:xfrm>
-            <a:off x="8064754" y="4453636"/>
-            <a:ext cx="316992" cy="274320"/>
+            <a:off x="8002270" y="4086098"/>
+            <a:ext cx="441959" cy="222885"/>
           </a:xfrm>
           <a:prstGeom prst="rect">
             <a:avLst/>
@@ -5807,42 +5771,6 @@
           <a:p>
             <a:pPr algn="ctr"/>
             <a:r>
-              <a:rPr sz="1600" b="1">
-                <a:solidFill>
-                  <a:srgbClr val="DB7B72"/>
-                </a:solidFill>
-                <a:latin typeface="Noto Sans SC"/>
-                <a:ea typeface="Noto Sans SC"/>
-              </a:rPr>
-              <a:t>-8</a:t>
-            </a:r>
-          </a:p>
-        </p:txBody>
-      </p:sp>
-      <p:sp>
-        <p:nvSpPr>
-          <p:cNvPr id="28" name="TextBox 27"/>
-          <p:cNvSpPr txBox="1"/>
-          <p:nvPr/>
-        </p:nvSpPr>
-        <p:spPr>
-          <a:xfrm>
-            <a:off x="7999539" y="4086098"/>
-            <a:ext cx="447420" cy="222885"/>
-          </a:xfrm>
-          <a:prstGeom prst="rect">
-            <a:avLst/>
-          </a:prstGeom>
-          <a:noFill/>
-        </p:spPr>
-        <p:txBody>
-          <a:bodyPr wrap="none" lIns="0" rIns="0" tIns="0" bIns="0">
-            <a:spAutoFit/>
-          </a:bodyPr>
-          <a:lstStyle/>
-          <a:p>
-            <a:pPr algn="ctr"/>
-            <a:r>
               <a:rPr sz="1300" b="0">
                 <a:solidFill>
                   <a:srgbClr val="BCD2D0"/>
@@ -5857,13 +5785,13 @@
       </p:sp>
       <p:sp>
         <p:nvSpPr>
-          <p:cNvPr id="29" name="Rounded Rectangle 28"/>
+          <p:cNvPr id="28" name="Rounded Rectangle 27"/>
           <p:cNvSpPr/>
           <p:nvPr/>
         </p:nvSpPr>
         <p:spPr>
           <a:xfrm>
-            <a:off x="8953500" y="3492500"/>
+            <a:off x="8953500" y="2349500"/>
             <a:ext cx="571500" cy="685800"/>
           </a:xfrm>
           <a:prstGeom prst="roundRect">
@@ -5901,14 +5829,50 @@
       </p:sp>
       <p:sp>
         <p:nvSpPr>
+          <p:cNvPr id="29" name="TextBox 28"/>
+          <p:cNvSpPr txBox="1"/>
+          <p:nvPr/>
+        </p:nvSpPr>
+        <p:spPr>
+          <a:xfrm>
+            <a:off x="9079865" y="3082036"/>
+            <a:ext cx="318770" cy="274320"/>
+          </a:xfrm>
+          <a:prstGeom prst="rect">
+            <a:avLst/>
+          </a:prstGeom>
+          <a:noFill/>
+        </p:spPr>
+        <p:txBody>
+          <a:bodyPr wrap="none" lIns="0" rIns="0" tIns="0" bIns="0">
+            <a:spAutoFit/>
+          </a:bodyPr>
+          <a:lstStyle/>
+          <a:p>
+            <a:pPr algn="ctr"/>
+            <a:r>
+              <a:rPr sz="1600" b="1">
+                <a:solidFill>
+                  <a:srgbClr val="DB7B72"/>
+                </a:solidFill>
+                <a:latin typeface="Noto Sans SC"/>
+                <a:ea typeface="Noto Sans SC"/>
+              </a:rPr>
+              <a:t>-6</a:t>
+            </a:r>
+          </a:p>
+        </p:txBody>
+      </p:sp>
+      <p:sp>
+        <p:nvSpPr>
           <p:cNvPr id="30" name="TextBox 29"/>
           <p:cNvSpPr txBox="1"/>
           <p:nvPr/>
         </p:nvSpPr>
         <p:spPr>
           <a:xfrm>
-            <a:off x="9080754" y="4225036"/>
-            <a:ext cx="316992" cy="274320"/>
+            <a:off x="9018270" y="4086098"/>
+            <a:ext cx="441959" cy="222885"/>
           </a:xfrm>
           <a:prstGeom prst="rect">
             <a:avLst/>
@@ -5923,42 +5887,6 @@
           <a:p>
             <a:pPr algn="ctr"/>
             <a:r>
-              <a:rPr sz="1600" b="1">
-                <a:solidFill>
-                  <a:srgbClr val="DB7B72"/>
-                </a:solidFill>
-                <a:latin typeface="Noto Sans SC"/>
-                <a:ea typeface="Noto Sans SC"/>
-              </a:rPr>
-              <a:t>-6</a:t>
-            </a:r>
-          </a:p>
-        </p:txBody>
-      </p:sp>
-      <p:sp>
-        <p:nvSpPr>
-          <p:cNvPr id="31" name="TextBox 30"/>
-          <p:cNvSpPr txBox="1"/>
-          <p:nvPr/>
-        </p:nvSpPr>
-        <p:spPr>
-          <a:xfrm>
-            <a:off x="9015539" y="4086098"/>
-            <a:ext cx="447420" cy="222885"/>
-          </a:xfrm>
-          <a:prstGeom prst="rect">
-            <a:avLst/>
-          </a:prstGeom>
-          <a:noFill/>
-        </p:spPr>
-        <p:txBody>
-          <a:bodyPr wrap="none" lIns="0" rIns="0" tIns="0" bIns="0">
-            <a:spAutoFit/>
-          </a:bodyPr>
-          <a:lstStyle/>
-          <a:p>
-            <a:pPr algn="ctr"/>
-            <a:r>
               <a:rPr sz="1300" b="0">
                 <a:solidFill>
                   <a:srgbClr val="BCD2D0"/>
@@ -5973,14 +5901,14 @@
       </p:sp>
       <p:sp>
         <p:nvSpPr>
-          <p:cNvPr id="32" name="Rounded Rectangle 31"/>
+          <p:cNvPr id="31" name="Rounded Rectangle 30"/>
           <p:cNvSpPr/>
           <p:nvPr/>
         </p:nvSpPr>
         <p:spPr>
           <a:xfrm>
-            <a:off x="7085812" y="4864100"/>
-            <a:ext cx="2592374" cy="292100"/>
+            <a:off x="7083425" y="4864100"/>
+            <a:ext cx="2597150" cy="292100"/>
           </a:xfrm>
           <a:prstGeom prst="roundRect">
             <a:avLst>
@@ -6019,14 +5947,14 @@
       </p:sp>
       <p:sp>
         <p:nvSpPr>
-          <p:cNvPr id="33" name="TextBox 32"/>
-          <p:cNvSpPr txBox="1"/>
-          <p:nvPr/>
-        </p:nvSpPr>
-        <p:spPr>
-          <a:xfrm>
-            <a:off x="7131532" y="4924298"/>
-            <a:ext cx="2500934" cy="222885"/>
+          <p:cNvPr id="32" name="TextBox 31"/>
+          <p:cNvSpPr txBox="1"/>
+          <p:nvPr/>
+        </p:nvSpPr>
+        <p:spPr>
+          <a:xfrm>
+            <a:off x="7129145" y="4924298"/>
+            <a:ext cx="2505710" cy="222885"/>
           </a:xfrm>
           <a:prstGeom prst="rect">
             <a:avLst/>
@@ -6279,7 +6207,7 @@
         <p:spPr>
           <a:xfrm>
             <a:off x="563880" y="6512052"/>
-            <a:ext cx="2418587" cy="205740"/>
+            <a:ext cx="2428240" cy="205740"/>
           </a:xfrm>
           <a:prstGeom prst="rect">
             <a:avLst/>
@@ -6314,8 +6242,8 @@
         </p:nvSpPr>
         <p:spPr>
           <a:xfrm>
-            <a:off x="11011115" y="6499098"/>
-            <a:ext cx="658914" cy="222885"/>
+            <a:off x="11018520" y="6499098"/>
+            <a:ext cx="651510" cy="222885"/>
           </a:xfrm>
           <a:prstGeom prst="rect">
             <a:avLst/>
@@ -6344,43 +6272,7 @@
       </p:sp>
       <p:sp>
         <p:nvSpPr>
-          <p:cNvPr id="9" name="TextBox 8"/>
-          <p:cNvSpPr txBox="1"/>
-          <p:nvPr/>
-        </p:nvSpPr>
-        <p:spPr>
-          <a:xfrm>
-            <a:off x="10855147" y="377952"/>
-            <a:ext cx="811072" cy="205740"/>
-          </a:xfrm>
-          <a:prstGeom prst="rect">
-            <a:avLst/>
-          </a:prstGeom>
-          <a:noFill/>
-        </p:spPr>
-        <p:txBody>
-          <a:bodyPr wrap="none" lIns="0" rIns="0" tIns="0" bIns="0">
-            <a:spAutoFit/>
-          </a:bodyPr>
-          <a:lstStyle/>
-          <a:p>
-            <a:pPr algn="r"/>
-            <a:r>
-              <a:rPr sz="1200" b="0">
-                <a:solidFill>
-                  <a:srgbClr val="6F8F8F"/>
-                </a:solidFill>
-                <a:latin typeface="Noto Sans SC"/>
-                <a:ea typeface="Noto Sans SC"/>
-              </a:rPr>
-              <a:t>影片 02:29</a:t>
-            </a:r>
-          </a:p>
-        </p:txBody>
-      </p:sp>
-      <p:sp>
-        <p:nvSpPr>
-          <p:cNvPr id="10" name="Oval 9"/>
+          <p:cNvPr id="9" name="Oval 8"/>
           <p:cNvSpPr/>
           <p:nvPr/>
         </p:nvSpPr>
@@ -6422,7 +6314,7 @@
       </p:sp>
       <p:sp>
         <p:nvSpPr>
-          <p:cNvPr id="11" name="TextBox 10"/>
+          <p:cNvPr id="10" name="TextBox 9"/>
           <p:cNvSpPr txBox="1"/>
           <p:nvPr/>
         </p:nvSpPr>
@@ -6462,7 +6354,7 @@
       </p:sp>
       <p:sp>
         <p:nvSpPr>
-          <p:cNvPr id="12" name="Oval 11"/>
+          <p:cNvPr id="11" name="Oval 10"/>
           <p:cNvSpPr/>
           <p:nvPr/>
         </p:nvSpPr>
@@ -6504,7 +6396,7 @@
       </p:sp>
       <p:sp>
         <p:nvSpPr>
-          <p:cNvPr id="13" name="TextBox 12"/>
+          <p:cNvPr id="12" name="TextBox 11"/>
           <p:cNvSpPr txBox="1"/>
           <p:nvPr/>
         </p:nvSpPr>
@@ -6544,7 +6436,7 @@
       </p:sp>
       <p:sp>
         <p:nvSpPr>
-          <p:cNvPr id="14" name="Oval 13"/>
+          <p:cNvPr id="13" name="Oval 12"/>
           <p:cNvSpPr/>
           <p:nvPr/>
         </p:nvSpPr>
@@ -6586,7 +6478,7 @@
       </p:sp>
       <p:sp>
         <p:nvSpPr>
-          <p:cNvPr id="15" name="TextBox 14"/>
+          <p:cNvPr id="14" name="TextBox 13"/>
           <p:cNvSpPr txBox="1"/>
           <p:nvPr/>
         </p:nvSpPr>
@@ -6626,7 +6518,7 @@
       </p:sp>
       <p:sp>
         <p:nvSpPr>
-          <p:cNvPr id="16" name="Oval 15"/>
+          <p:cNvPr id="15" name="Oval 14"/>
           <p:cNvSpPr/>
           <p:nvPr/>
         </p:nvSpPr>
@@ -6668,7 +6560,7 @@
       </p:sp>
       <p:sp>
         <p:nvSpPr>
-          <p:cNvPr id="17" name="TextBox 16"/>
+          <p:cNvPr id="16" name="TextBox 15"/>
           <p:cNvSpPr txBox="1"/>
           <p:nvPr/>
         </p:nvSpPr>
@@ -6708,7 +6600,7 @@
       </p:sp>
       <p:sp>
         <p:nvSpPr>
-          <p:cNvPr id="18" name="Rounded Rectangle 17"/>
+          <p:cNvPr id="17" name="Rounded Rectangle 16"/>
           <p:cNvSpPr/>
           <p:nvPr/>
         </p:nvSpPr>
@@ -6754,14 +6646,50 @@
       </p:sp>
       <p:sp>
         <p:nvSpPr>
+          <p:cNvPr id="18" name="TextBox 17"/>
+          <p:cNvSpPr txBox="1"/>
+          <p:nvPr/>
+        </p:nvSpPr>
+        <p:spPr>
+          <a:xfrm>
+            <a:off x="6089015" y="1762506"/>
+            <a:ext cx="160020" cy="188595"/>
+          </a:xfrm>
+          <a:prstGeom prst="rect">
+            <a:avLst/>
+          </a:prstGeom>
+          <a:noFill/>
+        </p:spPr>
+        <p:txBody>
+          <a:bodyPr wrap="none" lIns="0" rIns="0" tIns="0" bIns="0">
+            <a:spAutoFit/>
+          </a:bodyPr>
+          <a:lstStyle/>
+          <a:p>
+            <a:pPr algn="l"/>
+            <a:r>
+              <a:rPr sz="1100" b="0">
+                <a:solidFill>
+                  <a:srgbClr val="6F8F8F"/>
+                </a:solidFill>
+                <a:latin typeface="Noto Sans SC"/>
+                <a:ea typeface="Noto Sans SC"/>
+              </a:rPr>
+              <a:t>1</a:t>
+            </a:r>
+          </a:p>
+        </p:txBody>
+      </p:sp>
+      <p:sp>
+        <p:nvSpPr>
           <p:cNvPr id="19" name="TextBox 18"/>
           <p:cNvSpPr txBox="1"/>
           <p:nvPr/>
         </p:nvSpPr>
         <p:spPr>
           <a:xfrm>
-            <a:off x="6089015" y="1762506"/>
-            <a:ext cx="161353" cy="188595"/>
+            <a:off x="6379210" y="1723644"/>
+            <a:ext cx="1687830" cy="240030"/>
           </a:xfrm>
           <a:prstGeom prst="rect">
             <a:avLst/>
@@ -6776,6 +6704,114 @@
           <a:p>
             <a:pPr algn="l"/>
             <a:r>
+              <a:rPr sz="1400" b="0">
+                <a:solidFill>
+                  <a:srgbClr val="DFEADF"/>
+                </a:solidFill>
+                <a:latin typeface="Noto Sans SC"/>
+                <a:ea typeface="Noto Sans SC"/>
+              </a:rPr>
+              <a:t>repeat:                      # </a:t>
+            </a:r>
+          </a:p>
+        </p:txBody>
+      </p:sp>
+      <p:sp>
+        <p:nvSpPr>
+          <p:cNvPr id="20" name="TextBox 19"/>
+          <p:cNvSpPr txBox="1"/>
+          <p:nvPr/>
+        </p:nvSpPr>
+        <p:spPr>
+          <a:xfrm>
+            <a:off x="7960359" y="1723644"/>
+            <a:ext cx="817880" cy="240030"/>
+          </a:xfrm>
+          <a:prstGeom prst="rect">
+            <a:avLst/>
+          </a:prstGeom>
+          <a:noFill/>
+        </p:spPr>
+        <p:txBody>
+          <a:bodyPr wrap="none" lIns="0" rIns="0" tIns="0" bIns="0">
+            <a:spAutoFit/>
+          </a:bodyPr>
+          <a:lstStyle/>
+          <a:p>
+            <a:pPr algn="l"/>
+            <a:r>
+              <a:rPr sz="1400" b="0">
+                <a:solidFill>
+                  <a:srgbClr val="DFEADF"/>
+                </a:solidFill>
+                <a:latin typeface="Noto Sans SC"/>
+                <a:ea typeface="Noto Sans SC"/>
+              </a:rPr>
+              <a:t>每次一轮</a:t>
+            </a:r>
+          </a:p>
+        </p:txBody>
+      </p:sp>
+      <p:sp>
+        <p:nvSpPr>
+          <p:cNvPr id="21" name="TextBox 20"/>
+          <p:cNvSpPr txBox="1"/>
+          <p:nvPr/>
+        </p:nvSpPr>
+        <p:spPr>
+          <a:xfrm>
+            <a:off x="8671560" y="1723644"/>
+            <a:ext cx="519430" cy="240030"/>
+          </a:xfrm>
+          <a:prstGeom prst="rect">
+            <a:avLst/>
+          </a:prstGeom>
+          <a:noFill/>
+        </p:spPr>
+        <p:txBody>
+          <a:bodyPr wrap="none" lIns="0" rIns="0" tIns="0" bIns="0">
+            <a:spAutoFit/>
+          </a:bodyPr>
+          <a:lstStyle/>
+          <a:p>
+            <a:pPr algn="l"/>
+            <a:r>
+              <a:rPr sz="1400" b="0">
+                <a:solidFill>
+                  <a:srgbClr val="DFEADF"/>
+                </a:solidFill>
+                <a:latin typeface="Noto Sans SC"/>
+                <a:ea typeface="Noto Sans SC"/>
+              </a:rPr>
+              <a:t> pass</a:t>
+            </a:r>
+          </a:p>
+        </p:txBody>
+      </p:sp>
+      <p:sp>
+        <p:nvSpPr>
+          <p:cNvPr id="22" name="TextBox 21"/>
+          <p:cNvSpPr txBox="1"/>
+          <p:nvPr/>
+        </p:nvSpPr>
+        <p:spPr>
+          <a:xfrm>
+            <a:off x="6089015" y="2168906"/>
+            <a:ext cx="160020" cy="188595"/>
+          </a:xfrm>
+          <a:prstGeom prst="rect">
+            <a:avLst/>
+          </a:prstGeom>
+          <a:noFill/>
+        </p:spPr>
+        <p:txBody>
+          <a:bodyPr wrap="none" lIns="0" rIns="0" tIns="0" bIns="0">
+            <a:spAutoFit/>
+          </a:bodyPr>
+          <a:lstStyle/>
+          <a:p>
+            <a:pPr algn="l"/>
+            <a:r>
               <a:rPr sz="1100" b="0">
                 <a:solidFill>
                   <a:srgbClr val="6F8F8F"/>
@@ -6783,21 +6819,21 @@
                 <a:latin typeface="Noto Sans SC"/>
                 <a:ea typeface="Noto Sans SC"/>
               </a:rPr>
-              <a:t>1</a:t>
-            </a:r>
-          </a:p>
-        </p:txBody>
-      </p:sp>
-      <p:sp>
-        <p:nvSpPr>
-          <p:cNvPr id="20" name="TextBox 19"/>
-          <p:cNvSpPr txBox="1"/>
-          <p:nvPr/>
-        </p:nvSpPr>
-        <p:spPr>
-          <a:xfrm>
-            <a:off x="6379210" y="1723644"/>
-            <a:ext cx="1714169" cy="240030"/>
+              <a:t>2</a:t>
+            </a:r>
+          </a:p>
+        </p:txBody>
+      </p:sp>
+      <p:sp>
+        <p:nvSpPr>
+          <p:cNvPr id="23" name="TextBox 22"/>
+          <p:cNvSpPr txBox="1"/>
+          <p:nvPr/>
+        </p:nvSpPr>
+        <p:spPr>
+          <a:xfrm>
+            <a:off x="6379210" y="2130044"/>
+            <a:ext cx="182880" cy="240030"/>
           </a:xfrm>
           <a:prstGeom prst="rect">
             <a:avLst/>
@@ -6819,21 +6855,21 @@
                 <a:latin typeface="Noto Sans SC"/>
                 <a:ea typeface="Noto Sans SC"/>
               </a:rPr>
-              <a:t>repeat:                      # </a:t>
-            </a:r>
-          </a:p>
-        </p:txBody>
-      </p:sp>
-      <p:sp>
-        <p:nvSpPr>
-          <p:cNvPr id="21" name="TextBox 20"/>
-          <p:cNvSpPr txBox="1"/>
-          <p:nvPr/>
-        </p:nvSpPr>
-        <p:spPr>
-          <a:xfrm>
-            <a:off x="7986699" y="1723644"/>
-            <a:ext cx="817880" cy="240030"/>
+              <a:t>  </a:t>
+            </a:r>
+          </a:p>
+        </p:txBody>
+      </p:sp>
+      <p:sp>
+        <p:nvSpPr>
+          <p:cNvPr id="24" name="TextBox 23"/>
+          <p:cNvSpPr txBox="1"/>
+          <p:nvPr/>
+        </p:nvSpPr>
+        <p:spPr>
+          <a:xfrm>
+            <a:off x="6455410" y="2130044"/>
+            <a:ext cx="2240280" cy="240030"/>
           </a:xfrm>
           <a:prstGeom prst="rect">
             <a:avLst/>
@@ -6855,21 +6891,21 @@
                 <a:latin typeface="Noto Sans SC"/>
                 <a:ea typeface="Noto Sans SC"/>
               </a:rPr>
-              <a:t>每次一轮</a:t>
-            </a:r>
-          </a:p>
-        </p:txBody>
-      </p:sp>
-      <p:sp>
-        <p:nvSpPr>
-          <p:cNvPr id="22" name="TextBox 21"/>
-          <p:cNvSpPr txBox="1"/>
-          <p:nvPr/>
-        </p:nvSpPr>
-        <p:spPr>
-          <a:xfrm>
-            <a:off x="8697899" y="1723644"/>
-            <a:ext cx="523265" cy="240030"/>
+              <a:t>从当前分组开始，全部解锁</a:t>
+            </a:r>
+          </a:p>
+        </p:txBody>
+      </p:sp>
+      <p:sp>
+        <p:nvSpPr>
+          <p:cNvPr id="25" name="TextBox 24"/>
+          <p:cNvSpPr txBox="1"/>
+          <p:nvPr/>
+        </p:nvSpPr>
+        <p:spPr>
+          <a:xfrm>
+            <a:off x="6089015" y="2575306"/>
+            <a:ext cx="160020" cy="188595"/>
           </a:xfrm>
           <a:prstGeom prst="rect">
             <a:avLst/>
@@ -6884,6 +6920,42 @@
           <a:p>
             <a:pPr algn="l"/>
             <a:r>
+              <a:rPr sz="1100" b="0">
+                <a:solidFill>
+                  <a:srgbClr val="6F8F8F"/>
+                </a:solidFill>
+                <a:latin typeface="Noto Sans SC"/>
+                <a:ea typeface="Noto Sans SC"/>
+              </a:rPr>
+              <a:t>3</a:t>
+            </a:r>
+          </a:p>
+        </p:txBody>
+      </p:sp>
+      <p:sp>
+        <p:nvSpPr>
+          <p:cNvPr id="26" name="TextBox 25"/>
+          <p:cNvSpPr txBox="1"/>
+          <p:nvPr/>
+        </p:nvSpPr>
+        <p:spPr>
+          <a:xfrm>
+            <a:off x="6379210" y="2536444"/>
+            <a:ext cx="671830" cy="240030"/>
+          </a:xfrm>
+          <a:prstGeom prst="rect">
+            <a:avLst/>
+          </a:prstGeom>
+          <a:noFill/>
+        </p:spPr>
+        <p:txBody>
+          <a:bodyPr wrap="none" lIns="0" rIns="0" tIns="0" bIns="0">
+            <a:spAutoFit/>
+          </a:bodyPr>
+          <a:lstStyle/>
+          <a:p>
+            <a:pPr algn="l"/>
+            <a:r>
               <a:rPr sz="1400" b="0">
                 <a:solidFill>
                   <a:srgbClr val="DFEADF"/>
@@ -6891,21 +6963,21 @@
                 <a:latin typeface="Noto Sans SC"/>
                 <a:ea typeface="Noto Sans SC"/>
               </a:rPr>
-              <a:t> pass</a:t>
-            </a:r>
-          </a:p>
-        </p:txBody>
-      </p:sp>
-      <p:sp>
-        <p:nvSpPr>
-          <p:cNvPr id="23" name="TextBox 22"/>
-          <p:cNvSpPr txBox="1"/>
-          <p:nvPr/>
-        </p:nvSpPr>
-        <p:spPr>
-          <a:xfrm>
-            <a:off x="6089015" y="2168906"/>
-            <a:ext cx="161353" cy="188595"/>
+              <a:t>  while </a:t>
+            </a:r>
+          </a:p>
+        </p:txBody>
+      </p:sp>
+      <p:sp>
+        <p:nvSpPr>
+          <p:cNvPr id="27" name="TextBox 26"/>
+          <p:cNvSpPr txBox="1"/>
+          <p:nvPr/>
+        </p:nvSpPr>
+        <p:spPr>
+          <a:xfrm>
+            <a:off x="6944359" y="2536444"/>
+            <a:ext cx="1706880" cy="240030"/>
           </a:xfrm>
           <a:prstGeom prst="rect">
             <a:avLst/>
@@ -6920,28 +6992,28 @@
           <a:p>
             <a:pPr algn="l"/>
             <a:r>
-              <a:rPr sz="1100" b="0">
-                <a:solidFill>
-                  <a:srgbClr val="6F8F8F"/>
-                </a:solidFill>
-                <a:latin typeface="Noto Sans SC"/>
-                <a:ea typeface="Noto Sans SC"/>
-              </a:rPr>
-              <a:t>2</a:t>
-            </a:r>
-          </a:p>
-        </p:txBody>
-      </p:sp>
-      <p:sp>
-        <p:nvSpPr>
-          <p:cNvPr id="24" name="TextBox 23"/>
-          <p:cNvSpPr txBox="1"/>
-          <p:nvPr/>
-        </p:nvSpPr>
-        <p:spPr>
-          <a:xfrm>
-            <a:off x="6379210" y="2130044"/>
-            <a:ext cx="186334" cy="240030"/>
+              <a:rPr sz="1400" b="0">
+                <a:solidFill>
+                  <a:srgbClr val="DFEADF"/>
+                </a:solidFill>
+                <a:latin typeface="Noto Sans SC"/>
+                <a:ea typeface="Noto Sans SC"/>
+              </a:rPr>
+              <a:t>两侧都有未锁定的点</a:t>
+            </a:r>
+          </a:p>
+        </p:txBody>
+      </p:sp>
+      <p:sp>
+        <p:nvSpPr>
+          <p:cNvPr id="28" name="TextBox 27"/>
+          <p:cNvSpPr txBox="1"/>
+          <p:nvPr/>
+        </p:nvSpPr>
+        <p:spPr>
+          <a:xfrm>
+            <a:off x="8544560" y="2536444"/>
+            <a:ext cx="157480" cy="240030"/>
           </a:xfrm>
           <a:prstGeom prst="rect">
             <a:avLst/>
@@ -6963,186 +7035,6 @@
                 <a:latin typeface="Noto Sans SC"/>
                 <a:ea typeface="Noto Sans SC"/>
               </a:rPr>
-              <a:t>  </a:t>
-            </a:r>
-          </a:p>
-        </p:txBody>
-      </p:sp>
-      <p:sp>
-        <p:nvSpPr>
-          <p:cNvPr id="25" name="TextBox 24"/>
-          <p:cNvSpPr txBox="1"/>
-          <p:nvPr/>
-        </p:nvSpPr>
-        <p:spPr>
-          <a:xfrm>
-            <a:off x="6458864" y="2130044"/>
-            <a:ext cx="2240280" cy="240030"/>
-          </a:xfrm>
-          <a:prstGeom prst="rect">
-            <a:avLst/>
-          </a:prstGeom>
-          <a:noFill/>
-        </p:spPr>
-        <p:txBody>
-          <a:bodyPr wrap="none" lIns="0" rIns="0" tIns="0" bIns="0">
-            <a:spAutoFit/>
-          </a:bodyPr>
-          <a:lstStyle/>
-          <a:p>
-            <a:pPr algn="l"/>
-            <a:r>
-              <a:rPr sz="1400" b="0">
-                <a:solidFill>
-                  <a:srgbClr val="DFEADF"/>
-                </a:solidFill>
-                <a:latin typeface="Noto Sans SC"/>
-                <a:ea typeface="Noto Sans SC"/>
-              </a:rPr>
-              <a:t>从当前分组开始，全部解锁</a:t>
-            </a:r>
-          </a:p>
-        </p:txBody>
-      </p:sp>
-      <p:sp>
-        <p:nvSpPr>
-          <p:cNvPr id="26" name="TextBox 25"/>
-          <p:cNvSpPr txBox="1"/>
-          <p:nvPr/>
-        </p:nvSpPr>
-        <p:spPr>
-          <a:xfrm>
-            <a:off x="6089015" y="2575306"/>
-            <a:ext cx="161353" cy="188595"/>
-          </a:xfrm>
-          <a:prstGeom prst="rect">
-            <a:avLst/>
-          </a:prstGeom>
-          <a:noFill/>
-        </p:spPr>
-        <p:txBody>
-          <a:bodyPr wrap="none" lIns="0" rIns="0" tIns="0" bIns="0">
-            <a:spAutoFit/>
-          </a:bodyPr>
-          <a:lstStyle/>
-          <a:p>
-            <a:pPr algn="l"/>
-            <a:r>
-              <a:rPr sz="1100" b="0">
-                <a:solidFill>
-                  <a:srgbClr val="6F8F8F"/>
-                </a:solidFill>
-                <a:latin typeface="Noto Sans SC"/>
-                <a:ea typeface="Noto Sans SC"/>
-              </a:rPr>
-              <a:t>3</a:t>
-            </a:r>
-          </a:p>
-        </p:txBody>
-      </p:sp>
-      <p:sp>
-        <p:nvSpPr>
-          <p:cNvPr id="27" name="TextBox 26"/>
-          <p:cNvSpPr txBox="1"/>
-          <p:nvPr/>
-        </p:nvSpPr>
-        <p:spPr>
-          <a:xfrm>
-            <a:off x="6379210" y="2536444"/>
-            <a:ext cx="674573" cy="240030"/>
-          </a:xfrm>
-          <a:prstGeom prst="rect">
-            <a:avLst/>
-          </a:prstGeom>
-          <a:noFill/>
-        </p:spPr>
-        <p:txBody>
-          <a:bodyPr wrap="none" lIns="0" rIns="0" tIns="0" bIns="0">
-            <a:spAutoFit/>
-          </a:bodyPr>
-          <a:lstStyle/>
-          <a:p>
-            <a:pPr algn="l"/>
-            <a:r>
-              <a:rPr sz="1400" b="0">
-                <a:solidFill>
-                  <a:srgbClr val="DFEADF"/>
-                </a:solidFill>
-                <a:latin typeface="Noto Sans SC"/>
-                <a:ea typeface="Noto Sans SC"/>
-              </a:rPr>
-              <a:t>  while </a:t>
-            </a:r>
-          </a:p>
-        </p:txBody>
-      </p:sp>
-      <p:sp>
-        <p:nvSpPr>
-          <p:cNvPr id="28" name="TextBox 27"/>
-          <p:cNvSpPr txBox="1"/>
-          <p:nvPr/>
-        </p:nvSpPr>
-        <p:spPr>
-          <a:xfrm>
-            <a:off x="6947103" y="2536444"/>
-            <a:ext cx="1706880" cy="240030"/>
-          </a:xfrm>
-          <a:prstGeom prst="rect">
-            <a:avLst/>
-          </a:prstGeom>
-          <a:noFill/>
-        </p:spPr>
-        <p:txBody>
-          <a:bodyPr wrap="none" lIns="0" rIns="0" tIns="0" bIns="0">
-            <a:spAutoFit/>
-          </a:bodyPr>
-          <a:lstStyle/>
-          <a:p>
-            <a:pPr algn="l"/>
-            <a:r>
-              <a:rPr sz="1400" b="0">
-                <a:solidFill>
-                  <a:srgbClr val="DFEADF"/>
-                </a:solidFill>
-                <a:latin typeface="Noto Sans SC"/>
-                <a:ea typeface="Noto Sans SC"/>
-              </a:rPr>
-              <a:t>两侧都有未锁定的点</a:t>
-            </a:r>
-          </a:p>
-        </p:txBody>
-      </p:sp>
-      <p:sp>
-        <p:nvSpPr>
-          <p:cNvPr id="29" name="TextBox 28"/>
-          <p:cNvSpPr txBox="1"/>
-          <p:nvPr/>
-        </p:nvSpPr>
-        <p:spPr>
-          <a:xfrm>
-            <a:off x="8547303" y="2536444"/>
-            <a:ext cx="156108" cy="240030"/>
-          </a:xfrm>
-          <a:prstGeom prst="rect">
-            <a:avLst/>
-          </a:prstGeom>
-          <a:noFill/>
-        </p:spPr>
-        <p:txBody>
-          <a:bodyPr wrap="none" lIns="0" rIns="0" tIns="0" bIns="0">
-            <a:spAutoFit/>
-          </a:bodyPr>
-          <a:lstStyle/>
-          <a:p>
-            <a:pPr algn="l"/>
-            <a:r>
-              <a:rPr sz="1400" b="0">
-                <a:solidFill>
-                  <a:srgbClr val="DFEADF"/>
-                </a:solidFill>
-                <a:latin typeface="Noto Sans SC"/>
-                <a:ea typeface="Noto Sans SC"/>
-              </a:rPr>
               <a:t>:</a:t>
             </a:r>
           </a:p>
@@ -7150,7 +7042,7 @@
       </p:sp>
       <p:sp>
         <p:nvSpPr>
-          <p:cNvPr id="30" name="Rectangle 29"/>
+          <p:cNvPr id="29" name="Rectangle 28"/>
           <p:cNvSpPr/>
           <p:nvPr/>
         </p:nvSpPr>
@@ -7192,7 +7084,7 @@
       </p:sp>
       <p:sp>
         <p:nvSpPr>
-          <p:cNvPr id="31" name="Rectangle 30"/>
+          <p:cNvPr id="30" name="Rectangle 29"/>
           <p:cNvSpPr/>
           <p:nvPr/>
         </p:nvSpPr>
@@ -7234,14 +7126,50 @@
       </p:sp>
       <p:sp>
         <p:nvSpPr>
+          <p:cNvPr id="31" name="TextBox 30"/>
+          <p:cNvSpPr txBox="1"/>
+          <p:nvPr/>
+        </p:nvSpPr>
+        <p:spPr>
+          <a:xfrm>
+            <a:off x="6089015" y="2981706"/>
+            <a:ext cx="160020" cy="188595"/>
+          </a:xfrm>
+          <a:prstGeom prst="rect">
+            <a:avLst/>
+          </a:prstGeom>
+          <a:noFill/>
+        </p:spPr>
+        <p:txBody>
+          <a:bodyPr wrap="none" lIns="0" rIns="0" tIns="0" bIns="0">
+            <a:spAutoFit/>
+          </a:bodyPr>
+          <a:lstStyle/>
+          <a:p>
+            <a:pPr algn="l"/>
+            <a:r>
+              <a:rPr sz="1100" b="0">
+                <a:solidFill>
+                  <a:srgbClr val="6F8F8F"/>
+                </a:solidFill>
+                <a:latin typeface="Noto Sans SC"/>
+                <a:ea typeface="Noto Sans SC"/>
+              </a:rPr>
+              <a:t>4</a:t>
+            </a:r>
+          </a:p>
+        </p:txBody>
+      </p:sp>
+      <p:sp>
+        <p:nvSpPr>
           <p:cNvPr id="32" name="TextBox 31"/>
           <p:cNvSpPr txBox="1"/>
           <p:nvPr/>
         </p:nvSpPr>
         <p:spPr>
           <a:xfrm>
-            <a:off x="6089015" y="2981706"/>
-            <a:ext cx="161353" cy="188595"/>
+            <a:off x="6379210" y="2942844"/>
+            <a:ext cx="259079" cy="240030"/>
           </a:xfrm>
           <a:prstGeom prst="rect">
             <a:avLst/>
@@ -7256,14 +7184,14 @@
           <a:p>
             <a:pPr algn="l"/>
             <a:r>
-              <a:rPr sz="1100" b="0">
-                <a:solidFill>
-                  <a:srgbClr val="6F8F8F"/>
-                </a:solidFill>
-                <a:latin typeface="Noto Sans SC"/>
-                <a:ea typeface="Noto Sans SC"/>
-              </a:rPr>
-              <a:t>4</a:t>
+              <a:rPr sz="1400" b="0">
+                <a:solidFill>
+                  <a:srgbClr val="D8BB78"/>
+                </a:solidFill>
+                <a:latin typeface="Noto Sans SC"/>
+                <a:ea typeface="Noto Sans SC"/>
+              </a:rPr>
+              <a:t>    </a:t>
             </a:r>
           </a:p>
         </p:txBody>
@@ -7276,8 +7204,8 @@
         </p:nvSpPr>
         <p:spPr>
           <a:xfrm>
-            <a:off x="6379210" y="2942844"/>
-            <a:ext cx="265988" cy="240030"/>
+            <a:off x="6531609" y="2942844"/>
+            <a:ext cx="995680" cy="240030"/>
           </a:xfrm>
           <a:prstGeom prst="rect">
             <a:avLst/>
@@ -7299,7 +7227,7 @@
                 <a:latin typeface="Noto Sans SC"/>
                 <a:ea typeface="Noto Sans SC"/>
               </a:rPr>
-              <a:t>    </a:t>
+              <a:t>在未锁定的</a:t>
             </a:r>
           </a:p>
         </p:txBody>
@@ -7312,7 +7240,115 @@
         </p:nvSpPr>
         <p:spPr>
           <a:xfrm>
-            <a:off x="6538518" y="2942844"/>
+            <a:off x="7420609" y="2942844"/>
+            <a:ext cx="595630" cy="240030"/>
+          </a:xfrm>
+          <a:prstGeom prst="rect">
+            <a:avLst/>
+          </a:prstGeom>
+          <a:noFill/>
+        </p:spPr>
+        <p:txBody>
+          <a:bodyPr wrap="none" lIns="0" rIns="0" tIns="0" bIns="0">
+            <a:spAutoFit/>
+          </a:bodyPr>
+          <a:lstStyle/>
+          <a:p>
+            <a:pPr algn="l"/>
+            <a:r>
+              <a:rPr sz="1400" b="0">
+                <a:solidFill>
+                  <a:srgbClr val="D8BB78"/>
+                </a:solidFill>
+                <a:latin typeface="Noto Sans SC"/>
+                <a:ea typeface="Noto Sans SC"/>
+              </a:rPr>
+              <a:t> (a, b) </a:t>
+            </a:r>
+          </a:p>
+        </p:txBody>
+      </p:sp>
+      <p:sp>
+        <p:nvSpPr>
+          <p:cNvPr id="35" name="TextBox 34"/>
+          <p:cNvSpPr txBox="1"/>
+          <p:nvPr/>
+        </p:nvSpPr>
+        <p:spPr>
+          <a:xfrm>
+            <a:off x="7909559" y="2942844"/>
+            <a:ext cx="462280" cy="240030"/>
+          </a:xfrm>
+          <a:prstGeom prst="rect">
+            <a:avLst/>
+          </a:prstGeom>
+          <a:noFill/>
+        </p:spPr>
+        <p:txBody>
+          <a:bodyPr wrap="none" lIns="0" rIns="0" tIns="0" bIns="0">
+            <a:spAutoFit/>
+          </a:bodyPr>
+          <a:lstStyle/>
+          <a:p>
+            <a:pPr algn="l"/>
+            <a:r>
+              <a:rPr sz="1400" b="0">
+                <a:solidFill>
+                  <a:srgbClr val="D8BB78"/>
+                </a:solidFill>
+                <a:latin typeface="Noto Sans SC"/>
+                <a:ea typeface="Noto Sans SC"/>
+              </a:rPr>
+              <a:t>中选</a:t>
+            </a:r>
+          </a:p>
+        </p:txBody>
+      </p:sp>
+      <p:sp>
+        <p:nvSpPr>
+          <p:cNvPr id="36" name="TextBox 35"/>
+          <p:cNvSpPr txBox="1"/>
+          <p:nvPr/>
+        </p:nvSpPr>
+        <p:spPr>
+          <a:xfrm>
+            <a:off x="8265159" y="2942844"/>
+            <a:ext cx="284480" cy="240030"/>
+          </a:xfrm>
+          <a:prstGeom prst="rect">
+            <a:avLst/>
+          </a:prstGeom>
+          <a:noFill/>
+        </p:spPr>
+        <p:txBody>
+          <a:bodyPr wrap="none" lIns="0" rIns="0" tIns="0" bIns="0">
+            <a:spAutoFit/>
+          </a:bodyPr>
+          <a:lstStyle/>
+          <a:p>
+            <a:pPr algn="l"/>
+            <a:r>
+              <a:rPr sz="1400" b="0">
+                <a:solidFill>
+                  <a:srgbClr val="D8BB78"/>
+                </a:solidFill>
+                <a:latin typeface="Noto Sans SC"/>
+                <a:ea typeface="Noto Sans SC"/>
+              </a:rPr>
+              <a:t> g </a:t>
+            </a:r>
+          </a:p>
+        </p:txBody>
+      </p:sp>
+      <p:sp>
+        <p:nvSpPr>
+          <p:cNvPr id="37" name="TextBox 36"/>
+          <p:cNvSpPr txBox="1"/>
+          <p:nvPr/>
+        </p:nvSpPr>
+        <p:spPr>
+          <a:xfrm>
+            <a:off x="8442960" y="2942844"/>
             <a:ext cx="995680" cy="240030"/>
           </a:xfrm>
           <a:prstGeom prst="rect">
@@ -7335,150 +7371,6 @@
                 <a:latin typeface="Noto Sans SC"/>
                 <a:ea typeface="Noto Sans SC"/>
               </a:rPr>
-              <a:t>在未锁定的</a:t>
-            </a:r>
-          </a:p>
-        </p:txBody>
-      </p:sp>
-      <p:sp>
-        <p:nvSpPr>
-          <p:cNvPr id="35" name="TextBox 34"/>
-          <p:cNvSpPr txBox="1"/>
-          <p:nvPr/>
-        </p:nvSpPr>
-        <p:spPr>
-          <a:xfrm>
-            <a:off x="7427518" y="2942844"/>
-            <a:ext cx="605764" cy="240030"/>
-          </a:xfrm>
-          <a:prstGeom prst="rect">
-            <a:avLst/>
-          </a:prstGeom>
-          <a:noFill/>
-        </p:spPr>
-        <p:txBody>
-          <a:bodyPr wrap="none" lIns="0" rIns="0" tIns="0" bIns="0">
-            <a:spAutoFit/>
-          </a:bodyPr>
-          <a:lstStyle/>
-          <a:p>
-            <a:pPr algn="l"/>
-            <a:r>
-              <a:rPr sz="1400" b="0">
-                <a:solidFill>
-                  <a:srgbClr val="D8BB78"/>
-                </a:solidFill>
-                <a:latin typeface="Noto Sans SC"/>
-                <a:ea typeface="Noto Sans SC"/>
-              </a:rPr>
-              <a:t> (a, b) </a:t>
-            </a:r>
-          </a:p>
-        </p:txBody>
-      </p:sp>
-      <p:sp>
-        <p:nvSpPr>
-          <p:cNvPr id="36" name="TextBox 35"/>
-          <p:cNvSpPr txBox="1"/>
-          <p:nvPr/>
-        </p:nvSpPr>
-        <p:spPr>
-          <a:xfrm>
-            <a:off x="7926603" y="2942844"/>
-            <a:ext cx="462280" cy="240030"/>
-          </a:xfrm>
-          <a:prstGeom prst="rect">
-            <a:avLst/>
-          </a:prstGeom>
-          <a:noFill/>
-        </p:spPr>
-        <p:txBody>
-          <a:bodyPr wrap="none" lIns="0" rIns="0" tIns="0" bIns="0">
-            <a:spAutoFit/>
-          </a:bodyPr>
-          <a:lstStyle/>
-          <a:p>
-            <a:pPr algn="l"/>
-            <a:r>
-              <a:rPr sz="1400" b="0">
-                <a:solidFill>
-                  <a:srgbClr val="D8BB78"/>
-                </a:solidFill>
-                <a:latin typeface="Noto Sans SC"/>
-                <a:ea typeface="Noto Sans SC"/>
-              </a:rPr>
-              <a:t>中选</a:t>
-            </a:r>
-          </a:p>
-        </p:txBody>
-      </p:sp>
-      <p:sp>
-        <p:nvSpPr>
-          <p:cNvPr id="37" name="TextBox 36"/>
-          <p:cNvSpPr txBox="1"/>
-          <p:nvPr/>
-        </p:nvSpPr>
-        <p:spPr>
-          <a:xfrm>
-            <a:off x="8282203" y="2942844"/>
-            <a:ext cx="286613" cy="240030"/>
-          </a:xfrm>
-          <a:prstGeom prst="rect">
-            <a:avLst/>
-          </a:prstGeom>
-          <a:noFill/>
-        </p:spPr>
-        <p:txBody>
-          <a:bodyPr wrap="none" lIns="0" rIns="0" tIns="0" bIns="0">
-            <a:spAutoFit/>
-          </a:bodyPr>
-          <a:lstStyle/>
-          <a:p>
-            <a:pPr algn="l"/>
-            <a:r>
-              <a:rPr sz="1400" b="0">
-                <a:solidFill>
-                  <a:srgbClr val="D8BB78"/>
-                </a:solidFill>
-                <a:latin typeface="Noto Sans SC"/>
-                <a:ea typeface="Noto Sans SC"/>
-              </a:rPr>
-              <a:t> g </a:t>
-            </a:r>
-          </a:p>
-        </p:txBody>
-      </p:sp>
-      <p:sp>
-        <p:nvSpPr>
-          <p:cNvPr id="38" name="TextBox 37"/>
-          <p:cNvSpPr txBox="1"/>
-          <p:nvPr/>
-        </p:nvSpPr>
-        <p:spPr>
-          <a:xfrm>
-            <a:off x="8462137" y="2942844"/>
-            <a:ext cx="995680" cy="240030"/>
-          </a:xfrm>
-          <a:prstGeom prst="rect">
-            <a:avLst/>
-          </a:prstGeom>
-          <a:noFill/>
-        </p:spPr>
-        <p:txBody>
-          <a:bodyPr wrap="none" lIns="0" rIns="0" tIns="0" bIns="0">
-            <a:spAutoFit/>
-          </a:bodyPr>
-          <a:lstStyle/>
-          <a:p>
-            <a:pPr algn="l"/>
-            <a:r>
-              <a:rPr sz="1400" b="0">
-                <a:solidFill>
-                  <a:srgbClr val="D8BB78"/>
-                </a:solidFill>
-                <a:latin typeface="Noto Sans SC"/>
-                <a:ea typeface="Noto Sans SC"/>
-              </a:rPr>
               <a:t>最大的一对</a:t>
             </a:r>
           </a:p>
@@ -7486,7 +7378,7 @@
       </p:sp>
       <p:sp>
         <p:nvSpPr>
-          <p:cNvPr id="39" name="Rectangle 38"/>
+          <p:cNvPr id="38" name="Rectangle 37"/>
           <p:cNvSpPr/>
           <p:nvPr/>
         </p:nvSpPr>
@@ -7528,7 +7420,7 @@
       </p:sp>
       <p:sp>
         <p:nvSpPr>
-          <p:cNvPr id="40" name="Rectangle 39"/>
+          <p:cNvPr id="39" name="Rectangle 38"/>
           <p:cNvSpPr/>
           <p:nvPr/>
         </p:nvSpPr>
@@ -7570,14 +7462,50 @@
       </p:sp>
       <p:sp>
         <p:nvSpPr>
+          <p:cNvPr id="40" name="TextBox 39"/>
+          <p:cNvSpPr txBox="1"/>
+          <p:nvPr/>
+        </p:nvSpPr>
+        <p:spPr>
+          <a:xfrm>
+            <a:off x="6089015" y="3388105"/>
+            <a:ext cx="160020" cy="188595"/>
+          </a:xfrm>
+          <a:prstGeom prst="rect">
+            <a:avLst/>
+          </a:prstGeom>
+          <a:noFill/>
+        </p:spPr>
+        <p:txBody>
+          <a:bodyPr wrap="none" lIns="0" rIns="0" tIns="0" bIns="0">
+            <a:spAutoFit/>
+          </a:bodyPr>
+          <a:lstStyle/>
+          <a:p>
+            <a:pPr algn="l"/>
+            <a:r>
+              <a:rPr sz="1100" b="0">
+                <a:solidFill>
+                  <a:srgbClr val="6F8F8F"/>
+                </a:solidFill>
+                <a:latin typeface="Noto Sans SC"/>
+                <a:ea typeface="Noto Sans SC"/>
+              </a:rPr>
+              <a:t>5</a:t>
+            </a:r>
+          </a:p>
+        </p:txBody>
+      </p:sp>
+      <p:sp>
+        <p:nvSpPr>
           <p:cNvPr id="41" name="TextBox 40"/>
           <p:cNvSpPr txBox="1"/>
           <p:nvPr/>
         </p:nvSpPr>
         <p:spPr>
           <a:xfrm>
-            <a:off x="6089015" y="3388105"/>
-            <a:ext cx="161353" cy="188595"/>
+            <a:off x="6379210" y="3349244"/>
+            <a:ext cx="259079" cy="240030"/>
           </a:xfrm>
           <a:prstGeom prst="rect">
             <a:avLst/>
@@ -7592,6 +7520,186 @@
           <a:p>
             <a:pPr algn="l"/>
             <a:r>
+              <a:rPr sz="1400" b="0">
+                <a:solidFill>
+                  <a:srgbClr val="D8BB78"/>
+                </a:solidFill>
+                <a:latin typeface="Noto Sans SC"/>
+                <a:ea typeface="Noto Sans SC"/>
+              </a:rPr>
+              <a:t>    </a:t>
+            </a:r>
+          </a:p>
+        </p:txBody>
+      </p:sp>
+      <p:sp>
+        <p:nvSpPr>
+          <p:cNvPr id="42" name="TextBox 41"/>
+          <p:cNvSpPr txBox="1"/>
+          <p:nvPr/>
+        </p:nvSpPr>
+        <p:spPr>
+          <a:xfrm>
+            <a:off x="6531609" y="3349244"/>
+            <a:ext cx="462280" cy="240030"/>
+          </a:xfrm>
+          <a:prstGeom prst="rect">
+            <a:avLst/>
+          </a:prstGeom>
+          <a:noFill/>
+        </p:spPr>
+        <p:txBody>
+          <a:bodyPr wrap="none" lIns="0" rIns="0" tIns="0" bIns="0">
+            <a:spAutoFit/>
+          </a:bodyPr>
+          <a:lstStyle/>
+          <a:p>
+            <a:pPr algn="l"/>
+            <a:r>
+              <a:rPr sz="1400" b="0">
+                <a:solidFill>
+                  <a:srgbClr val="D8BB78"/>
+                </a:solidFill>
+                <a:latin typeface="Noto Sans SC"/>
+                <a:ea typeface="Noto Sans SC"/>
+              </a:rPr>
+              <a:t>交换</a:t>
+            </a:r>
+          </a:p>
+        </p:txBody>
+      </p:sp>
+      <p:sp>
+        <p:nvSpPr>
+          <p:cNvPr id="43" name="TextBox 42"/>
+          <p:cNvSpPr txBox="1"/>
+          <p:nvPr/>
+        </p:nvSpPr>
+        <p:spPr>
+          <a:xfrm>
+            <a:off x="6887209" y="3349244"/>
+            <a:ext cx="443230" cy="240030"/>
+          </a:xfrm>
+          <a:prstGeom prst="rect">
+            <a:avLst/>
+          </a:prstGeom>
+          <a:noFill/>
+        </p:spPr>
+        <p:txBody>
+          <a:bodyPr wrap="none" lIns="0" rIns="0" tIns="0" bIns="0">
+            <a:spAutoFit/>
+          </a:bodyPr>
+          <a:lstStyle/>
+          <a:p>
+            <a:pPr algn="l"/>
+            <a:r>
+              <a:rPr sz="1400" b="0">
+                <a:solidFill>
+                  <a:srgbClr val="D8BB78"/>
+                </a:solidFill>
+                <a:latin typeface="Noto Sans SC"/>
+                <a:ea typeface="Noto Sans SC"/>
+              </a:rPr>
+              <a:t> a, b</a:t>
+            </a:r>
+          </a:p>
+        </p:txBody>
+      </p:sp>
+      <p:sp>
+        <p:nvSpPr>
+          <p:cNvPr id="44" name="TextBox 43"/>
+          <p:cNvSpPr txBox="1"/>
+          <p:nvPr/>
+        </p:nvSpPr>
+        <p:spPr>
+          <a:xfrm>
+            <a:off x="7223759" y="3349244"/>
+            <a:ext cx="1884680" cy="240030"/>
+          </a:xfrm>
+          <a:prstGeom prst="rect">
+            <a:avLst/>
+          </a:prstGeom>
+          <a:noFill/>
+        </p:spPr>
+        <p:txBody>
+          <a:bodyPr wrap="none" lIns="0" rIns="0" tIns="0" bIns="0">
+            <a:spAutoFit/>
+          </a:bodyPr>
+          <a:lstStyle/>
+          <a:p>
+            <a:pPr algn="l"/>
+            <a:r>
+              <a:rPr sz="1400" b="0">
+                <a:solidFill>
+                  <a:srgbClr val="D8BB78"/>
+                </a:solidFill>
+                <a:latin typeface="Noto Sans SC"/>
+                <a:ea typeface="Noto Sans SC"/>
+              </a:rPr>
+              <a:t>（试探），锁定，更新</a:t>
+            </a:r>
+          </a:p>
+        </p:txBody>
+      </p:sp>
+      <p:sp>
+        <p:nvSpPr>
+          <p:cNvPr id="45" name="TextBox 44"/>
+          <p:cNvSpPr txBox="1"/>
+          <p:nvPr/>
+        </p:nvSpPr>
+        <p:spPr>
+          <a:xfrm>
+            <a:off x="9001760" y="3349244"/>
+            <a:ext cx="265430" cy="240030"/>
+          </a:xfrm>
+          <a:prstGeom prst="rect">
+            <a:avLst/>
+          </a:prstGeom>
+          <a:noFill/>
+        </p:spPr>
+        <p:txBody>
+          <a:bodyPr wrap="none" lIns="0" rIns="0" tIns="0" bIns="0">
+            <a:spAutoFit/>
+          </a:bodyPr>
+          <a:lstStyle/>
+          <a:p>
+            <a:pPr algn="l"/>
+            <a:r>
+              <a:rPr sz="1400" b="0">
+                <a:solidFill>
+                  <a:srgbClr val="D8BB78"/>
+                </a:solidFill>
+                <a:latin typeface="Noto Sans SC"/>
+                <a:ea typeface="Noto Sans SC"/>
+              </a:rPr>
+              <a:t> D</a:t>
+            </a:r>
+          </a:p>
+        </p:txBody>
+      </p:sp>
+      <p:sp>
+        <p:nvSpPr>
+          <p:cNvPr id="46" name="TextBox 45"/>
+          <p:cNvSpPr txBox="1"/>
+          <p:nvPr/>
+        </p:nvSpPr>
+        <p:spPr>
+          <a:xfrm>
+            <a:off x="6089015" y="3794505"/>
+            <a:ext cx="160020" cy="188595"/>
+          </a:xfrm>
+          <a:prstGeom prst="rect">
+            <a:avLst/>
+          </a:prstGeom>
+          <a:noFill/>
+        </p:spPr>
+        <p:txBody>
+          <a:bodyPr wrap="none" lIns="0" rIns="0" tIns="0" bIns="0">
+            <a:spAutoFit/>
+          </a:bodyPr>
+          <a:lstStyle/>
+          <a:p>
+            <a:pPr algn="l"/>
+            <a:r>
               <a:rPr sz="1100" b="0">
                 <a:solidFill>
                   <a:srgbClr val="6F8F8F"/>
@@ -7599,21 +7707,21 @@
                 <a:latin typeface="Noto Sans SC"/>
                 <a:ea typeface="Noto Sans SC"/>
               </a:rPr>
-              <a:t>5</a:t>
-            </a:r>
-          </a:p>
-        </p:txBody>
-      </p:sp>
-      <p:sp>
-        <p:nvSpPr>
-          <p:cNvPr id="42" name="TextBox 41"/>
-          <p:cNvSpPr txBox="1"/>
-          <p:nvPr/>
-        </p:nvSpPr>
-        <p:spPr>
-          <a:xfrm>
-            <a:off x="6379210" y="3349244"/>
-            <a:ext cx="265988" cy="240030"/>
+              <a:t>6</a:t>
+            </a:r>
+          </a:p>
+        </p:txBody>
+      </p:sp>
+      <p:sp>
+        <p:nvSpPr>
+          <p:cNvPr id="47" name="TextBox 46"/>
+          <p:cNvSpPr txBox="1"/>
+          <p:nvPr/>
+        </p:nvSpPr>
+        <p:spPr>
+          <a:xfrm>
+            <a:off x="6379210" y="3755644"/>
+            <a:ext cx="182880" cy="240030"/>
           </a:xfrm>
           <a:prstGeom prst="rect">
             <a:avLst/>
@@ -7630,26 +7738,26 @@
             <a:r>
               <a:rPr sz="1400" b="0">
                 <a:solidFill>
-                  <a:srgbClr val="D8BB78"/>
-                </a:solidFill>
-                <a:latin typeface="Noto Sans SC"/>
-                <a:ea typeface="Noto Sans SC"/>
-              </a:rPr>
-              <a:t>    </a:t>
-            </a:r>
-          </a:p>
-        </p:txBody>
-      </p:sp>
-      <p:sp>
-        <p:nvSpPr>
-          <p:cNvPr id="43" name="TextBox 42"/>
-          <p:cNvSpPr txBox="1"/>
-          <p:nvPr/>
-        </p:nvSpPr>
-        <p:spPr>
-          <a:xfrm>
-            <a:off x="6538518" y="3349244"/>
-            <a:ext cx="462280" cy="240030"/>
+                  <a:srgbClr val="DFEADF"/>
+                </a:solidFill>
+                <a:latin typeface="Noto Sans SC"/>
+                <a:ea typeface="Noto Sans SC"/>
+              </a:rPr>
+              <a:t>  </a:t>
+            </a:r>
+          </a:p>
+        </p:txBody>
+      </p:sp>
+      <p:sp>
+        <p:nvSpPr>
+          <p:cNvPr id="48" name="TextBox 47"/>
+          <p:cNvSpPr txBox="1"/>
+          <p:nvPr/>
+        </p:nvSpPr>
+        <p:spPr>
+          <a:xfrm>
+            <a:off x="6455410" y="3755644"/>
+            <a:ext cx="1884680" cy="240030"/>
           </a:xfrm>
           <a:prstGeom prst="rect">
             <a:avLst/>
@@ -7666,26 +7774,26 @@
             <a:r>
               <a:rPr sz="1400" b="0">
                 <a:solidFill>
-                  <a:srgbClr val="D8BB78"/>
-                </a:solidFill>
-                <a:latin typeface="Noto Sans SC"/>
-                <a:ea typeface="Noto Sans SC"/>
-              </a:rPr>
-              <a:t>交换</a:t>
-            </a:r>
-          </a:p>
-        </p:txBody>
-      </p:sp>
-      <p:sp>
-        <p:nvSpPr>
-          <p:cNvPr id="44" name="TextBox 43"/>
-          <p:cNvSpPr txBox="1"/>
-          <p:nvPr/>
-        </p:nvSpPr>
-        <p:spPr>
-          <a:xfrm>
-            <a:off x="6894118" y="3349244"/>
-            <a:ext cx="445744" cy="240030"/>
+                  <a:srgbClr val="DFEADF"/>
+                </a:solidFill>
+                <a:latin typeface="Noto Sans SC"/>
+                <a:ea typeface="Noto Sans SC"/>
+              </a:rPr>
+              <a:t>取累计收益最大的前缀</a:t>
+            </a:r>
+          </a:p>
+        </p:txBody>
+      </p:sp>
+      <p:sp>
+        <p:nvSpPr>
+          <p:cNvPr id="49" name="TextBox 48"/>
+          <p:cNvSpPr txBox="1"/>
+          <p:nvPr/>
+        </p:nvSpPr>
+        <p:spPr>
+          <a:xfrm>
+            <a:off x="8233409" y="3755644"/>
+            <a:ext cx="240029" cy="240030"/>
           </a:xfrm>
           <a:prstGeom prst="rect">
             <a:avLst/>
@@ -7702,26 +7810,26 @@
             <a:r>
               <a:rPr sz="1400" b="0">
                 <a:solidFill>
-                  <a:srgbClr val="D8BB78"/>
-                </a:solidFill>
-                <a:latin typeface="Noto Sans SC"/>
-                <a:ea typeface="Noto Sans SC"/>
-              </a:rPr>
-              <a:t> a, b</a:t>
-            </a:r>
-          </a:p>
-        </p:txBody>
-      </p:sp>
-      <p:sp>
-        <p:nvSpPr>
-          <p:cNvPr id="45" name="TextBox 44"/>
-          <p:cNvSpPr txBox="1"/>
-          <p:nvPr/>
-        </p:nvSpPr>
-        <p:spPr>
-          <a:xfrm>
-            <a:off x="7233183" y="3349244"/>
-            <a:ext cx="1884680" cy="240030"/>
+                  <a:srgbClr val="DFEADF"/>
+                </a:solidFill>
+                <a:latin typeface="Noto Sans SC"/>
+                <a:ea typeface="Noto Sans SC"/>
+              </a:rPr>
+              <a:t> k</a:t>
+            </a:r>
+          </a:p>
+        </p:txBody>
+      </p:sp>
+      <p:sp>
+        <p:nvSpPr>
+          <p:cNvPr id="50" name="TextBox 49"/>
+          <p:cNvSpPr txBox="1"/>
+          <p:nvPr/>
+        </p:nvSpPr>
+        <p:spPr>
+          <a:xfrm>
+            <a:off x="8366759" y="3755644"/>
+            <a:ext cx="640080" cy="240030"/>
           </a:xfrm>
           <a:prstGeom prst="rect">
             <a:avLst/>
@@ -7738,26 +7846,26 @@
             <a:r>
               <a:rPr sz="1400" b="0">
                 <a:solidFill>
-                  <a:srgbClr val="D8BB78"/>
-                </a:solidFill>
-                <a:latin typeface="Noto Sans SC"/>
-                <a:ea typeface="Noto Sans SC"/>
-              </a:rPr>
-              <a:t>（试探），锁定，更新</a:t>
-            </a:r>
-          </a:p>
-        </p:txBody>
-      </p:sp>
-      <p:sp>
-        <p:nvSpPr>
-          <p:cNvPr id="46" name="TextBox 45"/>
-          <p:cNvSpPr txBox="1"/>
-          <p:nvPr/>
-        </p:nvSpPr>
-        <p:spPr>
-          <a:xfrm>
-            <a:off x="9011183" y="3349244"/>
-            <a:ext cx="268833" cy="240030"/>
+                  <a:srgbClr val="DFEADF"/>
+                </a:solidFill>
+                <a:latin typeface="Noto Sans SC"/>
+                <a:ea typeface="Noto Sans SC"/>
+              </a:rPr>
+              <a:t>（允许</a:t>
+            </a:r>
+          </a:p>
+        </p:txBody>
+      </p:sp>
+      <p:sp>
+        <p:nvSpPr>
+          <p:cNvPr id="51" name="TextBox 50"/>
+          <p:cNvSpPr txBox="1"/>
+          <p:nvPr/>
+        </p:nvSpPr>
+        <p:spPr>
+          <a:xfrm>
+            <a:off x="8900160" y="3755644"/>
+            <a:ext cx="519430" cy="240030"/>
           </a:xfrm>
           <a:prstGeom prst="rect">
             <a:avLst/>
@@ -7774,26 +7882,26 @@
             <a:r>
               <a:rPr sz="1400" b="0">
                 <a:solidFill>
-                  <a:srgbClr val="D8BB78"/>
-                </a:solidFill>
-                <a:latin typeface="Noto Sans SC"/>
-                <a:ea typeface="Noto Sans SC"/>
-              </a:rPr>
-              <a:t> D</a:t>
-            </a:r>
-          </a:p>
-        </p:txBody>
-      </p:sp>
-      <p:sp>
-        <p:nvSpPr>
-          <p:cNvPr id="47" name="TextBox 46"/>
-          <p:cNvSpPr txBox="1"/>
-          <p:nvPr/>
-        </p:nvSpPr>
-        <p:spPr>
-          <a:xfrm>
-            <a:off x="6089015" y="3794505"/>
-            <a:ext cx="161353" cy="188595"/>
+                  <a:srgbClr val="DFEADF"/>
+                </a:solidFill>
+                <a:latin typeface="Noto Sans SC"/>
+                <a:ea typeface="Noto Sans SC"/>
+              </a:rPr>
+              <a:t> k = 0</a:t>
+            </a:r>
+          </a:p>
+        </p:txBody>
+      </p:sp>
+      <p:sp>
+        <p:nvSpPr>
+          <p:cNvPr id="52" name="TextBox 51"/>
+          <p:cNvSpPr txBox="1"/>
+          <p:nvPr/>
+        </p:nvSpPr>
+        <p:spPr>
+          <a:xfrm>
+            <a:off x="9312910" y="3755644"/>
+            <a:ext cx="284480" cy="240030"/>
           </a:xfrm>
           <a:prstGeom prst="rect">
             <a:avLst/>
@@ -7808,6 +7916,42 @@
           <a:p>
             <a:pPr algn="l"/>
             <a:r>
+              <a:rPr sz="1400" b="0">
+                <a:solidFill>
+                  <a:srgbClr val="DFEADF"/>
+                </a:solidFill>
+                <a:latin typeface="Noto Sans SC"/>
+                <a:ea typeface="Noto Sans SC"/>
+              </a:rPr>
+              <a:t>）</a:t>
+            </a:r>
+          </a:p>
+        </p:txBody>
+      </p:sp>
+      <p:sp>
+        <p:nvSpPr>
+          <p:cNvPr id="53" name="TextBox 52"/>
+          <p:cNvSpPr txBox="1"/>
+          <p:nvPr/>
+        </p:nvSpPr>
+        <p:spPr>
+          <a:xfrm>
+            <a:off x="6089015" y="4200906"/>
+            <a:ext cx="160020" cy="188595"/>
+          </a:xfrm>
+          <a:prstGeom prst="rect">
+            <a:avLst/>
+          </a:prstGeom>
+          <a:noFill/>
+        </p:spPr>
+        <p:txBody>
+          <a:bodyPr wrap="none" lIns="0" rIns="0" tIns="0" bIns="0">
+            <a:spAutoFit/>
+          </a:bodyPr>
+          <a:lstStyle/>
+          <a:p>
+            <a:pPr algn="l"/>
+            <a:r>
               <a:rPr sz="1100" b="0">
                 <a:solidFill>
                   <a:srgbClr val="6F8F8F"/>
@@ -7815,21 +7959,21 @@
                 <a:latin typeface="Noto Sans SC"/>
                 <a:ea typeface="Noto Sans SC"/>
               </a:rPr>
-              <a:t>6</a:t>
-            </a:r>
-          </a:p>
-        </p:txBody>
-      </p:sp>
-      <p:sp>
-        <p:nvSpPr>
-          <p:cNvPr id="48" name="TextBox 47"/>
-          <p:cNvSpPr txBox="1"/>
-          <p:nvPr/>
-        </p:nvSpPr>
-        <p:spPr>
-          <a:xfrm>
-            <a:off x="6379210" y="3755644"/>
-            <a:ext cx="186334" cy="240030"/>
+              <a:t>7</a:t>
+            </a:r>
+          </a:p>
+        </p:txBody>
+      </p:sp>
+      <p:sp>
+        <p:nvSpPr>
+          <p:cNvPr id="54" name="TextBox 53"/>
+          <p:cNvSpPr txBox="1"/>
+          <p:nvPr/>
+        </p:nvSpPr>
+        <p:spPr>
+          <a:xfrm>
+            <a:off x="6379210" y="4162044"/>
+            <a:ext cx="182880" cy="240030"/>
           </a:xfrm>
           <a:prstGeom prst="rect">
             <a:avLst/>
@@ -7858,14 +8002,14 @@
       </p:sp>
       <p:sp>
         <p:nvSpPr>
-          <p:cNvPr id="49" name="TextBox 48"/>
-          <p:cNvSpPr txBox="1"/>
-          <p:nvPr/>
-        </p:nvSpPr>
-        <p:spPr>
-          <a:xfrm>
-            <a:off x="6458864" y="3755644"/>
-            <a:ext cx="1884680" cy="240030"/>
+          <p:cNvPr id="55" name="TextBox 54"/>
+          <p:cNvSpPr txBox="1"/>
+          <p:nvPr/>
+        </p:nvSpPr>
+        <p:spPr>
+          <a:xfrm>
+            <a:off x="6455410" y="4162044"/>
+            <a:ext cx="1706880" cy="240030"/>
           </a:xfrm>
           <a:prstGeom prst="rect">
             <a:avLst/>
@@ -7887,21 +8031,21 @@
                 <a:latin typeface="Noto Sans SC"/>
                 <a:ea typeface="Noto Sans SC"/>
               </a:rPr>
-              <a:t>取累计收益最大的前缀</a:t>
-            </a:r>
-          </a:p>
-        </p:txBody>
-      </p:sp>
-      <p:sp>
-        <p:nvSpPr>
-          <p:cNvPr id="50" name="TextBox 49"/>
-          <p:cNvSpPr txBox="1"/>
-          <p:nvPr/>
-        </p:nvSpPr>
-        <p:spPr>
-          <a:xfrm>
-            <a:off x="8236864" y="3755644"/>
-            <a:ext cx="244652" cy="240030"/>
+              <a:t>从本轮起点只应用前</a:t>
+            </a:r>
+          </a:p>
+        </p:txBody>
+      </p:sp>
+      <p:sp>
+        <p:nvSpPr>
+          <p:cNvPr id="56" name="TextBox 55"/>
+          <p:cNvSpPr txBox="1"/>
+          <p:nvPr/>
+        </p:nvSpPr>
+        <p:spPr>
+          <a:xfrm>
+            <a:off x="8055609" y="4162044"/>
+            <a:ext cx="278130" cy="240030"/>
           </a:xfrm>
           <a:prstGeom prst="rect">
             <a:avLst/>
@@ -7923,21 +8067,21 @@
                 <a:latin typeface="Noto Sans SC"/>
                 <a:ea typeface="Noto Sans SC"/>
               </a:rPr>
-              <a:t> k</a:t>
-            </a:r>
-          </a:p>
-        </p:txBody>
-      </p:sp>
-      <p:sp>
-        <p:nvSpPr>
-          <p:cNvPr id="51" name="TextBox 50"/>
-          <p:cNvSpPr txBox="1"/>
-          <p:nvPr/>
-        </p:nvSpPr>
-        <p:spPr>
-          <a:xfrm>
-            <a:off x="8374837" y="3755644"/>
-            <a:ext cx="640080" cy="240030"/>
+              <a:t> k </a:t>
+            </a:r>
+          </a:p>
+        </p:txBody>
+      </p:sp>
+      <p:sp>
+        <p:nvSpPr>
+          <p:cNvPr id="57" name="TextBox 56"/>
+          <p:cNvSpPr txBox="1"/>
+          <p:nvPr/>
+        </p:nvSpPr>
+        <p:spPr>
+          <a:xfrm>
+            <a:off x="8227059" y="4162044"/>
+            <a:ext cx="284480" cy="240030"/>
           </a:xfrm>
           <a:prstGeom prst="rect">
             <a:avLst/>
@@ -7959,21 +8103,21 @@
                 <a:latin typeface="Noto Sans SC"/>
                 <a:ea typeface="Noto Sans SC"/>
               </a:rPr>
-              <a:t>（允许</a:t>
-            </a:r>
-          </a:p>
-        </p:txBody>
-      </p:sp>
-      <p:sp>
-        <p:nvSpPr>
-          <p:cNvPr id="52" name="TextBox 51"/>
-          <p:cNvSpPr txBox="1"/>
-          <p:nvPr/>
-        </p:nvSpPr>
-        <p:spPr>
-          <a:xfrm>
-            <a:off x="8908237" y="3755644"/>
-            <a:ext cx="521665" cy="240030"/>
+              <a:t>步</a:t>
+            </a:r>
+          </a:p>
+        </p:txBody>
+      </p:sp>
+      <p:sp>
+        <p:nvSpPr>
+          <p:cNvPr id="58" name="TextBox 57"/>
+          <p:cNvSpPr txBox="1"/>
+          <p:nvPr/>
+        </p:nvSpPr>
+        <p:spPr>
+          <a:xfrm>
+            <a:off x="6089015" y="4607306"/>
+            <a:ext cx="160020" cy="188595"/>
           </a:xfrm>
           <a:prstGeom prst="rect">
             <a:avLst/>
@@ -7988,78 +8132,6 @@
           <a:p>
             <a:pPr algn="l"/>
             <a:r>
-              <a:rPr sz="1400" b="0">
-                <a:solidFill>
-                  <a:srgbClr val="DFEADF"/>
-                </a:solidFill>
-                <a:latin typeface="Noto Sans SC"/>
-                <a:ea typeface="Noto Sans SC"/>
-              </a:rPr>
-              <a:t> k = 0</a:t>
-            </a:r>
-          </a:p>
-        </p:txBody>
-      </p:sp>
-      <p:sp>
-        <p:nvSpPr>
-          <p:cNvPr id="53" name="TextBox 52"/>
-          <p:cNvSpPr txBox="1"/>
-          <p:nvPr/>
-        </p:nvSpPr>
-        <p:spPr>
-          <a:xfrm>
-            <a:off x="9323222" y="3755644"/>
-            <a:ext cx="284480" cy="240030"/>
-          </a:xfrm>
-          <a:prstGeom prst="rect">
-            <a:avLst/>
-          </a:prstGeom>
-          <a:noFill/>
-        </p:spPr>
-        <p:txBody>
-          <a:bodyPr wrap="none" lIns="0" rIns="0" tIns="0" bIns="0">
-            <a:spAutoFit/>
-          </a:bodyPr>
-          <a:lstStyle/>
-          <a:p>
-            <a:pPr algn="l"/>
-            <a:r>
-              <a:rPr sz="1400" b="0">
-                <a:solidFill>
-                  <a:srgbClr val="DFEADF"/>
-                </a:solidFill>
-                <a:latin typeface="Noto Sans SC"/>
-                <a:ea typeface="Noto Sans SC"/>
-              </a:rPr>
-              <a:t>）</a:t>
-            </a:r>
-          </a:p>
-        </p:txBody>
-      </p:sp>
-      <p:sp>
-        <p:nvSpPr>
-          <p:cNvPr id="54" name="TextBox 53"/>
-          <p:cNvSpPr txBox="1"/>
-          <p:nvPr/>
-        </p:nvSpPr>
-        <p:spPr>
-          <a:xfrm>
-            <a:off x="6089015" y="4200906"/>
-            <a:ext cx="161353" cy="188595"/>
-          </a:xfrm>
-          <a:prstGeom prst="rect">
-            <a:avLst/>
-          </a:prstGeom>
-          <a:noFill/>
-        </p:spPr>
-        <p:txBody>
-          <a:bodyPr wrap="none" lIns="0" rIns="0" tIns="0" bIns="0">
-            <a:spAutoFit/>
-          </a:bodyPr>
-          <a:lstStyle/>
-          <a:p>
-            <a:pPr algn="l"/>
-            <a:r>
               <a:rPr sz="1100" b="0">
                 <a:solidFill>
                   <a:srgbClr val="6F8F8F"/>
@@ -8067,151 +8139,7 @@
                 <a:latin typeface="Noto Sans SC"/>
                 <a:ea typeface="Noto Sans SC"/>
               </a:rPr>
-              <a:t>7</a:t>
-            </a:r>
-          </a:p>
-        </p:txBody>
-      </p:sp>
-      <p:sp>
-        <p:nvSpPr>
-          <p:cNvPr id="55" name="TextBox 54"/>
-          <p:cNvSpPr txBox="1"/>
-          <p:nvPr/>
-        </p:nvSpPr>
-        <p:spPr>
-          <a:xfrm>
-            <a:off x="6379210" y="4162044"/>
-            <a:ext cx="186334" cy="240030"/>
-          </a:xfrm>
-          <a:prstGeom prst="rect">
-            <a:avLst/>
-          </a:prstGeom>
-          <a:noFill/>
-        </p:spPr>
-        <p:txBody>
-          <a:bodyPr wrap="none" lIns="0" rIns="0" tIns="0" bIns="0">
-            <a:spAutoFit/>
-          </a:bodyPr>
-          <a:lstStyle/>
-          <a:p>
-            <a:pPr algn="l"/>
-            <a:r>
-              <a:rPr sz="1400" b="0">
-                <a:solidFill>
-                  <a:srgbClr val="DFEADF"/>
-                </a:solidFill>
-                <a:latin typeface="Noto Sans SC"/>
-                <a:ea typeface="Noto Sans SC"/>
-              </a:rPr>
-              <a:t>  </a:t>
-            </a:r>
-          </a:p>
-        </p:txBody>
-      </p:sp>
-      <p:sp>
-        <p:nvSpPr>
-          <p:cNvPr id="56" name="TextBox 55"/>
-          <p:cNvSpPr txBox="1"/>
-          <p:nvPr/>
-        </p:nvSpPr>
-        <p:spPr>
-          <a:xfrm>
-            <a:off x="6458864" y="4162044"/>
-            <a:ext cx="1706880" cy="240030"/>
-          </a:xfrm>
-          <a:prstGeom prst="rect">
-            <a:avLst/>
-          </a:prstGeom>
-          <a:noFill/>
-        </p:spPr>
-        <p:txBody>
-          <a:bodyPr wrap="none" lIns="0" rIns="0" tIns="0" bIns="0">
-            <a:spAutoFit/>
-          </a:bodyPr>
-          <a:lstStyle/>
-          <a:p>
-            <a:pPr algn="l"/>
-            <a:r>
-              <a:rPr sz="1400" b="0">
-                <a:solidFill>
-                  <a:srgbClr val="DFEADF"/>
-                </a:solidFill>
-                <a:latin typeface="Noto Sans SC"/>
-                <a:ea typeface="Noto Sans SC"/>
-              </a:rPr>
-              <a:t>从本轮起点只应用前</a:t>
-            </a:r>
-          </a:p>
-        </p:txBody>
-      </p:sp>
-      <p:sp>
-        <p:nvSpPr>
-          <p:cNvPr id="57" name="TextBox 56"/>
-          <p:cNvSpPr txBox="1"/>
-          <p:nvPr/>
-        </p:nvSpPr>
-        <p:spPr>
-          <a:xfrm>
-            <a:off x="8059064" y="4162044"/>
-            <a:ext cx="284480" cy="240030"/>
-          </a:xfrm>
-          <a:prstGeom prst="rect">
-            <a:avLst/>
-          </a:prstGeom>
-          <a:noFill/>
-        </p:spPr>
-        <p:txBody>
-          <a:bodyPr wrap="none" lIns="0" rIns="0" tIns="0" bIns="0">
-            <a:spAutoFit/>
-          </a:bodyPr>
-          <a:lstStyle/>
-          <a:p>
-            <a:pPr algn="l"/>
-            <a:r>
-              <a:rPr sz="1400" b="0">
-                <a:solidFill>
-                  <a:srgbClr val="DFEADF"/>
-                </a:solidFill>
-                <a:latin typeface="Noto Sans SC"/>
-                <a:ea typeface="Noto Sans SC"/>
-              </a:rPr>
-              <a:t> k </a:t>
-            </a:r>
-          </a:p>
-        </p:txBody>
-      </p:sp>
-      <p:sp>
-        <p:nvSpPr>
-          <p:cNvPr id="58" name="TextBox 57"/>
-          <p:cNvSpPr txBox="1"/>
-          <p:nvPr/>
-        </p:nvSpPr>
-        <p:spPr>
-          <a:xfrm>
-            <a:off x="8236864" y="4162044"/>
-            <a:ext cx="284480" cy="240030"/>
-          </a:xfrm>
-          <a:prstGeom prst="rect">
-            <a:avLst/>
-          </a:prstGeom>
-          <a:noFill/>
-        </p:spPr>
-        <p:txBody>
-          <a:bodyPr wrap="none" lIns="0" rIns="0" tIns="0" bIns="0">
-            <a:spAutoFit/>
-          </a:bodyPr>
-          <a:lstStyle/>
-          <a:p>
-            <a:pPr algn="l"/>
-            <a:r>
-              <a:rPr sz="1400" b="0">
-                <a:solidFill>
-                  <a:srgbClr val="DFEADF"/>
-                </a:solidFill>
-                <a:latin typeface="Noto Sans SC"/>
-                <a:ea typeface="Noto Sans SC"/>
-              </a:rPr>
-              <a:t>步</a:t>
+              <a:t>8</a:t>
             </a:r>
           </a:p>
         </p:txBody>
@@ -8224,44 +8152,8 @@
         </p:nvSpPr>
         <p:spPr>
           <a:xfrm>
-            <a:off x="6089015" y="4607306"/>
-            <a:ext cx="161353" cy="188595"/>
-          </a:xfrm>
-          <a:prstGeom prst="rect">
-            <a:avLst/>
-          </a:prstGeom>
-          <a:noFill/>
-        </p:spPr>
-        <p:txBody>
-          <a:bodyPr wrap="none" lIns="0" rIns="0" tIns="0" bIns="0">
-            <a:spAutoFit/>
-          </a:bodyPr>
-          <a:lstStyle/>
-          <a:p>
-            <a:pPr algn="l"/>
-            <a:r>
-              <a:rPr sz="1100" b="0">
-                <a:solidFill>
-                  <a:srgbClr val="6F8F8F"/>
-                </a:solidFill>
-                <a:latin typeface="Noto Sans SC"/>
-                <a:ea typeface="Noto Sans SC"/>
-              </a:rPr>
-              <a:t>8</a:t>
-            </a:r>
-          </a:p>
-        </p:txBody>
-      </p:sp>
-      <p:sp>
-        <p:nvSpPr>
-          <p:cNvPr id="60" name="TextBox 59"/>
-          <p:cNvSpPr txBox="1"/>
-          <p:nvPr/>
-        </p:nvSpPr>
-        <p:spPr>
-          <a:xfrm>
             <a:off x="6379210" y="4568444"/>
-            <a:ext cx="904468" cy="240030"/>
+            <a:ext cx="906780" cy="240030"/>
           </a:xfrm>
           <a:prstGeom prst="rect">
             <a:avLst/>
@@ -8514,7 +8406,7 @@
         <p:spPr>
           <a:xfrm>
             <a:off x="563880" y="6512052"/>
-            <a:ext cx="2418587" cy="205740"/>
+            <a:ext cx="2428240" cy="205740"/>
           </a:xfrm>
           <a:prstGeom prst="rect">
             <a:avLst/>
@@ -8549,8 +8441,8 @@
         </p:nvSpPr>
         <p:spPr>
           <a:xfrm>
-            <a:off x="11011115" y="6499098"/>
-            <a:ext cx="658914" cy="222885"/>
+            <a:off x="11018520" y="6499098"/>
+            <a:ext cx="651510" cy="222885"/>
           </a:xfrm>
           <a:prstGeom prst="rect">
             <a:avLst/>
@@ -9213,7 +9105,7 @@
         <p:spPr>
           <a:xfrm>
             <a:off x="563880" y="6512052"/>
-            <a:ext cx="2418587" cy="205740"/>
+            <a:ext cx="2428240" cy="205740"/>
           </a:xfrm>
           <a:prstGeom prst="rect">
             <a:avLst/>
@@ -9248,8 +9140,8 @@
         </p:nvSpPr>
         <p:spPr>
           <a:xfrm>
-            <a:off x="11011115" y="6499098"/>
-            <a:ext cx="658914" cy="222885"/>
+            <a:off x="11018520" y="6499098"/>
+            <a:ext cx="651510" cy="222885"/>
           </a:xfrm>
           <a:prstGeom prst="rect">
             <a:avLst/>
@@ -9932,7 +9824,7 @@
         <p:spPr>
           <a:xfrm>
             <a:off x="563880" y="6512052"/>
-            <a:ext cx="2418587" cy="205740"/>
+            <a:ext cx="2428240" cy="205740"/>
           </a:xfrm>
           <a:prstGeom prst="rect">
             <a:avLst/>
@@ -9967,8 +9859,8 @@
         </p:nvSpPr>
         <p:spPr>
           <a:xfrm>
-            <a:off x="11011115" y="6499098"/>
-            <a:ext cx="658914" cy="222885"/>
+            <a:off x="11018520" y="6499098"/>
+            <a:ext cx="651510" cy="222885"/>
           </a:xfrm>
           <a:prstGeom prst="rect">
             <a:avLst/>
@@ -10341,7 +10233,7 @@
         <p:spPr>
           <a:xfrm>
             <a:off x="563880" y="6512052"/>
-            <a:ext cx="2418587" cy="205740"/>
+            <a:ext cx="2428240" cy="205740"/>
           </a:xfrm>
           <a:prstGeom prst="rect">
             <a:avLst/>
@@ -10376,8 +10268,8 @@
         </p:nvSpPr>
         <p:spPr>
           <a:xfrm>
-            <a:off x="11108524" y="6499098"/>
-            <a:ext cx="561505" cy="222885"/>
+            <a:off x="11113770" y="6499098"/>
+            <a:ext cx="556260" cy="222885"/>
           </a:xfrm>
           <a:prstGeom prst="rect">
             <a:avLst/>
@@ -10406,43 +10298,7 @@
       </p:sp>
       <p:sp>
         <p:nvSpPr>
-          <p:cNvPr id="9" name="TextBox 8"/>
-          <p:cNvSpPr txBox="1"/>
-          <p:nvPr/>
-        </p:nvSpPr>
-        <p:spPr>
-          <a:xfrm>
-            <a:off x="10855147" y="377952"/>
-            <a:ext cx="811072" cy="205740"/>
-          </a:xfrm>
-          <a:prstGeom prst="rect">
-            <a:avLst/>
-          </a:prstGeom>
-          <a:noFill/>
-        </p:spPr>
-        <p:txBody>
-          <a:bodyPr wrap="none" lIns="0" rIns="0" tIns="0" bIns="0">
-            <a:spAutoFit/>
-          </a:bodyPr>
-          <a:lstStyle/>
-          <a:p>
-            <a:pPr algn="r"/>
-            <a:r>
-              <a:rPr sz="1200" b="0">
-                <a:solidFill>
-                  <a:srgbClr val="6F8F8F"/>
-                </a:solidFill>
-                <a:latin typeface="Noto Sans SC"/>
-                <a:ea typeface="Noto Sans SC"/>
-              </a:rPr>
-              <a:t>影片 00:03</a:t>
-            </a:r>
-          </a:p>
-        </p:txBody>
-      </p:sp>
-      <p:sp>
-        <p:nvSpPr>
-          <p:cNvPr id="10" name="Oval 9"/>
+          <p:cNvPr id="9" name="Oval 8"/>
           <p:cNvSpPr/>
           <p:nvPr/>
         </p:nvSpPr>
@@ -10484,7 +10340,7 @@
       </p:sp>
       <p:sp>
         <p:nvSpPr>
-          <p:cNvPr id="11" name="TextBox 10"/>
+          <p:cNvPr id="10" name="TextBox 9"/>
           <p:cNvSpPr txBox="1"/>
           <p:nvPr/>
         </p:nvSpPr>
@@ -10524,7 +10380,7 @@
       </p:sp>
       <p:sp>
         <p:nvSpPr>
-          <p:cNvPr id="12" name="Oval 11"/>
+          <p:cNvPr id="11" name="Oval 10"/>
           <p:cNvSpPr/>
           <p:nvPr/>
         </p:nvSpPr>
@@ -10566,7 +10422,7 @@
       </p:sp>
       <p:sp>
         <p:nvSpPr>
-          <p:cNvPr id="13" name="TextBox 12"/>
+          <p:cNvPr id="12" name="TextBox 11"/>
           <p:cNvSpPr txBox="1"/>
           <p:nvPr/>
         </p:nvSpPr>
@@ -10606,7 +10462,7 @@
       </p:sp>
       <p:sp>
         <p:nvSpPr>
-          <p:cNvPr id="14" name="Oval 13"/>
+          <p:cNvPr id="13" name="Oval 12"/>
           <p:cNvSpPr/>
           <p:nvPr/>
         </p:nvSpPr>
@@ -10648,7 +10504,7 @@
       </p:sp>
       <p:sp>
         <p:nvSpPr>
-          <p:cNvPr id="15" name="TextBox 14"/>
+          <p:cNvPr id="14" name="TextBox 13"/>
           <p:cNvSpPr txBox="1"/>
           <p:nvPr/>
         </p:nvSpPr>
@@ -10688,7 +10544,7 @@
       </p:sp>
       <p:sp>
         <p:nvSpPr>
-          <p:cNvPr id="16" name="Oval 15"/>
+          <p:cNvPr id="15" name="Oval 14"/>
           <p:cNvSpPr/>
           <p:nvPr/>
         </p:nvSpPr>
@@ -10730,7 +10586,7 @@
       </p:sp>
       <p:sp>
         <p:nvSpPr>
-          <p:cNvPr id="17" name="TextBox 16"/>
+          <p:cNvPr id="16" name="TextBox 15"/>
           <p:cNvSpPr txBox="1"/>
           <p:nvPr/>
         </p:nvSpPr>
@@ -10770,7 +10626,7 @@
       </p:sp>
       <p:sp>
         <p:nvSpPr>
-          <p:cNvPr id="18" name="Oval 17"/>
+          <p:cNvPr id="17" name="Oval 16"/>
           <p:cNvSpPr/>
           <p:nvPr/>
         </p:nvSpPr>
@@ -10812,7 +10668,7 @@
       </p:sp>
       <p:sp>
         <p:nvSpPr>
-          <p:cNvPr id="19" name="TextBox 18"/>
+          <p:cNvPr id="18" name="TextBox 17"/>
           <p:cNvSpPr txBox="1"/>
           <p:nvPr/>
         </p:nvSpPr>
@@ -10852,7 +10708,7 @@
       </p:sp>
       <p:sp>
         <p:nvSpPr>
-          <p:cNvPr id="20" name="TextBox 19"/>
+          <p:cNvPr id="19" name="TextBox 18"/>
           <p:cNvSpPr txBox="1"/>
           <p:nvPr/>
         </p:nvSpPr>
@@ -10892,7 +10748,7 @@
       </p:sp>
       <p:sp>
         <p:nvSpPr>
-          <p:cNvPr id="21" name="Rounded Rectangle 20"/>
+          <p:cNvPr id="20" name="Rounded Rectangle 19"/>
           <p:cNvSpPr/>
           <p:nvPr/>
         </p:nvSpPr>
@@ -10937,6 +10793,42 @@
       </p:sp>
       <p:sp>
         <p:nvSpPr>
+          <p:cNvPr id="21" name="TextBox 20"/>
+          <p:cNvSpPr txBox="1"/>
+          <p:nvPr/>
+        </p:nvSpPr>
+        <p:spPr>
+          <a:xfrm>
+            <a:off x="6361525" y="1511338"/>
+            <a:ext cx="1234249" cy="211740"/>
+          </a:xfrm>
+          <a:prstGeom prst="rect">
+            <a:avLst/>
+          </a:prstGeom>
+          <a:noFill/>
+        </p:spPr>
+        <p:txBody>
+          <a:bodyPr wrap="none" lIns="0" rIns="0" tIns="0" bIns="0">
+            <a:spAutoFit/>
+          </a:bodyPr>
+          <a:lstStyle/>
+          <a:p>
+            <a:pPr algn="ctr"/>
+            <a:r>
+              <a:rPr sz="1235" b="1">
+                <a:solidFill>
+                  <a:srgbClr val="BCD2D0"/>
+                </a:solidFill>
+                <a:latin typeface="Noto Sans SC"/>
+                <a:ea typeface="Noto Sans SC"/>
+              </a:rPr>
+              <a:t>左侧 · 2 个位置</a:t>
+            </a:r>
+          </a:p>
+        </p:txBody>
+      </p:sp>
+      <p:sp>
+        <p:nvSpPr>
           <p:cNvPr id="22" name="Rounded Rectangle 21"/>
           <p:cNvSpPr/>
           <p:nvPr/>
@@ -10988,44 +10880,8 @@
         </p:nvSpPr>
         <p:spPr>
           <a:xfrm>
-            <a:off x="6361386" y="1511338"/>
-            <a:ext cx="1234526" cy="211740"/>
-          </a:xfrm>
-          <a:prstGeom prst="rect">
-            <a:avLst/>
-          </a:prstGeom>
-          <a:noFill/>
-        </p:spPr>
-        <p:txBody>
-          <a:bodyPr wrap="none" lIns="0" rIns="0" tIns="0" bIns="0">
-            <a:spAutoFit/>
-          </a:bodyPr>
-          <a:lstStyle/>
-          <a:p>
-            <a:pPr algn="ctr"/>
-            <a:r>
-              <a:rPr sz="1235" b="1">
-                <a:solidFill>
-                  <a:srgbClr val="BCD2D0"/>
-                </a:solidFill>
-                <a:latin typeface="Noto Sans SC"/>
-                <a:ea typeface="Noto Sans SC"/>
-              </a:rPr>
-              <a:t>左侧 · 2 个位置</a:t>
-            </a:r>
-          </a:p>
-        </p:txBody>
-      </p:sp>
-      <p:sp>
-        <p:nvSpPr>
-          <p:cNvPr id="24" name="TextBox 23"/>
-          <p:cNvSpPr txBox="1"/>
-          <p:nvPr/>
-        </p:nvSpPr>
-        <p:spPr>
-          <a:xfrm>
-            <a:off x="9498286" y="1511338"/>
-            <a:ext cx="1234526" cy="211740"/>
+            <a:off x="9498425" y="1511338"/>
+            <a:ext cx="1234249" cy="211740"/>
           </a:xfrm>
           <a:prstGeom prst="rect">
             <a:avLst/>
@@ -11054,7 +10910,7 @@
       </p:sp>
       <p:cxnSp>
         <p:nvCxnSpPr>
-          <p:cNvPr id="25" name="Connector 24"/>
+          <p:cNvPr id="24" name="Connector 23"/>
           <p:cNvCxnSpPr/>
           <p:nvPr/>
         </p:nvCxnSpPr>
@@ -11090,7 +10946,7 @@
       </p:cxnSp>
       <p:sp>
         <p:nvSpPr>
-          <p:cNvPr id="26" name="Oval 25"/>
+          <p:cNvPr id="25" name="Oval 24"/>
           <p:cNvSpPr/>
           <p:nvPr/>
         </p:nvSpPr>
@@ -11134,14 +10990,14 @@
       </p:sp>
       <p:sp>
         <p:nvSpPr>
-          <p:cNvPr id="27" name="TextBox 26"/>
-          <p:cNvSpPr txBox="1"/>
-          <p:nvPr/>
-        </p:nvSpPr>
-        <p:spPr>
-          <a:xfrm>
-            <a:off x="8408391" y="1886453"/>
-            <a:ext cx="229717" cy="260604"/>
+          <p:cNvPr id="26" name="TextBox 25"/>
+          <p:cNvSpPr txBox="1"/>
+          <p:nvPr/>
+        </p:nvSpPr>
+        <p:spPr>
+          <a:xfrm>
+            <a:off x="8408029" y="1886453"/>
+            <a:ext cx="230441" cy="260604"/>
           </a:xfrm>
           <a:prstGeom prst="rect">
             <a:avLst/>
@@ -11170,7 +11026,7 @@
       </p:sp>
       <p:cxnSp>
         <p:nvCxnSpPr>
-          <p:cNvPr id="28" name="Connector 27"/>
+          <p:cNvPr id="27" name="Connector 26"/>
           <p:cNvCxnSpPr/>
           <p:nvPr/>
         </p:nvCxnSpPr>
@@ -11206,7 +11062,7 @@
       </p:cxnSp>
       <p:sp>
         <p:nvSpPr>
-          <p:cNvPr id="29" name="Oval 28"/>
+          <p:cNvPr id="28" name="Oval 27"/>
           <p:cNvSpPr/>
           <p:nvPr/>
         </p:nvSpPr>
@@ -11250,14 +11106,14 @@
       </p:sp>
       <p:sp>
         <p:nvSpPr>
-          <p:cNvPr id="30" name="TextBox 29"/>
-          <p:cNvSpPr txBox="1"/>
-          <p:nvPr/>
-        </p:nvSpPr>
-        <p:spPr>
-          <a:xfrm>
-            <a:off x="8473016" y="2553597"/>
-            <a:ext cx="229717" cy="260604"/>
+          <p:cNvPr id="29" name="TextBox 28"/>
+          <p:cNvSpPr txBox="1"/>
+          <p:nvPr/>
+        </p:nvSpPr>
+        <p:spPr>
+          <a:xfrm>
+            <a:off x="8472654" y="2553597"/>
+            <a:ext cx="230441" cy="260604"/>
           </a:xfrm>
           <a:prstGeom prst="rect">
             <a:avLst/>
@@ -11286,7 +11142,7 @@
       </p:sp>
       <p:cxnSp>
         <p:nvCxnSpPr>
-          <p:cNvPr id="31" name="Connector 30"/>
+          <p:cNvPr id="30" name="Connector 29"/>
           <p:cNvCxnSpPr/>
           <p:nvPr/>
         </p:nvCxnSpPr>
@@ -11321,7 +11177,7 @@
       </p:cxnSp>
       <p:sp>
         <p:nvSpPr>
-          <p:cNvPr id="32" name="Oval 31"/>
+          <p:cNvPr id="31" name="Oval 30"/>
           <p:cNvSpPr/>
           <p:nvPr/>
         </p:nvSpPr>
@@ -11365,14 +11221,14 @@
       </p:sp>
       <p:sp>
         <p:nvSpPr>
-          <p:cNvPr id="33" name="TextBox 32"/>
-          <p:cNvSpPr txBox="1"/>
-          <p:nvPr/>
-        </p:nvSpPr>
-        <p:spPr>
-          <a:xfrm>
-            <a:off x="10157536" y="2463749"/>
-            <a:ext cx="229717" cy="260604"/>
+          <p:cNvPr id="32" name="TextBox 31"/>
+          <p:cNvSpPr txBox="1"/>
+          <p:nvPr/>
+        </p:nvSpPr>
+        <p:spPr>
+          <a:xfrm>
+            <a:off x="10157174" y="2463749"/>
+            <a:ext cx="230441" cy="260604"/>
           </a:xfrm>
           <a:prstGeom prst="rect">
             <a:avLst/>
@@ -11401,7 +11257,7 @@
       </p:sp>
       <p:cxnSp>
         <p:nvCxnSpPr>
-          <p:cNvPr id="34" name="Connector 33"/>
+          <p:cNvPr id="33" name="Connector 32"/>
           <p:cNvCxnSpPr/>
           <p:nvPr/>
         </p:nvCxnSpPr>
@@ -11436,7 +11292,7 @@
       </p:cxnSp>
       <p:sp>
         <p:nvSpPr>
-          <p:cNvPr id="35" name="Oval 34"/>
+          <p:cNvPr id="34" name="Oval 33"/>
           <p:cNvSpPr/>
           <p:nvPr/>
         </p:nvSpPr>
@@ -11480,14 +11336,14 @@
       </p:sp>
       <p:sp>
         <p:nvSpPr>
-          <p:cNvPr id="36" name="TextBox 35"/>
-          <p:cNvSpPr txBox="1"/>
-          <p:nvPr/>
-        </p:nvSpPr>
-        <p:spPr>
-          <a:xfrm>
-            <a:off x="10157536" y="3790899"/>
-            <a:ext cx="229717" cy="260604"/>
+          <p:cNvPr id="35" name="TextBox 34"/>
+          <p:cNvSpPr txBox="1"/>
+          <p:nvPr/>
+        </p:nvSpPr>
+        <p:spPr>
+          <a:xfrm>
+            <a:off x="10157174" y="3790899"/>
+            <a:ext cx="230441" cy="260604"/>
           </a:xfrm>
           <a:prstGeom prst="rect">
             <a:avLst/>
@@ -11516,7 +11372,7 @@
       </p:sp>
       <p:cxnSp>
         <p:nvCxnSpPr>
-          <p:cNvPr id="37" name="Connector 36"/>
+          <p:cNvPr id="36" name="Connector 35"/>
           <p:cNvCxnSpPr/>
           <p:nvPr/>
         </p:nvCxnSpPr>
@@ -11552,7 +11408,7 @@
       </p:cxnSp>
       <p:sp>
         <p:nvSpPr>
-          <p:cNvPr id="38" name="Oval 37"/>
+          <p:cNvPr id="37" name="Oval 36"/>
           <p:cNvSpPr/>
           <p:nvPr/>
         </p:nvSpPr>
@@ -11596,14 +11452,14 @@
       </p:sp>
       <p:sp>
         <p:nvSpPr>
-          <p:cNvPr id="39" name="TextBox 38"/>
-          <p:cNvSpPr txBox="1"/>
-          <p:nvPr/>
-        </p:nvSpPr>
-        <p:spPr>
-          <a:xfrm>
-            <a:off x="8475712" y="3730462"/>
-            <a:ext cx="229717" cy="260604"/>
+          <p:cNvPr id="38" name="TextBox 37"/>
+          <p:cNvSpPr txBox="1"/>
+          <p:nvPr/>
+        </p:nvSpPr>
+        <p:spPr>
+          <a:xfrm>
+            <a:off x="8475350" y="3730462"/>
+            <a:ext cx="230441" cy="260604"/>
           </a:xfrm>
           <a:prstGeom prst="rect">
             <a:avLst/>
@@ -11632,7 +11488,7 @@
       </p:sp>
       <p:cxnSp>
         <p:nvCxnSpPr>
-          <p:cNvPr id="40" name="Connector 39"/>
+          <p:cNvPr id="39" name="Connector 38"/>
           <p:cNvCxnSpPr/>
           <p:nvPr/>
         </p:nvCxnSpPr>
@@ -11668,7 +11524,7 @@
       </p:cxnSp>
       <p:sp>
         <p:nvSpPr>
-          <p:cNvPr id="41" name="Oval 40"/>
+          <p:cNvPr id="40" name="Oval 39"/>
           <p:cNvSpPr/>
           <p:nvPr/>
         </p:nvSpPr>
@@ -11712,14 +11568,14 @@
       </p:sp>
       <p:sp>
         <p:nvSpPr>
-          <p:cNvPr id="42" name="TextBox 41"/>
-          <p:cNvSpPr txBox="1"/>
-          <p:nvPr/>
-        </p:nvSpPr>
-        <p:spPr>
-          <a:xfrm>
-            <a:off x="8411316" y="4398779"/>
-            <a:ext cx="229717" cy="260604"/>
+          <p:cNvPr id="41" name="TextBox 40"/>
+          <p:cNvSpPr txBox="1"/>
+          <p:nvPr/>
+        </p:nvSpPr>
+        <p:spPr>
+          <a:xfrm>
+            <a:off x="8410954" y="4398779"/>
+            <a:ext cx="230441" cy="260604"/>
           </a:xfrm>
           <a:prstGeom prst="rect">
             <a:avLst/>
@@ -11748,7 +11604,7 @@
       </p:sp>
       <p:sp>
         <p:nvSpPr>
-          <p:cNvPr id="43" name="Oval 42"/>
+          <p:cNvPr id="42" name="Oval 41"/>
           <p:cNvSpPr/>
           <p:nvPr/>
         </p:nvSpPr>
@@ -11792,14 +11648,14 @@
       </p:sp>
       <p:sp>
         <p:nvSpPr>
-          <p:cNvPr id="44" name="TextBox 43"/>
-          <p:cNvSpPr txBox="1"/>
-          <p:nvPr/>
-        </p:nvSpPr>
-        <p:spPr>
-          <a:xfrm>
-            <a:off x="6850561" y="2344305"/>
-            <a:ext cx="256176" cy="276891"/>
+          <p:cNvPr id="43" name="TextBox 42"/>
+          <p:cNvSpPr txBox="1"/>
+          <p:nvPr/>
+        </p:nvSpPr>
+        <p:spPr>
+          <a:xfrm>
+            <a:off x="6850760" y="2344305"/>
+            <a:ext cx="255778" cy="276891"/>
           </a:xfrm>
           <a:prstGeom prst="rect">
             <a:avLst/>
@@ -11828,7 +11684,7 @@
       </p:sp>
       <p:sp>
         <p:nvSpPr>
-          <p:cNvPr id="45" name="Oval 44"/>
+          <p:cNvPr id="44" name="Oval 43"/>
           <p:cNvSpPr/>
           <p:nvPr/>
         </p:nvSpPr>
@@ -11872,14 +11728,14 @@
       </p:sp>
       <p:sp>
         <p:nvSpPr>
-          <p:cNvPr id="46" name="TextBox 45"/>
-          <p:cNvSpPr txBox="1"/>
-          <p:nvPr/>
-        </p:nvSpPr>
-        <p:spPr>
-          <a:xfrm>
-            <a:off x="9984180" y="1861705"/>
-            <a:ext cx="262739" cy="276891"/>
+          <p:cNvPr id="45" name="TextBox 44"/>
+          <p:cNvSpPr txBox="1"/>
+          <p:nvPr/>
+        </p:nvSpPr>
+        <p:spPr>
+          <a:xfrm>
+            <a:off x="9984644" y="1861705"/>
+            <a:ext cx="261810" cy="276891"/>
           </a:xfrm>
           <a:prstGeom prst="rect">
             <a:avLst/>
@@ -11908,7 +11764,7 @@
       </p:sp>
       <p:sp>
         <p:nvSpPr>
-          <p:cNvPr id="47" name="Oval 46"/>
+          <p:cNvPr id="46" name="Oval 45"/>
           <p:cNvSpPr/>
           <p:nvPr/>
         </p:nvSpPr>
@@ -11952,14 +11808,14 @@
       </p:sp>
       <p:sp>
         <p:nvSpPr>
-          <p:cNvPr id="48" name="TextBox 47"/>
-          <p:cNvSpPr txBox="1"/>
-          <p:nvPr/>
-        </p:nvSpPr>
-        <p:spPr>
-          <a:xfrm>
-            <a:off x="9986744" y="3188855"/>
-            <a:ext cx="257611" cy="276891"/>
+          <p:cNvPr id="47" name="TextBox 46"/>
+          <p:cNvSpPr txBox="1"/>
+          <p:nvPr/>
+        </p:nvSpPr>
+        <p:spPr>
+          <a:xfrm>
+            <a:off x="9987661" y="3188855"/>
+            <a:ext cx="255778" cy="276891"/>
           </a:xfrm>
           <a:prstGeom prst="rect">
             <a:avLst/>
@@ -11988,7 +11844,7 @@
       </p:sp>
       <p:sp>
         <p:nvSpPr>
-          <p:cNvPr id="49" name="Oval 48"/>
+          <p:cNvPr id="48" name="Oval 47"/>
           <p:cNvSpPr/>
           <p:nvPr/>
         </p:nvSpPr>
@@ -12032,14 +11888,14 @@
       </p:sp>
       <p:sp>
         <p:nvSpPr>
-          <p:cNvPr id="50" name="TextBox 49"/>
-          <p:cNvSpPr txBox="1"/>
-          <p:nvPr/>
-        </p:nvSpPr>
-        <p:spPr>
-          <a:xfrm>
-            <a:off x="9980796" y="4516005"/>
-            <a:ext cx="269507" cy="276891"/>
+          <p:cNvPr id="49" name="TextBox 48"/>
+          <p:cNvSpPr txBox="1"/>
+          <p:nvPr/>
+        </p:nvSpPr>
+        <p:spPr>
+          <a:xfrm>
+            <a:off x="9981628" y="4516005"/>
+            <a:ext cx="267842" cy="276891"/>
           </a:xfrm>
           <a:prstGeom prst="rect">
             <a:avLst/>
@@ -12068,7 +11924,7 @@
       </p:sp>
       <p:sp>
         <p:nvSpPr>
-          <p:cNvPr id="51" name="Oval 50"/>
+          <p:cNvPr id="50" name="Oval 49"/>
           <p:cNvSpPr/>
           <p:nvPr/>
         </p:nvSpPr>
@@ -12112,50 +11968,50 @@
       </p:sp>
       <p:sp>
         <p:nvSpPr>
+          <p:cNvPr id="51" name="TextBox 50"/>
+          <p:cNvSpPr txBox="1"/>
+          <p:nvPr/>
+        </p:nvSpPr>
+        <p:spPr>
+          <a:xfrm>
+            <a:off x="6853777" y="4093730"/>
+            <a:ext cx="249745" cy="276891"/>
+          </a:xfrm>
+          <a:prstGeom prst="rect">
+            <a:avLst/>
+          </a:prstGeom>
+          <a:noFill/>
+        </p:spPr>
+        <p:txBody>
+          <a:bodyPr wrap="none" lIns="0" rIns="0" tIns="0" bIns="0">
+            <a:spAutoFit/>
+          </a:bodyPr>
+          <a:lstStyle/>
+          <a:p>
+            <a:pPr algn="ctr"/>
+            <a:r>
+              <a:rPr sz="1614" b="1">
+                <a:solidFill>
+                  <a:srgbClr val="0B1B1F"/>
+                </a:solidFill>
+                <a:latin typeface="Noto Sans SC"/>
+                <a:ea typeface="Noto Sans SC"/>
+              </a:rPr>
+              <a:t>E</a:t>
+            </a:r>
+          </a:p>
+        </p:txBody>
+      </p:sp>
+      <p:sp>
+        <p:nvSpPr>
           <p:cNvPr id="52" name="TextBox 51"/>
           <p:cNvSpPr txBox="1"/>
           <p:nvPr/>
         </p:nvSpPr>
         <p:spPr>
           <a:xfrm>
-            <a:off x="6854048" y="4093730"/>
-            <a:ext cx="249202" cy="276891"/>
-          </a:xfrm>
-          <a:prstGeom prst="rect">
-            <a:avLst/>
-          </a:prstGeom>
-          <a:noFill/>
-        </p:spPr>
-        <p:txBody>
-          <a:bodyPr wrap="none" lIns="0" rIns="0" tIns="0" bIns="0">
-            <a:spAutoFit/>
-          </a:bodyPr>
-          <a:lstStyle/>
-          <a:p>
-            <a:pPr algn="ctr"/>
-            <a:r>
-              <a:rPr sz="1614" b="1">
-                <a:solidFill>
-                  <a:srgbClr val="0B1B1F"/>
-                </a:solidFill>
-                <a:latin typeface="Noto Sans SC"/>
-                <a:ea typeface="Noto Sans SC"/>
-              </a:rPr>
-              <a:t>E</a:t>
-            </a:r>
-          </a:p>
-        </p:txBody>
-      </p:sp>
-      <p:sp>
-        <p:nvSpPr>
-          <p:cNvPr id="53" name="TextBox 52"/>
-          <p:cNvSpPr txBox="1"/>
-          <p:nvPr/>
-        </p:nvSpPr>
-        <p:spPr>
-          <a:xfrm>
-            <a:off x="7351928" y="5507736"/>
-            <a:ext cx="2377643" cy="274320"/>
+            <a:off x="7355840" y="5507736"/>
+            <a:ext cx="2369820" cy="274320"/>
           </a:xfrm>
           <a:prstGeom prst="rect">
             <a:avLst/>
@@ -12408,7 +12264,7 @@
         <p:spPr>
           <a:xfrm>
             <a:off x="563880" y="6512052"/>
-            <a:ext cx="2418587" cy="205740"/>
+            <a:ext cx="2428240" cy="205740"/>
           </a:xfrm>
           <a:prstGeom prst="rect">
             <a:avLst/>
@@ -12443,8 +12299,8 @@
         </p:nvSpPr>
         <p:spPr>
           <a:xfrm>
-            <a:off x="11108524" y="6499098"/>
-            <a:ext cx="561505" cy="222885"/>
+            <a:off x="11113770" y="6499098"/>
+            <a:ext cx="556260" cy="222885"/>
           </a:xfrm>
           <a:prstGeom prst="rect">
             <a:avLst/>
@@ -12704,7 +12560,7 @@
         <p:spPr>
           <a:xfrm>
             <a:off x="553720" y="450088"/>
-            <a:ext cx="1939442" cy="480060"/>
+            <a:ext cx="1953260" cy="480060"/>
           </a:xfrm>
           <a:prstGeom prst="rect">
             <a:avLst/>
@@ -12817,7 +12673,7 @@
         <p:spPr>
           <a:xfrm>
             <a:off x="563880" y="6512052"/>
-            <a:ext cx="2418587" cy="205740"/>
+            <a:ext cx="2428240" cy="205740"/>
           </a:xfrm>
           <a:prstGeom prst="rect">
             <a:avLst/>
@@ -12852,8 +12708,8 @@
         </p:nvSpPr>
         <p:spPr>
           <a:xfrm>
-            <a:off x="11108524" y="6499098"/>
-            <a:ext cx="561505" cy="222885"/>
+            <a:off x="11113770" y="6499098"/>
+            <a:ext cx="556260" cy="222885"/>
           </a:xfrm>
           <a:prstGeom prst="rect">
             <a:avLst/>
@@ -12882,43 +12738,7 @@
       </p:sp>
       <p:sp>
         <p:nvSpPr>
-          <p:cNvPr id="9" name="TextBox 8"/>
-          <p:cNvSpPr txBox="1"/>
-          <p:nvPr/>
-        </p:nvSpPr>
-        <p:spPr>
-          <a:xfrm>
-            <a:off x="10855147" y="377952"/>
-            <a:ext cx="811072" cy="205740"/>
-          </a:xfrm>
-          <a:prstGeom prst="rect">
-            <a:avLst/>
-          </a:prstGeom>
-          <a:noFill/>
-        </p:spPr>
-        <p:txBody>
-          <a:bodyPr wrap="none" lIns="0" rIns="0" tIns="0" bIns="0">
-            <a:spAutoFit/>
-          </a:bodyPr>
-          <a:lstStyle/>
-          <a:p>
-            <a:pPr algn="r"/>
-            <a:r>
-              <a:rPr sz="1200" b="0">
-                <a:solidFill>
-                  <a:srgbClr val="6F8F8F"/>
-                </a:solidFill>
-                <a:latin typeface="Noto Sans SC"/>
-                <a:ea typeface="Noto Sans SC"/>
-              </a:rPr>
-              <a:t>影片 00:20</a:t>
-            </a:r>
-          </a:p>
-        </p:txBody>
-      </p:sp>
-      <p:sp>
-        <p:nvSpPr>
-          <p:cNvPr id="10" name="Oval 9"/>
+          <p:cNvPr id="9" name="Oval 8"/>
           <p:cNvSpPr/>
           <p:nvPr/>
         </p:nvSpPr>
@@ -12960,7 +12780,7 @@
       </p:sp>
       <p:sp>
         <p:nvSpPr>
-          <p:cNvPr id="11" name="TextBox 10"/>
+          <p:cNvPr id="10" name="TextBox 9"/>
           <p:cNvSpPr txBox="1"/>
           <p:nvPr/>
         </p:nvSpPr>
@@ -13000,7 +12820,7 @@
       </p:sp>
       <p:sp>
         <p:nvSpPr>
-          <p:cNvPr id="12" name="Oval 11"/>
+          <p:cNvPr id="11" name="Oval 10"/>
           <p:cNvSpPr/>
           <p:nvPr/>
         </p:nvSpPr>
@@ -13042,7 +12862,7 @@
       </p:sp>
       <p:sp>
         <p:nvSpPr>
-          <p:cNvPr id="13" name="TextBox 12"/>
+          <p:cNvPr id="12" name="TextBox 11"/>
           <p:cNvSpPr txBox="1"/>
           <p:nvPr/>
         </p:nvSpPr>
@@ -13082,7 +12902,7 @@
       </p:sp>
       <p:sp>
         <p:nvSpPr>
-          <p:cNvPr id="14" name="Oval 13"/>
+          <p:cNvPr id="13" name="Oval 12"/>
           <p:cNvSpPr/>
           <p:nvPr/>
         </p:nvSpPr>
@@ -13124,7 +12944,7 @@
       </p:sp>
       <p:sp>
         <p:nvSpPr>
-          <p:cNvPr id="15" name="TextBox 14"/>
+          <p:cNvPr id="14" name="TextBox 13"/>
           <p:cNvSpPr txBox="1"/>
           <p:nvPr/>
         </p:nvSpPr>
@@ -13164,7 +12984,7 @@
       </p:sp>
       <p:sp>
         <p:nvSpPr>
-          <p:cNvPr id="16" name="Oval 15"/>
+          <p:cNvPr id="15" name="Oval 14"/>
           <p:cNvSpPr/>
           <p:nvPr/>
         </p:nvSpPr>
@@ -13206,7 +13026,7 @@
       </p:sp>
       <p:sp>
         <p:nvSpPr>
-          <p:cNvPr id="17" name="TextBox 16"/>
+          <p:cNvPr id="16" name="TextBox 15"/>
           <p:cNvSpPr txBox="1"/>
           <p:nvPr/>
         </p:nvSpPr>
@@ -13246,7 +13066,7 @@
       </p:sp>
       <p:sp>
         <p:nvSpPr>
-          <p:cNvPr id="18" name="TextBox 17"/>
+          <p:cNvPr id="17" name="TextBox 16"/>
           <p:cNvSpPr txBox="1"/>
           <p:nvPr/>
         </p:nvSpPr>
@@ -13282,7 +13102,7 @@
       </p:sp>
       <p:sp>
         <p:nvSpPr>
-          <p:cNvPr id="19" name="TextBox 18"/>
+          <p:cNvPr id="18" name="TextBox 17"/>
           <p:cNvSpPr txBox="1"/>
           <p:nvPr/>
         </p:nvSpPr>
@@ -13318,7 +13138,7 @@
       </p:sp>
       <p:sp>
         <p:nvSpPr>
-          <p:cNvPr id="20" name="TextBox 19"/>
+          <p:cNvPr id="19" name="TextBox 18"/>
           <p:cNvSpPr txBox="1"/>
           <p:nvPr/>
         </p:nvSpPr>
@@ -13354,7 +13174,7 @@
       </p:sp>
       <p:sp>
         <p:nvSpPr>
-          <p:cNvPr id="21" name="TextBox 20"/>
+          <p:cNvPr id="20" name="TextBox 19"/>
           <p:cNvSpPr txBox="1"/>
           <p:nvPr/>
         </p:nvSpPr>
@@ -13390,14 +13210,14 @@
       </p:sp>
       <p:sp>
         <p:nvSpPr>
-          <p:cNvPr id="22" name="TextBox 21"/>
+          <p:cNvPr id="21" name="TextBox 20"/>
           <p:cNvSpPr txBox="1"/>
           <p:nvPr/>
         </p:nvSpPr>
         <p:spPr>
           <a:xfrm>
             <a:off x="9514205" y="1684782"/>
-            <a:ext cx="1166291" cy="291465"/>
+            <a:ext cx="1170940" cy="291465"/>
           </a:xfrm>
           <a:prstGeom prst="rect">
             <a:avLst/>
@@ -13426,7 +13246,7 @@
       </p:sp>
       <p:cxnSp>
         <p:nvCxnSpPr>
-          <p:cNvPr id="23" name="Connector 22"/>
+          <p:cNvPr id="22" name="Connector 21"/>
           <p:cNvCxnSpPr/>
           <p:nvPr/>
         </p:nvCxnSpPr>
@@ -13461,43 +13281,43 @@
       </p:cxnSp>
       <p:sp>
         <p:nvSpPr>
+          <p:cNvPr id="23" name="TextBox 22"/>
+          <p:cNvSpPr txBox="1"/>
+          <p:nvPr/>
+        </p:nvSpPr>
+        <p:spPr>
+          <a:xfrm>
+            <a:off x="6083935" y="2179574"/>
+            <a:ext cx="290830" cy="325755"/>
+          </a:xfrm>
+          <a:prstGeom prst="rect">
+            <a:avLst/>
+          </a:prstGeom>
+          <a:noFill/>
+        </p:spPr>
+        <p:txBody>
+          <a:bodyPr wrap="none" lIns="0" rIns="0" tIns="0" bIns="0">
+            <a:spAutoFit/>
+          </a:bodyPr>
+          <a:lstStyle/>
+          <a:p>
+            <a:pPr algn="l"/>
+            <a:r>
+              <a:rPr sz="1900" b="0">
+                <a:solidFill>
+                  <a:srgbClr val="F2F3E9"/>
+                </a:solidFill>
+                <a:latin typeface="Noto Sans SC"/>
+                <a:ea typeface="Noto Sans SC"/>
+              </a:rPr>
+              <a:t>A</a:t>
+            </a:r>
+          </a:p>
+        </p:txBody>
+      </p:sp>
+      <p:sp>
+        <p:nvSpPr>
           <p:cNvPr id="24" name="TextBox 23"/>
-          <p:cNvSpPr txBox="1"/>
-          <p:nvPr/>
-        </p:nvSpPr>
-        <p:spPr>
-          <a:xfrm>
-            <a:off x="6083935" y="2179574"/>
-            <a:ext cx="291490" cy="325755"/>
-          </a:xfrm>
-          <a:prstGeom prst="rect">
-            <a:avLst/>
-          </a:prstGeom>
-          <a:noFill/>
-        </p:spPr>
-        <p:txBody>
-          <a:bodyPr wrap="none" lIns="0" rIns="0" tIns="0" bIns="0">
-            <a:spAutoFit/>
-          </a:bodyPr>
-          <a:lstStyle/>
-          <a:p>
-            <a:pPr algn="l"/>
-            <a:r>
-              <a:rPr sz="1900" b="0">
-                <a:solidFill>
-                  <a:srgbClr val="F2F3E9"/>
-                </a:solidFill>
-                <a:latin typeface="Noto Sans SC"/>
-                <a:ea typeface="Noto Sans SC"/>
-              </a:rPr>
-              <a:t>A</a:t>
-            </a:r>
-          </a:p>
-        </p:txBody>
-      </p:sp>
-      <p:sp>
-        <p:nvSpPr>
-          <p:cNvPr id="25" name="TextBox 24"/>
           <p:cNvSpPr txBox="1"/>
           <p:nvPr/>
         </p:nvSpPr>
@@ -13533,14 +13353,50 @@
       </p:sp>
       <p:sp>
         <p:nvSpPr>
+          <p:cNvPr id="25" name="TextBox 24"/>
+          <p:cNvSpPr txBox="1"/>
+          <p:nvPr/>
+        </p:nvSpPr>
+        <p:spPr>
+          <a:xfrm>
+            <a:off x="7607934" y="2179574"/>
+            <a:ext cx="278130" cy="325755"/>
+          </a:xfrm>
+          <a:prstGeom prst="rect">
+            <a:avLst/>
+          </a:prstGeom>
+          <a:noFill/>
+        </p:spPr>
+        <p:txBody>
+          <a:bodyPr wrap="none" lIns="0" rIns="0" tIns="0" bIns="0">
+            <a:spAutoFit/>
+          </a:bodyPr>
+          <a:lstStyle/>
+          <a:p>
+            <a:pPr algn="l"/>
+            <a:r>
+              <a:rPr sz="1900" b="0">
+                <a:solidFill>
+                  <a:srgbClr val="F2F3E9"/>
+                </a:solidFill>
+                <a:latin typeface="Noto Sans SC"/>
+                <a:ea typeface="Noto Sans SC"/>
+              </a:rPr>
+              <a:t>6</a:t>
+            </a:r>
+          </a:p>
+        </p:txBody>
+      </p:sp>
+      <p:sp>
+        <p:nvSpPr>
           <p:cNvPr id="26" name="TextBox 25"/>
           <p:cNvSpPr txBox="1"/>
           <p:nvPr/>
         </p:nvSpPr>
         <p:spPr>
           <a:xfrm>
-            <a:off x="7607934" y="2179574"/>
-            <a:ext cx="278701" cy="325755"/>
+            <a:off x="8560435" y="2179574"/>
+            <a:ext cx="278130" cy="325755"/>
           </a:xfrm>
           <a:prstGeom prst="rect">
             <a:avLst/>
@@ -13562,7 +13418,7 @@
                 <a:latin typeface="Noto Sans SC"/>
                 <a:ea typeface="Noto Sans SC"/>
               </a:rPr>
-              <a:t>6</a:t>
+              <a:t>0</a:t>
             </a:r>
           </a:p>
         </p:txBody>
@@ -13575,8 +13431,8 @@
         </p:nvSpPr>
         <p:spPr>
           <a:xfrm>
-            <a:off x="8560435" y="2179574"/>
-            <a:ext cx="278701" cy="325755"/>
+            <a:off x="9512935" y="2179574"/>
+            <a:ext cx="411480" cy="325755"/>
           </a:xfrm>
           <a:prstGeom prst="rect">
             <a:avLst/>
@@ -13598,7 +13454,7 @@
                 <a:latin typeface="Noto Sans SC"/>
                 <a:ea typeface="Noto Sans SC"/>
               </a:rPr>
-              <a:t>0</a:t>
+              <a:t>+6</a:t>
             </a:r>
           </a:p>
         </p:txBody>
@@ -13611,8 +13467,8 @@
         </p:nvSpPr>
         <p:spPr>
           <a:xfrm>
-            <a:off x="9512935" y="2179574"/>
-            <a:ext cx="412623" cy="325755"/>
+            <a:off x="6083935" y="2700274"/>
+            <a:ext cx="303530" cy="325755"/>
           </a:xfrm>
           <a:prstGeom prst="rect">
             <a:avLst/>
@@ -13634,7 +13490,7 @@
                 <a:latin typeface="Noto Sans SC"/>
                 <a:ea typeface="Noto Sans SC"/>
               </a:rPr>
-              <a:t>+6</a:t>
+              <a:t>B</a:t>
             </a:r>
           </a:p>
         </p:txBody>
@@ -13642,42 +13498,6 @@
       <p:sp>
         <p:nvSpPr>
           <p:cNvPr id="29" name="TextBox 28"/>
-          <p:cNvSpPr txBox="1"/>
-          <p:nvPr/>
-        </p:nvSpPr>
-        <p:spPr>
-          <a:xfrm>
-            <a:off x="6083935" y="2700274"/>
-            <a:ext cx="303314" cy="325755"/>
-          </a:xfrm>
-          <a:prstGeom prst="rect">
-            <a:avLst/>
-          </a:prstGeom>
-          <a:noFill/>
-        </p:spPr>
-        <p:txBody>
-          <a:bodyPr wrap="none" lIns="0" rIns="0" tIns="0" bIns="0">
-            <a:spAutoFit/>
-          </a:bodyPr>
-          <a:lstStyle/>
-          <a:p>
-            <a:pPr algn="l"/>
-            <a:r>
-              <a:rPr sz="1900" b="0">
-                <a:solidFill>
-                  <a:srgbClr val="F2F3E9"/>
-                </a:solidFill>
-                <a:latin typeface="Noto Sans SC"/>
-                <a:ea typeface="Noto Sans SC"/>
-              </a:rPr>
-              <a:t>B</a:t>
-            </a:r>
-          </a:p>
-        </p:txBody>
-      </p:sp>
-      <p:sp>
-        <p:nvSpPr>
-          <p:cNvPr id="30" name="TextBox 29"/>
           <p:cNvSpPr txBox="1"/>
           <p:nvPr/>
         </p:nvSpPr>
@@ -13713,14 +13533,50 @@
       </p:sp>
       <p:sp>
         <p:nvSpPr>
+          <p:cNvPr id="30" name="TextBox 29"/>
+          <p:cNvSpPr txBox="1"/>
+          <p:nvPr/>
+        </p:nvSpPr>
+        <p:spPr>
+          <a:xfrm>
+            <a:off x="7607934" y="2700274"/>
+            <a:ext cx="278130" cy="325755"/>
+          </a:xfrm>
+          <a:prstGeom prst="rect">
+            <a:avLst/>
+          </a:prstGeom>
+          <a:noFill/>
+        </p:spPr>
+        <p:txBody>
+          <a:bodyPr wrap="none" lIns="0" rIns="0" tIns="0" bIns="0">
+            <a:spAutoFit/>
+          </a:bodyPr>
+          <a:lstStyle/>
+          <a:p>
+            <a:pPr algn="l"/>
+            <a:r>
+              <a:rPr sz="1900" b="0">
+                <a:solidFill>
+                  <a:srgbClr val="F2F3E9"/>
+                </a:solidFill>
+                <a:latin typeface="Noto Sans SC"/>
+                <a:ea typeface="Noto Sans SC"/>
+              </a:rPr>
+              <a:t>5</a:t>
+            </a:r>
+          </a:p>
+        </p:txBody>
+      </p:sp>
+      <p:sp>
+        <p:nvSpPr>
           <p:cNvPr id="31" name="TextBox 30"/>
           <p:cNvSpPr txBox="1"/>
           <p:nvPr/>
         </p:nvSpPr>
         <p:spPr>
           <a:xfrm>
-            <a:off x="7607934" y="2700274"/>
-            <a:ext cx="278701" cy="325755"/>
+            <a:off x="8560435" y="2700274"/>
+            <a:ext cx="278130" cy="325755"/>
           </a:xfrm>
           <a:prstGeom prst="rect">
             <a:avLst/>
@@ -13742,7 +13598,7 @@
                 <a:latin typeface="Noto Sans SC"/>
                 <a:ea typeface="Noto Sans SC"/>
               </a:rPr>
-              <a:t>5</a:t>
+              <a:t>4</a:t>
             </a:r>
           </a:p>
         </p:txBody>
@@ -13755,8 +13611,8 @@
         </p:nvSpPr>
         <p:spPr>
           <a:xfrm>
-            <a:off x="8560435" y="2700274"/>
-            <a:ext cx="278701" cy="325755"/>
+            <a:off x="9512935" y="2700274"/>
+            <a:ext cx="411480" cy="325755"/>
           </a:xfrm>
           <a:prstGeom prst="rect">
             <a:avLst/>
@@ -13778,7 +13634,7 @@
                 <a:latin typeface="Noto Sans SC"/>
                 <a:ea typeface="Noto Sans SC"/>
               </a:rPr>
-              <a:t>4</a:t>
+              <a:t>+1</a:t>
             </a:r>
           </a:p>
         </p:txBody>
@@ -13791,8 +13647,8 @@
         </p:nvSpPr>
         <p:spPr>
           <a:xfrm>
-            <a:off x="9512935" y="2700274"/>
-            <a:ext cx="412623" cy="325755"/>
+            <a:off x="6083935" y="3220974"/>
+            <a:ext cx="297180" cy="325755"/>
           </a:xfrm>
           <a:prstGeom prst="rect">
             <a:avLst/>
@@ -13814,7 +13670,7 @@
                 <a:latin typeface="Noto Sans SC"/>
                 <a:ea typeface="Noto Sans SC"/>
               </a:rPr>
-              <a:t>+1</a:t>
+              <a:t>C</a:t>
             </a:r>
           </a:p>
         </p:txBody>
@@ -13822,42 +13678,6 @@
       <p:sp>
         <p:nvSpPr>
           <p:cNvPr id="34" name="TextBox 33"/>
-          <p:cNvSpPr txBox="1"/>
-          <p:nvPr/>
-        </p:nvSpPr>
-        <p:spPr>
-          <a:xfrm>
-            <a:off x="6083935" y="3220974"/>
-            <a:ext cx="298729" cy="325755"/>
-          </a:xfrm>
-          <a:prstGeom prst="rect">
-            <a:avLst/>
-          </a:prstGeom>
-          <a:noFill/>
-        </p:spPr>
-        <p:txBody>
-          <a:bodyPr wrap="none" lIns="0" rIns="0" tIns="0" bIns="0">
-            <a:spAutoFit/>
-          </a:bodyPr>
-          <a:lstStyle/>
-          <a:p>
-            <a:pPr algn="l"/>
-            <a:r>
-              <a:rPr sz="1900" b="0">
-                <a:solidFill>
-                  <a:srgbClr val="F2F3E9"/>
-                </a:solidFill>
-                <a:latin typeface="Noto Sans SC"/>
-                <a:ea typeface="Noto Sans SC"/>
-              </a:rPr>
-              <a:t>C</a:t>
-            </a:r>
-          </a:p>
-        </p:txBody>
-      </p:sp>
-      <p:sp>
-        <p:nvSpPr>
-          <p:cNvPr id="35" name="TextBox 34"/>
           <p:cNvSpPr txBox="1"/>
           <p:nvPr/>
         </p:nvSpPr>
@@ -13893,14 +13713,50 @@
       </p:sp>
       <p:sp>
         <p:nvSpPr>
+          <p:cNvPr id="35" name="TextBox 34"/>
+          <p:cNvSpPr txBox="1"/>
+          <p:nvPr/>
+        </p:nvSpPr>
+        <p:spPr>
+          <a:xfrm>
+            <a:off x="7607934" y="3220974"/>
+            <a:ext cx="278130" cy="325755"/>
+          </a:xfrm>
+          <a:prstGeom prst="rect">
+            <a:avLst/>
+          </a:prstGeom>
+          <a:noFill/>
+        </p:spPr>
+        <p:txBody>
+          <a:bodyPr wrap="none" lIns="0" rIns="0" tIns="0" bIns="0">
+            <a:spAutoFit/>
+          </a:bodyPr>
+          <a:lstStyle/>
+          <a:p>
+            <a:pPr algn="l"/>
+            <a:r>
+              <a:rPr sz="1900" b="0">
+                <a:solidFill>
+                  <a:srgbClr val="F2F3E9"/>
+                </a:solidFill>
+                <a:latin typeface="Noto Sans SC"/>
+                <a:ea typeface="Noto Sans SC"/>
+              </a:rPr>
+              <a:t>2</a:t>
+            </a:r>
+          </a:p>
+        </p:txBody>
+      </p:sp>
+      <p:sp>
+        <p:nvSpPr>
           <p:cNvPr id="36" name="TextBox 35"/>
           <p:cNvSpPr txBox="1"/>
           <p:nvPr/>
         </p:nvSpPr>
         <p:spPr>
           <a:xfrm>
-            <a:off x="7607934" y="3220974"/>
-            <a:ext cx="278701" cy="325755"/>
+            <a:off x="8560435" y="3220974"/>
+            <a:ext cx="278130" cy="325755"/>
           </a:xfrm>
           <a:prstGeom prst="rect">
             <a:avLst/>
@@ -13922,7 +13778,7 @@
                 <a:latin typeface="Noto Sans SC"/>
                 <a:ea typeface="Noto Sans SC"/>
               </a:rPr>
-              <a:t>2</a:t>
+              <a:t>6</a:t>
             </a:r>
           </a:p>
         </p:txBody>
@@ -13935,8 +13791,8 @@
         </p:nvSpPr>
         <p:spPr>
           <a:xfrm>
-            <a:off x="8560435" y="3220974"/>
-            <a:ext cx="278701" cy="325755"/>
+            <a:off x="9512935" y="3220974"/>
+            <a:ext cx="360680" cy="325755"/>
           </a:xfrm>
           <a:prstGeom prst="rect">
             <a:avLst/>
@@ -13958,7 +13814,7 @@
                 <a:latin typeface="Noto Sans SC"/>
                 <a:ea typeface="Noto Sans SC"/>
               </a:rPr>
-              <a:t>6</a:t>
+              <a:t>-4</a:t>
             </a:r>
           </a:p>
         </p:txBody>
@@ -13971,8 +13827,8 @@
         </p:nvSpPr>
         <p:spPr>
           <a:xfrm>
-            <a:off x="9512935" y="3220974"/>
-            <a:ext cx="362432" cy="325755"/>
+            <a:off x="6083935" y="3741674"/>
+            <a:ext cx="309880" cy="325755"/>
           </a:xfrm>
           <a:prstGeom prst="rect">
             <a:avLst/>
@@ -13994,7 +13850,7 @@
                 <a:latin typeface="Noto Sans SC"/>
                 <a:ea typeface="Noto Sans SC"/>
               </a:rPr>
-              <a:t>-4</a:t>
+              <a:t>D</a:t>
             </a:r>
           </a:p>
         </p:txBody>
@@ -14002,42 +13858,6 @@
       <p:sp>
         <p:nvSpPr>
           <p:cNvPr id="39" name="TextBox 38"/>
-          <p:cNvSpPr txBox="1"/>
-          <p:nvPr/>
-        </p:nvSpPr>
-        <p:spPr>
-          <a:xfrm>
-            <a:off x="6083935" y="3741674"/>
-            <a:ext cx="310794" cy="325755"/>
-          </a:xfrm>
-          <a:prstGeom prst="rect">
-            <a:avLst/>
-          </a:prstGeom>
-          <a:noFill/>
-        </p:spPr>
-        <p:txBody>
-          <a:bodyPr wrap="none" lIns="0" rIns="0" tIns="0" bIns="0">
-            <a:spAutoFit/>
-          </a:bodyPr>
-          <a:lstStyle/>
-          <a:p>
-            <a:pPr algn="l"/>
-            <a:r>
-              <a:rPr sz="1900" b="0">
-                <a:solidFill>
-                  <a:srgbClr val="F2F3E9"/>
-                </a:solidFill>
-                <a:latin typeface="Noto Sans SC"/>
-                <a:ea typeface="Noto Sans SC"/>
-              </a:rPr>
-              <a:t>D</a:t>
-            </a:r>
-          </a:p>
-        </p:txBody>
-      </p:sp>
-      <p:sp>
-        <p:nvSpPr>
-          <p:cNvPr id="40" name="TextBox 39"/>
           <p:cNvSpPr txBox="1"/>
           <p:nvPr/>
         </p:nvSpPr>
@@ -14073,14 +13893,50 @@
       </p:sp>
       <p:sp>
         <p:nvSpPr>
+          <p:cNvPr id="40" name="TextBox 39"/>
+          <p:cNvSpPr txBox="1"/>
+          <p:nvPr/>
+        </p:nvSpPr>
+        <p:spPr>
+          <a:xfrm>
+            <a:off x="7607934" y="3741674"/>
+            <a:ext cx="278130" cy="325755"/>
+          </a:xfrm>
+          <a:prstGeom prst="rect">
+            <a:avLst/>
+          </a:prstGeom>
+          <a:noFill/>
+        </p:spPr>
+        <p:txBody>
+          <a:bodyPr wrap="none" lIns="0" rIns="0" tIns="0" bIns="0">
+            <a:spAutoFit/>
+          </a:bodyPr>
+          <a:lstStyle/>
+          <a:p>
+            <a:pPr algn="l"/>
+            <a:r>
+              <a:rPr sz="1900" b="0">
+                <a:solidFill>
+                  <a:srgbClr val="F2F3E9"/>
+                </a:solidFill>
+                <a:latin typeface="Noto Sans SC"/>
+                <a:ea typeface="Noto Sans SC"/>
+              </a:rPr>
+              <a:t>5</a:t>
+            </a:r>
+          </a:p>
+        </p:txBody>
+      </p:sp>
+      <p:sp>
+        <p:nvSpPr>
           <p:cNvPr id="41" name="TextBox 40"/>
           <p:cNvSpPr txBox="1"/>
           <p:nvPr/>
         </p:nvSpPr>
         <p:spPr>
           <a:xfrm>
-            <a:off x="7607934" y="3741674"/>
-            <a:ext cx="278701" cy="325755"/>
+            <a:off x="8560435" y="3741674"/>
+            <a:ext cx="278130" cy="325755"/>
           </a:xfrm>
           <a:prstGeom prst="rect">
             <a:avLst/>
@@ -14102,7 +13958,7 @@
                 <a:latin typeface="Noto Sans SC"/>
                 <a:ea typeface="Noto Sans SC"/>
               </a:rPr>
-              <a:t>5</a:t>
+              <a:t>2</a:t>
             </a:r>
           </a:p>
         </p:txBody>
@@ -14115,8 +13971,8 @@
         </p:nvSpPr>
         <p:spPr>
           <a:xfrm>
-            <a:off x="8560435" y="3741674"/>
-            <a:ext cx="278701" cy="325755"/>
+            <a:off x="9512935" y="3741674"/>
+            <a:ext cx="411480" cy="325755"/>
           </a:xfrm>
           <a:prstGeom prst="rect">
             <a:avLst/>
@@ -14138,7 +13994,7 @@
                 <a:latin typeface="Noto Sans SC"/>
                 <a:ea typeface="Noto Sans SC"/>
               </a:rPr>
-              <a:t>2</a:t>
+              <a:t>+3</a:t>
             </a:r>
           </a:p>
         </p:txBody>
@@ -14151,8 +14007,8 @@
         </p:nvSpPr>
         <p:spPr>
           <a:xfrm>
-            <a:off x="9512935" y="3741674"/>
-            <a:ext cx="412623" cy="325755"/>
+            <a:off x="6083935" y="4262374"/>
+            <a:ext cx="284480" cy="325755"/>
           </a:xfrm>
           <a:prstGeom prst="rect">
             <a:avLst/>
@@ -14174,7 +14030,7 @@
                 <a:latin typeface="Noto Sans SC"/>
                 <a:ea typeface="Noto Sans SC"/>
               </a:rPr>
-              <a:t>+3</a:t>
+              <a:t>E</a:t>
             </a:r>
           </a:p>
         </p:txBody>
@@ -14182,42 +14038,6 @@
       <p:sp>
         <p:nvSpPr>
           <p:cNvPr id="44" name="TextBox 43"/>
-          <p:cNvSpPr txBox="1"/>
-          <p:nvPr/>
-        </p:nvSpPr>
-        <p:spPr>
-          <a:xfrm>
-            <a:off x="6083935" y="4262374"/>
-            <a:ext cx="286905" cy="325755"/>
-          </a:xfrm>
-          <a:prstGeom prst="rect">
-            <a:avLst/>
-          </a:prstGeom>
-          <a:noFill/>
-        </p:spPr>
-        <p:txBody>
-          <a:bodyPr wrap="none" lIns="0" rIns="0" tIns="0" bIns="0">
-            <a:spAutoFit/>
-          </a:bodyPr>
-          <a:lstStyle/>
-          <a:p>
-            <a:pPr algn="l"/>
-            <a:r>
-              <a:rPr sz="1900" b="0">
-                <a:solidFill>
-                  <a:srgbClr val="F2F3E9"/>
-                </a:solidFill>
-                <a:latin typeface="Noto Sans SC"/>
-                <a:ea typeface="Noto Sans SC"/>
-              </a:rPr>
-              <a:t>E</a:t>
-            </a:r>
-          </a:p>
-        </p:txBody>
-      </p:sp>
-      <p:sp>
-        <p:nvSpPr>
-          <p:cNvPr id="45" name="TextBox 44"/>
           <p:cNvSpPr txBox="1"/>
           <p:nvPr/>
         </p:nvSpPr>
@@ -14253,14 +14073,50 @@
       </p:sp>
       <p:sp>
         <p:nvSpPr>
+          <p:cNvPr id="45" name="TextBox 44"/>
+          <p:cNvSpPr txBox="1"/>
+          <p:nvPr/>
+        </p:nvSpPr>
+        <p:spPr>
+          <a:xfrm>
+            <a:off x="7607934" y="4262374"/>
+            <a:ext cx="278130" cy="325755"/>
+          </a:xfrm>
+          <a:prstGeom prst="rect">
+            <a:avLst/>
+          </a:prstGeom>
+          <a:noFill/>
+        </p:spPr>
+        <p:txBody>
+          <a:bodyPr wrap="none" lIns="0" rIns="0" tIns="0" bIns="0">
+            <a:spAutoFit/>
+          </a:bodyPr>
+          <a:lstStyle/>
+          <a:p>
+            <a:pPr algn="l"/>
+            <a:r>
+              <a:rPr sz="1900" b="0">
+                <a:solidFill>
+                  <a:srgbClr val="F2F3E9"/>
+                </a:solidFill>
+                <a:latin typeface="Noto Sans SC"/>
+                <a:ea typeface="Noto Sans SC"/>
+              </a:rPr>
+              <a:t>6</a:t>
+            </a:r>
+          </a:p>
+        </p:txBody>
+      </p:sp>
+      <p:sp>
+        <p:nvSpPr>
           <p:cNvPr id="46" name="TextBox 45"/>
           <p:cNvSpPr txBox="1"/>
           <p:nvPr/>
         </p:nvSpPr>
         <p:spPr>
           <a:xfrm>
-            <a:off x="7607934" y="4262374"/>
-            <a:ext cx="278701" cy="325755"/>
+            <a:off x="8560435" y="4262374"/>
+            <a:ext cx="278130" cy="325755"/>
           </a:xfrm>
           <a:prstGeom prst="rect">
             <a:avLst/>
@@ -14282,7 +14138,7 @@
                 <a:latin typeface="Noto Sans SC"/>
                 <a:ea typeface="Noto Sans SC"/>
               </a:rPr>
-              <a:t>6</a:t>
+              <a:t>0</a:t>
             </a:r>
           </a:p>
         </p:txBody>
@@ -14295,44 +14151,8 @@
         </p:nvSpPr>
         <p:spPr>
           <a:xfrm>
-            <a:off x="8560435" y="4262374"/>
-            <a:ext cx="278701" cy="325755"/>
-          </a:xfrm>
-          <a:prstGeom prst="rect">
-            <a:avLst/>
-          </a:prstGeom>
-          <a:noFill/>
-        </p:spPr>
-        <p:txBody>
-          <a:bodyPr wrap="none" lIns="0" rIns="0" tIns="0" bIns="0">
-            <a:spAutoFit/>
-          </a:bodyPr>
-          <a:lstStyle/>
-          <a:p>
-            <a:pPr algn="l"/>
-            <a:r>
-              <a:rPr sz="1900" b="0">
-                <a:solidFill>
-                  <a:srgbClr val="F2F3E9"/>
-                </a:solidFill>
-                <a:latin typeface="Noto Sans SC"/>
-                <a:ea typeface="Noto Sans SC"/>
-              </a:rPr>
-              <a:t>0</a:t>
-            </a:r>
-          </a:p>
-        </p:txBody>
-      </p:sp>
-      <p:sp>
-        <p:nvSpPr>
-          <p:cNvPr id="48" name="TextBox 47"/>
-          <p:cNvSpPr txBox="1"/>
-          <p:nvPr/>
-        </p:nvSpPr>
-        <p:spPr>
-          <a:xfrm>
             <a:off x="9512935" y="4262374"/>
-            <a:ext cx="412623" cy="325755"/>
+            <a:ext cx="411480" cy="325755"/>
           </a:xfrm>
           <a:prstGeom prst="rect">
             <a:avLst/>
@@ -14585,7 +14405,7 @@
         <p:spPr>
           <a:xfrm>
             <a:off x="563880" y="6512052"/>
-            <a:ext cx="2418587" cy="205740"/>
+            <a:ext cx="2428240" cy="205740"/>
           </a:xfrm>
           <a:prstGeom prst="rect">
             <a:avLst/>
@@ -14620,8 +14440,8 @@
         </p:nvSpPr>
         <p:spPr>
           <a:xfrm>
-            <a:off x="11108524" y="6499098"/>
-            <a:ext cx="561505" cy="222885"/>
+            <a:off x="11113770" y="6499098"/>
+            <a:ext cx="556260" cy="222885"/>
           </a:xfrm>
           <a:prstGeom prst="rect">
             <a:avLst/>
@@ -14650,43 +14470,7 @@
       </p:sp>
       <p:sp>
         <p:nvSpPr>
-          <p:cNvPr id="9" name="TextBox 8"/>
-          <p:cNvSpPr txBox="1"/>
-          <p:nvPr/>
-        </p:nvSpPr>
-        <p:spPr>
-          <a:xfrm>
-            <a:off x="10855147" y="377952"/>
-            <a:ext cx="811072" cy="205740"/>
-          </a:xfrm>
-          <a:prstGeom prst="rect">
-            <a:avLst/>
-          </a:prstGeom>
-          <a:noFill/>
-        </p:spPr>
-        <p:txBody>
-          <a:bodyPr wrap="none" lIns="0" rIns="0" tIns="0" bIns="0">
-            <a:spAutoFit/>
-          </a:bodyPr>
-          <a:lstStyle/>
-          <a:p>
-            <a:pPr algn="r"/>
-            <a:r>
-              <a:rPr sz="1200" b="0">
-                <a:solidFill>
-                  <a:srgbClr val="6F8F8F"/>
-                </a:solidFill>
-                <a:latin typeface="Noto Sans SC"/>
-                <a:ea typeface="Noto Sans SC"/>
-              </a:rPr>
-              <a:t>影片 00:40</a:t>
-            </a:r>
-          </a:p>
-        </p:txBody>
-      </p:sp>
-      <p:sp>
-        <p:nvSpPr>
-          <p:cNvPr id="10" name="Oval 9"/>
+          <p:cNvPr id="9" name="Oval 8"/>
           <p:cNvSpPr/>
           <p:nvPr/>
         </p:nvSpPr>
@@ -14728,7 +14512,7 @@
       </p:sp>
       <p:sp>
         <p:nvSpPr>
-          <p:cNvPr id="11" name="TextBox 10"/>
+          <p:cNvPr id="10" name="TextBox 9"/>
           <p:cNvSpPr txBox="1"/>
           <p:nvPr/>
         </p:nvSpPr>
@@ -14768,7 +14552,7 @@
       </p:sp>
       <p:sp>
         <p:nvSpPr>
-          <p:cNvPr id="12" name="Oval 11"/>
+          <p:cNvPr id="11" name="Oval 10"/>
           <p:cNvSpPr/>
           <p:nvPr/>
         </p:nvSpPr>
@@ -14810,7 +14594,7 @@
       </p:sp>
       <p:sp>
         <p:nvSpPr>
-          <p:cNvPr id="13" name="TextBox 12"/>
+          <p:cNvPr id="12" name="TextBox 11"/>
           <p:cNvSpPr txBox="1"/>
           <p:nvPr/>
         </p:nvSpPr>
@@ -14850,7 +14634,7 @@
       </p:sp>
       <p:sp>
         <p:nvSpPr>
-          <p:cNvPr id="14" name="Oval 13"/>
+          <p:cNvPr id="13" name="Oval 12"/>
           <p:cNvSpPr/>
           <p:nvPr/>
         </p:nvSpPr>
@@ -14892,7 +14676,7 @@
       </p:sp>
       <p:sp>
         <p:nvSpPr>
-          <p:cNvPr id="15" name="TextBox 14"/>
+          <p:cNvPr id="14" name="TextBox 13"/>
           <p:cNvSpPr txBox="1"/>
           <p:nvPr/>
         </p:nvSpPr>
@@ -14932,7 +14716,7 @@
       </p:sp>
       <p:sp>
         <p:nvSpPr>
-          <p:cNvPr id="16" name="Oval 15"/>
+          <p:cNvPr id="15" name="Oval 14"/>
           <p:cNvSpPr/>
           <p:nvPr/>
         </p:nvSpPr>
@@ -14974,7 +14758,7 @@
       </p:sp>
       <p:sp>
         <p:nvSpPr>
-          <p:cNvPr id="17" name="TextBox 16"/>
+          <p:cNvPr id="16" name="TextBox 15"/>
           <p:cNvSpPr txBox="1"/>
           <p:nvPr/>
         </p:nvSpPr>
@@ -15014,14 +14798,50 @@
       </p:sp>
       <p:sp>
         <p:nvSpPr>
+          <p:cNvPr id="17" name="TextBox 16"/>
+          <p:cNvSpPr txBox="1"/>
+          <p:nvPr/>
+        </p:nvSpPr>
+        <p:spPr>
+          <a:xfrm>
+            <a:off x="6666230" y="1556512"/>
+            <a:ext cx="2853690" cy="377190"/>
+          </a:xfrm>
+          <a:prstGeom prst="rect">
+            <a:avLst/>
+          </a:prstGeom>
+          <a:noFill/>
+        </p:spPr>
+        <p:txBody>
+          <a:bodyPr wrap="none" lIns="0" rIns="0" tIns="0" bIns="0">
+            <a:spAutoFit/>
+          </a:bodyPr>
+          <a:lstStyle/>
+          <a:p>
+            <a:pPr algn="l"/>
+            <a:r>
+              <a:rPr sz="2200" b="0">
+                <a:solidFill>
+                  <a:srgbClr val="F2F3E9"/>
+                </a:solidFill>
+                <a:latin typeface="Noto Sans SC"/>
+                <a:ea typeface="Noto Sans SC"/>
+              </a:rPr>
+              <a:t>g(a,b) = D(a) + D(b) − </a:t>
+            </a:r>
+          </a:p>
+        </p:txBody>
+      </p:sp>
+      <p:sp>
+        <p:nvSpPr>
           <p:cNvPr id="18" name="TextBox 17"/>
           <p:cNvSpPr txBox="1"/>
           <p:nvPr/>
         </p:nvSpPr>
         <p:spPr>
           <a:xfrm>
-            <a:off x="6663702" y="1556512"/>
-            <a:ext cx="2854629" cy="377190"/>
+            <a:off x="9352280" y="1556512"/>
+            <a:ext cx="1139190" cy="377190"/>
           </a:xfrm>
           <a:prstGeom prst="rect">
             <a:avLst/>
@@ -15038,12 +14858,12 @@
             <a:r>
               <a:rPr sz="2200" b="0">
                 <a:solidFill>
-                  <a:srgbClr val="F2F3E9"/>
-                </a:solidFill>
-                <a:latin typeface="Noto Sans SC"/>
-                <a:ea typeface="Noto Sans SC"/>
-              </a:rPr>
-              <a:t>g(a,b) = D(a) + D(b) − </a:t>
+                  <a:srgbClr val="DB7B72"/>
+                </a:solidFill>
+                <a:latin typeface="Noto Sans SC"/>
+                <a:ea typeface="Noto Sans SC"/>
+              </a:rPr>
+              <a:t>2w(a,b)</a:t>
             </a:r>
           </a:p>
         </p:txBody>
@@ -15056,8 +14876,8 @@
         </p:nvSpPr>
         <p:spPr>
           <a:xfrm>
-            <a:off x="9350692" y="1556512"/>
-            <a:ext cx="1143304" cy="377190"/>
+            <a:off x="6085840" y="2332736"/>
+            <a:ext cx="490220" cy="274320"/>
           </a:xfrm>
           <a:prstGeom prst="rect">
             <a:avLst/>
@@ -15072,14 +14892,14 @@
           <a:p>
             <a:pPr algn="l"/>
             <a:r>
-              <a:rPr sz="2200" b="0">
-                <a:solidFill>
-                  <a:srgbClr val="DB7B72"/>
-                </a:solidFill>
-                <a:latin typeface="Noto Sans SC"/>
-                <a:ea typeface="Noto Sans SC"/>
-              </a:rPr>
-              <a:t>2w(a,b)</a:t>
+              <a:rPr sz="1600" b="1">
+                <a:solidFill>
+                  <a:srgbClr val="BCD2D0"/>
+                </a:solidFill>
+                <a:latin typeface="Noto Sans SC"/>
+                <a:ea typeface="Noto Sans SC"/>
+              </a:rPr>
+              <a:t>左 a</a:t>
             </a:r>
           </a:p>
         </p:txBody>
@@ -15092,8 +14912,8 @@
         </p:nvSpPr>
         <p:spPr>
           <a:xfrm>
-            <a:off x="6085840" y="2332736"/>
-            <a:ext cx="491337" cy="274320"/>
+            <a:off x="6847840" y="2332736"/>
+            <a:ext cx="502920" cy="274320"/>
           </a:xfrm>
           <a:prstGeom prst="rect">
             <a:avLst/>
@@ -15115,7 +14935,7 @@
                 <a:latin typeface="Noto Sans SC"/>
                 <a:ea typeface="Noto Sans SC"/>
               </a:rPr>
-              <a:t>左 a</a:t>
+              <a:t>右 b</a:t>
             </a:r>
           </a:p>
         </p:txBody>
@@ -15128,8 +14948,8 @@
         </p:nvSpPr>
         <p:spPr>
           <a:xfrm>
-            <a:off x="6847840" y="2332736"/>
-            <a:ext cx="502107" cy="274320"/>
+            <a:off x="7609840" y="2332736"/>
+            <a:ext cx="1093470" cy="274320"/>
           </a:xfrm>
           <a:prstGeom prst="rect">
             <a:avLst/>
@@ -15151,7 +14971,7 @@
                 <a:latin typeface="Noto Sans SC"/>
                 <a:ea typeface="Noto Sans SC"/>
               </a:rPr>
-              <a:t>右 b</a:t>
+              <a:t>D(a)+D(b)</a:t>
             </a:r>
           </a:p>
         </p:txBody>
@@ -15164,8 +14984,8 @@
         </p:nvSpPr>
         <p:spPr>
           <a:xfrm>
-            <a:off x="7609840" y="2332736"/>
-            <a:ext cx="1090167" cy="274320"/>
+            <a:off x="9006840" y="2332736"/>
+            <a:ext cx="541020" cy="274320"/>
           </a:xfrm>
           <a:prstGeom prst="rect">
             <a:avLst/>
@@ -15187,7 +15007,7 @@
                 <a:latin typeface="Noto Sans SC"/>
                 <a:ea typeface="Noto Sans SC"/>
               </a:rPr>
-              <a:t>D(a)+D(b)</a:t>
+              <a:t>−2w</a:t>
             </a:r>
           </a:p>
         </p:txBody>
@@ -15200,44 +15020,8 @@
         </p:nvSpPr>
         <p:spPr>
           <a:xfrm>
-            <a:off x="9006840" y="2332736"/>
-            <a:ext cx="537057" cy="274320"/>
-          </a:xfrm>
-          <a:prstGeom prst="rect">
-            <a:avLst/>
-          </a:prstGeom>
-          <a:noFill/>
-        </p:spPr>
-        <p:txBody>
-          <a:bodyPr wrap="none" lIns="0" rIns="0" tIns="0" bIns="0">
-            <a:spAutoFit/>
-          </a:bodyPr>
-          <a:lstStyle/>
-          <a:p>
-            <a:pPr algn="l"/>
-            <a:r>
-              <a:rPr sz="1600" b="1">
-                <a:solidFill>
-                  <a:srgbClr val="BCD2D0"/>
-                </a:solidFill>
-                <a:latin typeface="Noto Sans SC"/>
-                <a:ea typeface="Noto Sans SC"/>
-              </a:rPr>
-              <a:t>−2w</a:t>
-            </a:r>
-          </a:p>
-        </p:txBody>
-      </p:sp>
-      <p:sp>
-        <p:nvSpPr>
-          <p:cNvPr id="24" name="TextBox 23"/>
-          <p:cNvSpPr txBox="1"/>
-          <p:nvPr/>
-        </p:nvSpPr>
-        <p:spPr>
-          <a:xfrm>
             <a:off x="9895840" y="2332736"/>
-            <a:ext cx="243230" cy="274320"/>
+            <a:ext cx="242570" cy="274320"/>
           </a:xfrm>
           <a:prstGeom prst="rect">
             <a:avLst/>
@@ -15266,7 +15050,7 @@
       </p:sp>
       <p:cxnSp>
         <p:nvCxnSpPr>
-          <p:cNvPr id="25" name="Connector 24"/>
+          <p:cNvPr id="24" name="Connector 23"/>
           <p:cNvCxnSpPr/>
           <p:nvPr/>
         </p:nvCxnSpPr>
@@ -15301,7 +15085,7 @@
       </p:cxnSp>
       <p:sp>
         <p:nvSpPr>
-          <p:cNvPr id="26" name="Rounded Rectangle 25"/>
+          <p:cNvPr id="25" name="Rounded Rectangle 24"/>
           <p:cNvSpPr/>
           <p:nvPr/>
         </p:nvSpPr>
@@ -15347,14 +15131,50 @@
       </p:sp>
       <p:sp>
         <p:nvSpPr>
+          <p:cNvPr id="26" name="TextBox 25"/>
+          <p:cNvSpPr txBox="1"/>
+          <p:nvPr/>
+        </p:nvSpPr>
+        <p:spPr>
+          <a:xfrm>
+            <a:off x="6084570" y="2776728"/>
+            <a:ext cx="276859" cy="308610"/>
+          </a:xfrm>
+          <a:prstGeom prst="rect">
+            <a:avLst/>
+          </a:prstGeom>
+          <a:noFill/>
+        </p:spPr>
+        <p:txBody>
+          <a:bodyPr wrap="none" lIns="0" rIns="0" tIns="0" bIns="0">
+            <a:spAutoFit/>
+          </a:bodyPr>
+          <a:lstStyle/>
+          <a:p>
+            <a:pPr algn="l"/>
+            <a:r>
+              <a:rPr sz="1800" b="0">
+                <a:solidFill>
+                  <a:srgbClr val="F2F3E9"/>
+                </a:solidFill>
+                <a:latin typeface="Noto Sans SC"/>
+                <a:ea typeface="Noto Sans SC"/>
+              </a:rPr>
+              <a:t>A</a:t>
+            </a:r>
+          </a:p>
+        </p:txBody>
+      </p:sp>
+      <p:sp>
+        <p:nvSpPr>
           <p:cNvPr id="27" name="TextBox 26"/>
           <p:cNvSpPr txBox="1"/>
           <p:nvPr/>
         </p:nvSpPr>
         <p:spPr>
           <a:xfrm>
-            <a:off x="6084570" y="2776728"/>
-            <a:ext cx="276148" cy="308610"/>
+            <a:off x="6846570" y="2776728"/>
+            <a:ext cx="295909" cy="308610"/>
           </a:xfrm>
           <a:prstGeom prst="rect">
             <a:avLst/>
@@ -15376,6 +15196,330 @@
                 <a:latin typeface="Noto Sans SC"/>
                 <a:ea typeface="Noto Sans SC"/>
               </a:rPr>
+              <a:t>D</a:t>
+            </a:r>
+          </a:p>
+        </p:txBody>
+      </p:sp>
+      <p:sp>
+        <p:nvSpPr>
+          <p:cNvPr id="28" name="TextBox 27"/>
+          <p:cNvSpPr txBox="1"/>
+          <p:nvPr/>
+        </p:nvSpPr>
+        <p:spPr>
+          <a:xfrm>
+            <a:off x="7608570" y="2776728"/>
+            <a:ext cx="264159" cy="308610"/>
+          </a:xfrm>
+          <a:prstGeom prst="rect">
+            <a:avLst/>
+          </a:prstGeom>
+          <a:noFill/>
+        </p:spPr>
+        <p:txBody>
+          <a:bodyPr wrap="none" lIns="0" rIns="0" tIns="0" bIns="0">
+            <a:spAutoFit/>
+          </a:bodyPr>
+          <a:lstStyle/>
+          <a:p>
+            <a:pPr algn="l"/>
+            <a:r>
+              <a:rPr sz="1800" b="0">
+                <a:solidFill>
+                  <a:srgbClr val="F2F3E9"/>
+                </a:solidFill>
+                <a:latin typeface="Noto Sans SC"/>
+                <a:ea typeface="Noto Sans SC"/>
+              </a:rPr>
+              <a:t>9</a:t>
+            </a:r>
+          </a:p>
+        </p:txBody>
+      </p:sp>
+      <p:sp>
+        <p:nvSpPr>
+          <p:cNvPr id="29" name="TextBox 28"/>
+          <p:cNvSpPr txBox="1"/>
+          <p:nvPr/>
+        </p:nvSpPr>
+        <p:spPr>
+          <a:xfrm>
+            <a:off x="9005570" y="2776728"/>
+            <a:ext cx="264159" cy="308610"/>
+          </a:xfrm>
+          <a:prstGeom prst="rect">
+            <a:avLst/>
+          </a:prstGeom>
+          <a:noFill/>
+        </p:spPr>
+        <p:txBody>
+          <a:bodyPr wrap="none" lIns="0" rIns="0" tIns="0" bIns="0">
+            <a:spAutoFit/>
+          </a:bodyPr>
+          <a:lstStyle/>
+          <a:p>
+            <a:pPr algn="l"/>
+            <a:r>
+              <a:rPr sz="1800" b="0">
+                <a:solidFill>
+                  <a:srgbClr val="F2F3E9"/>
+                </a:solidFill>
+                <a:latin typeface="Noto Sans SC"/>
+                <a:ea typeface="Noto Sans SC"/>
+              </a:rPr>
+              <a:t>0</a:t>
+            </a:r>
+          </a:p>
+        </p:txBody>
+      </p:sp>
+      <p:sp>
+        <p:nvSpPr>
+          <p:cNvPr id="30" name="TextBox 29"/>
+          <p:cNvSpPr txBox="1"/>
+          <p:nvPr/>
+        </p:nvSpPr>
+        <p:spPr>
+          <a:xfrm>
+            <a:off x="9894570" y="2776728"/>
+            <a:ext cx="391159" cy="308610"/>
+          </a:xfrm>
+          <a:prstGeom prst="rect">
+            <a:avLst/>
+          </a:prstGeom>
+          <a:noFill/>
+        </p:spPr>
+        <p:txBody>
+          <a:bodyPr wrap="none" lIns="0" rIns="0" tIns="0" bIns="0">
+            <a:spAutoFit/>
+          </a:bodyPr>
+          <a:lstStyle/>
+          <a:p>
+            <a:pPr algn="l"/>
+            <a:r>
+              <a:rPr sz="1800" b="0">
+                <a:solidFill>
+                  <a:srgbClr val="F2F3E9"/>
+                </a:solidFill>
+                <a:latin typeface="Noto Sans SC"/>
+                <a:ea typeface="Noto Sans SC"/>
+              </a:rPr>
+              <a:t>+9</a:t>
+            </a:r>
+          </a:p>
+        </p:txBody>
+      </p:sp>
+      <p:sp>
+        <p:nvSpPr>
+          <p:cNvPr id="31" name="TextBox 30"/>
+          <p:cNvSpPr txBox="1"/>
+          <p:nvPr/>
+        </p:nvSpPr>
+        <p:spPr>
+          <a:xfrm>
+            <a:off x="6084570" y="3246628"/>
+            <a:ext cx="270509" cy="308610"/>
+          </a:xfrm>
+          <a:prstGeom prst="rect">
+            <a:avLst/>
+          </a:prstGeom>
+          <a:noFill/>
+        </p:spPr>
+        <p:txBody>
+          <a:bodyPr wrap="none" lIns="0" rIns="0" tIns="0" bIns="0">
+            <a:spAutoFit/>
+          </a:bodyPr>
+          <a:lstStyle/>
+          <a:p>
+            <a:pPr algn="l"/>
+            <a:r>
+              <a:rPr sz="1800" b="0">
+                <a:solidFill>
+                  <a:srgbClr val="F2F3E9"/>
+                </a:solidFill>
+                <a:latin typeface="Noto Sans SC"/>
+                <a:ea typeface="Noto Sans SC"/>
+              </a:rPr>
+              <a:t>E</a:t>
+            </a:r>
+          </a:p>
+        </p:txBody>
+      </p:sp>
+      <p:sp>
+        <p:nvSpPr>
+          <p:cNvPr id="32" name="TextBox 31"/>
+          <p:cNvSpPr txBox="1"/>
+          <p:nvPr/>
+        </p:nvSpPr>
+        <p:spPr>
+          <a:xfrm>
+            <a:off x="6846570" y="3246628"/>
+            <a:ext cx="289559" cy="308610"/>
+          </a:xfrm>
+          <a:prstGeom prst="rect">
+            <a:avLst/>
+          </a:prstGeom>
+          <a:noFill/>
+        </p:spPr>
+        <p:txBody>
+          <a:bodyPr wrap="none" lIns="0" rIns="0" tIns="0" bIns="0">
+            <a:spAutoFit/>
+          </a:bodyPr>
+          <a:lstStyle/>
+          <a:p>
+            <a:pPr algn="l"/>
+            <a:r>
+              <a:rPr sz="1800" b="0">
+                <a:solidFill>
+                  <a:srgbClr val="F2F3E9"/>
+                </a:solidFill>
+                <a:latin typeface="Noto Sans SC"/>
+                <a:ea typeface="Noto Sans SC"/>
+              </a:rPr>
+              <a:t>B</a:t>
+            </a:r>
+          </a:p>
+        </p:txBody>
+      </p:sp>
+      <p:sp>
+        <p:nvSpPr>
+          <p:cNvPr id="33" name="TextBox 32"/>
+          <p:cNvSpPr txBox="1"/>
+          <p:nvPr/>
+        </p:nvSpPr>
+        <p:spPr>
+          <a:xfrm>
+            <a:off x="7608570" y="3246628"/>
+            <a:ext cx="264159" cy="308610"/>
+          </a:xfrm>
+          <a:prstGeom prst="rect">
+            <a:avLst/>
+          </a:prstGeom>
+          <a:noFill/>
+        </p:spPr>
+        <p:txBody>
+          <a:bodyPr wrap="none" lIns="0" rIns="0" tIns="0" bIns="0">
+            <a:spAutoFit/>
+          </a:bodyPr>
+          <a:lstStyle/>
+          <a:p>
+            <a:pPr algn="l"/>
+            <a:r>
+              <a:rPr sz="1800" b="0">
+                <a:solidFill>
+                  <a:srgbClr val="F2F3E9"/>
+                </a:solidFill>
+                <a:latin typeface="Noto Sans SC"/>
+                <a:ea typeface="Noto Sans SC"/>
+              </a:rPr>
+              <a:t>7</a:t>
+            </a:r>
+          </a:p>
+        </p:txBody>
+      </p:sp>
+      <p:sp>
+        <p:nvSpPr>
+          <p:cNvPr id="34" name="TextBox 33"/>
+          <p:cNvSpPr txBox="1"/>
+          <p:nvPr/>
+        </p:nvSpPr>
+        <p:spPr>
+          <a:xfrm>
+            <a:off x="9005570" y="3246628"/>
+            <a:ext cx="264159" cy="308610"/>
+          </a:xfrm>
+          <a:prstGeom prst="rect">
+            <a:avLst/>
+          </a:prstGeom>
+          <a:noFill/>
+        </p:spPr>
+        <p:txBody>
+          <a:bodyPr wrap="none" lIns="0" rIns="0" tIns="0" bIns="0">
+            <a:spAutoFit/>
+          </a:bodyPr>
+          <a:lstStyle/>
+          <a:p>
+            <a:pPr algn="l"/>
+            <a:r>
+              <a:rPr sz="1800" b="0">
+                <a:solidFill>
+                  <a:srgbClr val="F2F3E9"/>
+                </a:solidFill>
+                <a:latin typeface="Noto Sans SC"/>
+                <a:ea typeface="Noto Sans SC"/>
+              </a:rPr>
+              <a:t>0</a:t>
+            </a:r>
+          </a:p>
+        </p:txBody>
+      </p:sp>
+      <p:sp>
+        <p:nvSpPr>
+          <p:cNvPr id="35" name="TextBox 34"/>
+          <p:cNvSpPr txBox="1"/>
+          <p:nvPr/>
+        </p:nvSpPr>
+        <p:spPr>
+          <a:xfrm>
+            <a:off x="9894570" y="3246628"/>
+            <a:ext cx="391159" cy="308610"/>
+          </a:xfrm>
+          <a:prstGeom prst="rect">
+            <a:avLst/>
+          </a:prstGeom>
+          <a:noFill/>
+        </p:spPr>
+        <p:txBody>
+          <a:bodyPr wrap="none" lIns="0" rIns="0" tIns="0" bIns="0">
+            <a:spAutoFit/>
+          </a:bodyPr>
+          <a:lstStyle/>
+          <a:p>
+            <a:pPr algn="l"/>
+            <a:r>
+              <a:rPr sz="1800" b="0">
+                <a:solidFill>
+                  <a:srgbClr val="F2F3E9"/>
+                </a:solidFill>
+                <a:latin typeface="Noto Sans SC"/>
+                <a:ea typeface="Noto Sans SC"/>
+              </a:rPr>
+              <a:t>+7</a:t>
+            </a:r>
+          </a:p>
+        </p:txBody>
+      </p:sp>
+      <p:sp>
+        <p:nvSpPr>
+          <p:cNvPr id="36" name="TextBox 35"/>
+          <p:cNvSpPr txBox="1"/>
+          <p:nvPr/>
+        </p:nvSpPr>
+        <p:spPr>
+          <a:xfrm>
+            <a:off x="6084570" y="3716528"/>
+            <a:ext cx="276859" cy="308610"/>
+          </a:xfrm>
+          <a:prstGeom prst="rect">
+            <a:avLst/>
+          </a:prstGeom>
+          <a:noFill/>
+        </p:spPr>
+        <p:txBody>
+          <a:bodyPr wrap="none" lIns="0" rIns="0" tIns="0" bIns="0">
+            <a:spAutoFit/>
+          </a:bodyPr>
+          <a:lstStyle/>
+          <a:p>
+            <a:pPr algn="l"/>
+            <a:r>
+              <a:rPr sz="1800" b="0">
+                <a:solidFill>
+                  <a:srgbClr val="F2F3E9"/>
+                </a:solidFill>
+                <a:latin typeface="Noto Sans SC"/>
+                <a:ea typeface="Noto Sans SC"/>
+              </a:rPr>
               <a:t>A</a:t>
             </a:r>
           </a:p>
@@ -15383,14 +15527,14 @@
       </p:sp>
       <p:sp>
         <p:nvSpPr>
-          <p:cNvPr id="28" name="TextBox 27"/>
-          <p:cNvSpPr txBox="1"/>
-          <p:nvPr/>
-        </p:nvSpPr>
-        <p:spPr>
-          <a:xfrm>
-            <a:off x="6846570" y="2776728"/>
-            <a:ext cx="294436" cy="308610"/>
+          <p:cNvPr id="37" name="TextBox 36"/>
+          <p:cNvSpPr txBox="1"/>
+          <p:nvPr/>
+        </p:nvSpPr>
+        <p:spPr>
+          <a:xfrm>
+            <a:off x="6846570" y="3716528"/>
+            <a:ext cx="283209" cy="308610"/>
           </a:xfrm>
           <a:prstGeom prst="rect">
             <a:avLst/>
@@ -15412,6 +15556,366 @@
                 <a:latin typeface="Noto Sans SC"/>
                 <a:ea typeface="Noto Sans SC"/>
               </a:rPr>
+              <a:t>C</a:t>
+            </a:r>
+          </a:p>
+        </p:txBody>
+      </p:sp>
+      <p:sp>
+        <p:nvSpPr>
+          <p:cNvPr id="38" name="TextBox 37"/>
+          <p:cNvSpPr txBox="1"/>
+          <p:nvPr/>
+        </p:nvSpPr>
+        <p:spPr>
+          <a:xfrm>
+            <a:off x="7608570" y="3716528"/>
+            <a:ext cx="264159" cy="308610"/>
+          </a:xfrm>
+          <a:prstGeom prst="rect">
+            <a:avLst/>
+          </a:prstGeom>
+          <a:noFill/>
+        </p:spPr>
+        <p:txBody>
+          <a:bodyPr wrap="none" lIns="0" rIns="0" tIns="0" bIns="0">
+            <a:spAutoFit/>
+          </a:bodyPr>
+          <a:lstStyle/>
+          <a:p>
+            <a:pPr algn="l"/>
+            <a:r>
+              <a:rPr sz="1800" b="0">
+                <a:solidFill>
+                  <a:srgbClr val="F2F3E9"/>
+                </a:solidFill>
+                <a:latin typeface="Noto Sans SC"/>
+                <a:ea typeface="Noto Sans SC"/>
+              </a:rPr>
+              <a:t>2</a:t>
+            </a:r>
+          </a:p>
+        </p:txBody>
+      </p:sp>
+      <p:sp>
+        <p:nvSpPr>
+          <p:cNvPr id="39" name="TextBox 38"/>
+          <p:cNvSpPr txBox="1"/>
+          <p:nvPr/>
+        </p:nvSpPr>
+        <p:spPr>
+          <a:xfrm>
+            <a:off x="9005570" y="3716528"/>
+            <a:ext cx="340359" cy="308610"/>
+          </a:xfrm>
+          <a:prstGeom prst="rect">
+            <a:avLst/>
+          </a:prstGeom>
+          <a:noFill/>
+        </p:spPr>
+        <p:txBody>
+          <a:bodyPr wrap="none" lIns="0" rIns="0" tIns="0" bIns="0">
+            <a:spAutoFit/>
+          </a:bodyPr>
+          <a:lstStyle/>
+          <a:p>
+            <a:pPr algn="l"/>
+            <a:r>
+              <a:rPr sz="1800" b="0">
+                <a:solidFill>
+                  <a:srgbClr val="F2F3E9"/>
+                </a:solidFill>
+                <a:latin typeface="Noto Sans SC"/>
+                <a:ea typeface="Noto Sans SC"/>
+              </a:rPr>
+              <a:t>-2</a:t>
+            </a:r>
+          </a:p>
+        </p:txBody>
+      </p:sp>
+      <p:sp>
+        <p:nvSpPr>
+          <p:cNvPr id="40" name="TextBox 39"/>
+          <p:cNvSpPr txBox="1"/>
+          <p:nvPr/>
+        </p:nvSpPr>
+        <p:spPr>
+          <a:xfrm>
+            <a:off x="9894570" y="3716528"/>
+            <a:ext cx="264159" cy="308610"/>
+          </a:xfrm>
+          <a:prstGeom prst="rect">
+            <a:avLst/>
+          </a:prstGeom>
+          <a:noFill/>
+        </p:spPr>
+        <p:txBody>
+          <a:bodyPr wrap="none" lIns="0" rIns="0" tIns="0" bIns="0">
+            <a:spAutoFit/>
+          </a:bodyPr>
+          <a:lstStyle/>
+          <a:p>
+            <a:pPr algn="l"/>
+            <a:r>
+              <a:rPr sz="1800" b="0">
+                <a:solidFill>
+                  <a:srgbClr val="F2F3E9"/>
+                </a:solidFill>
+                <a:latin typeface="Noto Sans SC"/>
+                <a:ea typeface="Noto Sans SC"/>
+              </a:rPr>
+              <a:t>0</a:t>
+            </a:r>
+          </a:p>
+        </p:txBody>
+      </p:sp>
+      <p:sp>
+        <p:nvSpPr>
+          <p:cNvPr id="41" name="TextBox 40"/>
+          <p:cNvSpPr txBox="1"/>
+          <p:nvPr/>
+        </p:nvSpPr>
+        <p:spPr>
+          <a:xfrm>
+            <a:off x="6084570" y="4186428"/>
+            <a:ext cx="270509" cy="308610"/>
+          </a:xfrm>
+          <a:prstGeom prst="rect">
+            <a:avLst/>
+          </a:prstGeom>
+          <a:noFill/>
+        </p:spPr>
+        <p:txBody>
+          <a:bodyPr wrap="none" lIns="0" rIns="0" tIns="0" bIns="0">
+            <a:spAutoFit/>
+          </a:bodyPr>
+          <a:lstStyle/>
+          <a:p>
+            <a:pPr algn="l"/>
+            <a:r>
+              <a:rPr sz="1800" b="0">
+                <a:solidFill>
+                  <a:srgbClr val="F2F3E9"/>
+                </a:solidFill>
+                <a:latin typeface="Noto Sans SC"/>
+                <a:ea typeface="Noto Sans SC"/>
+              </a:rPr>
+              <a:t>E</a:t>
+            </a:r>
+          </a:p>
+        </p:txBody>
+      </p:sp>
+      <p:sp>
+        <p:nvSpPr>
+          <p:cNvPr id="42" name="TextBox 41"/>
+          <p:cNvSpPr txBox="1"/>
+          <p:nvPr/>
+        </p:nvSpPr>
+        <p:spPr>
+          <a:xfrm>
+            <a:off x="6846570" y="4186428"/>
+            <a:ext cx="283209" cy="308610"/>
+          </a:xfrm>
+          <a:prstGeom prst="rect">
+            <a:avLst/>
+          </a:prstGeom>
+          <a:noFill/>
+        </p:spPr>
+        <p:txBody>
+          <a:bodyPr wrap="none" lIns="0" rIns="0" tIns="0" bIns="0">
+            <a:spAutoFit/>
+          </a:bodyPr>
+          <a:lstStyle/>
+          <a:p>
+            <a:pPr algn="l"/>
+            <a:r>
+              <a:rPr sz="1800" b="0">
+                <a:solidFill>
+                  <a:srgbClr val="F2F3E9"/>
+                </a:solidFill>
+                <a:latin typeface="Noto Sans SC"/>
+                <a:ea typeface="Noto Sans SC"/>
+              </a:rPr>
+              <a:t>C</a:t>
+            </a:r>
+          </a:p>
+        </p:txBody>
+      </p:sp>
+      <p:sp>
+        <p:nvSpPr>
+          <p:cNvPr id="43" name="TextBox 42"/>
+          <p:cNvSpPr txBox="1"/>
+          <p:nvPr/>
+        </p:nvSpPr>
+        <p:spPr>
+          <a:xfrm>
+            <a:off x="7608570" y="4186428"/>
+            <a:ext cx="264159" cy="308610"/>
+          </a:xfrm>
+          <a:prstGeom prst="rect">
+            <a:avLst/>
+          </a:prstGeom>
+          <a:noFill/>
+        </p:spPr>
+        <p:txBody>
+          <a:bodyPr wrap="none" lIns="0" rIns="0" tIns="0" bIns="0">
+            <a:spAutoFit/>
+          </a:bodyPr>
+          <a:lstStyle/>
+          <a:p>
+            <a:pPr algn="l"/>
+            <a:r>
+              <a:rPr sz="1800" b="0">
+                <a:solidFill>
+                  <a:srgbClr val="F2F3E9"/>
+                </a:solidFill>
+                <a:latin typeface="Noto Sans SC"/>
+                <a:ea typeface="Noto Sans SC"/>
+              </a:rPr>
+              <a:t>2</a:t>
+            </a:r>
+          </a:p>
+        </p:txBody>
+      </p:sp>
+      <p:sp>
+        <p:nvSpPr>
+          <p:cNvPr id="44" name="TextBox 43"/>
+          <p:cNvSpPr txBox="1"/>
+          <p:nvPr/>
+        </p:nvSpPr>
+        <p:spPr>
+          <a:xfrm>
+            <a:off x="9005570" y="4186428"/>
+            <a:ext cx="340359" cy="308610"/>
+          </a:xfrm>
+          <a:prstGeom prst="rect">
+            <a:avLst/>
+          </a:prstGeom>
+          <a:noFill/>
+        </p:spPr>
+        <p:txBody>
+          <a:bodyPr wrap="none" lIns="0" rIns="0" tIns="0" bIns="0">
+            <a:spAutoFit/>
+          </a:bodyPr>
+          <a:lstStyle/>
+          <a:p>
+            <a:pPr algn="l"/>
+            <a:r>
+              <a:rPr sz="1800" b="0">
+                <a:solidFill>
+                  <a:srgbClr val="F2F3E9"/>
+                </a:solidFill>
+                <a:latin typeface="Noto Sans SC"/>
+                <a:ea typeface="Noto Sans SC"/>
+              </a:rPr>
+              <a:t>-2</a:t>
+            </a:r>
+          </a:p>
+        </p:txBody>
+      </p:sp>
+      <p:sp>
+        <p:nvSpPr>
+          <p:cNvPr id="45" name="TextBox 44"/>
+          <p:cNvSpPr txBox="1"/>
+          <p:nvPr/>
+        </p:nvSpPr>
+        <p:spPr>
+          <a:xfrm>
+            <a:off x="9894570" y="4186428"/>
+            <a:ext cx="264159" cy="308610"/>
+          </a:xfrm>
+          <a:prstGeom prst="rect">
+            <a:avLst/>
+          </a:prstGeom>
+          <a:noFill/>
+        </p:spPr>
+        <p:txBody>
+          <a:bodyPr wrap="none" lIns="0" rIns="0" tIns="0" bIns="0">
+            <a:spAutoFit/>
+          </a:bodyPr>
+          <a:lstStyle/>
+          <a:p>
+            <a:pPr algn="l"/>
+            <a:r>
+              <a:rPr sz="1800" b="0">
+                <a:solidFill>
+                  <a:srgbClr val="F2F3E9"/>
+                </a:solidFill>
+                <a:latin typeface="Noto Sans SC"/>
+                <a:ea typeface="Noto Sans SC"/>
+              </a:rPr>
+              <a:t>0</a:t>
+            </a:r>
+          </a:p>
+        </p:txBody>
+      </p:sp>
+      <p:sp>
+        <p:nvSpPr>
+          <p:cNvPr id="46" name="TextBox 45"/>
+          <p:cNvSpPr txBox="1"/>
+          <p:nvPr/>
+        </p:nvSpPr>
+        <p:spPr>
+          <a:xfrm>
+            <a:off x="6084570" y="4656328"/>
+            <a:ext cx="270509" cy="308610"/>
+          </a:xfrm>
+          <a:prstGeom prst="rect">
+            <a:avLst/>
+          </a:prstGeom>
+          <a:noFill/>
+        </p:spPr>
+        <p:txBody>
+          <a:bodyPr wrap="none" lIns="0" rIns="0" tIns="0" bIns="0">
+            <a:spAutoFit/>
+          </a:bodyPr>
+          <a:lstStyle/>
+          <a:p>
+            <a:pPr algn="l"/>
+            <a:r>
+              <a:rPr sz="1800" b="0">
+                <a:solidFill>
+                  <a:srgbClr val="F2F3E9"/>
+                </a:solidFill>
+                <a:latin typeface="Noto Sans SC"/>
+                <a:ea typeface="Noto Sans SC"/>
+              </a:rPr>
+              <a:t>E</a:t>
+            </a:r>
+          </a:p>
+        </p:txBody>
+      </p:sp>
+      <p:sp>
+        <p:nvSpPr>
+          <p:cNvPr id="47" name="TextBox 46"/>
+          <p:cNvSpPr txBox="1"/>
+          <p:nvPr/>
+        </p:nvSpPr>
+        <p:spPr>
+          <a:xfrm>
+            <a:off x="6846570" y="4656328"/>
+            <a:ext cx="295909" cy="308610"/>
+          </a:xfrm>
+          <a:prstGeom prst="rect">
+            <a:avLst/>
+          </a:prstGeom>
+          <a:noFill/>
+        </p:spPr>
+        <p:txBody>
+          <a:bodyPr wrap="none" lIns="0" rIns="0" tIns="0" bIns="0">
+            <a:spAutoFit/>
+          </a:bodyPr>
+          <a:lstStyle/>
+          <a:p>
+            <a:pPr algn="l"/>
+            <a:r>
+              <a:rPr sz="1800" b="0">
+                <a:solidFill>
+                  <a:srgbClr val="F2F3E9"/>
+                </a:solidFill>
+                <a:latin typeface="Noto Sans SC"/>
+                <a:ea typeface="Noto Sans SC"/>
+              </a:rPr>
               <a:t>D</a:t>
             </a:r>
           </a:p>
@@ -15419,14 +15923,14 @@
       </p:sp>
       <p:sp>
         <p:nvSpPr>
-          <p:cNvPr id="29" name="TextBox 28"/>
-          <p:cNvSpPr txBox="1"/>
-          <p:nvPr/>
-        </p:nvSpPr>
-        <p:spPr>
-          <a:xfrm>
-            <a:off x="7608570" y="2776728"/>
-            <a:ext cx="264033" cy="308610"/>
+          <p:cNvPr id="48" name="TextBox 47"/>
+          <p:cNvSpPr txBox="1"/>
+          <p:nvPr/>
+        </p:nvSpPr>
+        <p:spPr>
+          <a:xfrm>
+            <a:off x="7608570" y="4656328"/>
+            <a:ext cx="264159" cy="308610"/>
           </a:xfrm>
           <a:prstGeom prst="rect">
             <a:avLst/>
@@ -15455,14 +15959,14 @@
       </p:sp>
       <p:sp>
         <p:nvSpPr>
-          <p:cNvPr id="30" name="TextBox 29"/>
-          <p:cNvSpPr txBox="1"/>
-          <p:nvPr/>
-        </p:nvSpPr>
-        <p:spPr>
-          <a:xfrm>
-            <a:off x="9005570" y="2776728"/>
-            <a:ext cx="264033" cy="308610"/>
+          <p:cNvPr id="49" name="TextBox 48"/>
+          <p:cNvSpPr txBox="1"/>
+          <p:nvPr/>
+        </p:nvSpPr>
+        <p:spPr>
+          <a:xfrm>
+            <a:off x="9005570" y="4656328"/>
+            <a:ext cx="467359" cy="308610"/>
           </a:xfrm>
           <a:prstGeom prst="rect">
             <a:avLst/>
@@ -15484,21 +15988,21 @@
                 <a:latin typeface="Noto Sans SC"/>
                 <a:ea typeface="Noto Sans SC"/>
               </a:rPr>
-              <a:t>0</a:t>
-            </a:r>
-          </a:p>
-        </p:txBody>
-      </p:sp>
-      <p:sp>
-        <p:nvSpPr>
-          <p:cNvPr id="31" name="TextBox 30"/>
-          <p:cNvSpPr txBox="1"/>
-          <p:nvPr/>
-        </p:nvSpPr>
-        <p:spPr>
-          <a:xfrm>
-            <a:off x="9894570" y="2776728"/>
-            <a:ext cx="390906" cy="308610"/>
+              <a:t>-10</a:t>
+            </a:r>
+          </a:p>
+        </p:txBody>
+      </p:sp>
+      <p:sp>
+        <p:nvSpPr>
+          <p:cNvPr id="50" name="TextBox 49"/>
+          <p:cNvSpPr txBox="1"/>
+          <p:nvPr/>
+        </p:nvSpPr>
+        <p:spPr>
+          <a:xfrm>
+            <a:off x="9894570" y="4656328"/>
+            <a:ext cx="340359" cy="308610"/>
           </a:xfrm>
           <a:prstGeom prst="rect">
             <a:avLst/>
@@ -15520,21 +16024,21 @@
                 <a:latin typeface="Noto Sans SC"/>
                 <a:ea typeface="Noto Sans SC"/>
               </a:rPr>
-              <a:t>+9</a:t>
-            </a:r>
-          </a:p>
-        </p:txBody>
-      </p:sp>
-      <p:sp>
-        <p:nvSpPr>
-          <p:cNvPr id="32" name="TextBox 31"/>
-          <p:cNvSpPr txBox="1"/>
-          <p:nvPr/>
-        </p:nvSpPr>
-        <p:spPr>
-          <a:xfrm>
-            <a:off x="6084570" y="3246628"/>
-            <a:ext cx="271805" cy="308610"/>
+              <a:t>-1</a:t>
+            </a:r>
+          </a:p>
+        </p:txBody>
+      </p:sp>
+      <p:sp>
+        <p:nvSpPr>
+          <p:cNvPr id="51" name="TextBox 50"/>
+          <p:cNvSpPr txBox="1"/>
+          <p:nvPr/>
+        </p:nvSpPr>
+        <p:spPr>
+          <a:xfrm>
+            <a:off x="6084570" y="5126228"/>
+            <a:ext cx="276859" cy="308610"/>
           </a:xfrm>
           <a:prstGeom prst="rect">
             <a:avLst/>
@@ -15556,21 +16060,21 @@
                 <a:latin typeface="Noto Sans SC"/>
                 <a:ea typeface="Noto Sans SC"/>
               </a:rPr>
-              <a:t>E</a:t>
-            </a:r>
-          </a:p>
-        </p:txBody>
-      </p:sp>
-      <p:sp>
-        <p:nvSpPr>
-          <p:cNvPr id="33" name="TextBox 32"/>
-          <p:cNvSpPr txBox="1"/>
-          <p:nvPr/>
-        </p:nvSpPr>
-        <p:spPr>
-          <a:xfrm>
-            <a:off x="6846570" y="3246628"/>
-            <a:ext cx="287350" cy="308610"/>
+              <a:t>A</a:t>
+            </a:r>
+          </a:p>
+        </p:txBody>
+      </p:sp>
+      <p:sp>
+        <p:nvSpPr>
+          <p:cNvPr id="52" name="TextBox 51"/>
+          <p:cNvSpPr txBox="1"/>
+          <p:nvPr/>
+        </p:nvSpPr>
+        <p:spPr>
+          <a:xfrm>
+            <a:off x="6846570" y="5126228"/>
+            <a:ext cx="289559" cy="308610"/>
           </a:xfrm>
           <a:prstGeom prst="rect">
             <a:avLst/>
@@ -15599,14 +16103,14 @@
       </p:sp>
       <p:sp>
         <p:nvSpPr>
-          <p:cNvPr id="34" name="TextBox 33"/>
-          <p:cNvSpPr txBox="1"/>
-          <p:nvPr/>
-        </p:nvSpPr>
-        <p:spPr>
-          <a:xfrm>
-            <a:off x="7608570" y="3246628"/>
-            <a:ext cx="264033" cy="308610"/>
+          <p:cNvPr id="53" name="TextBox 52"/>
+          <p:cNvSpPr txBox="1"/>
+          <p:nvPr/>
+        </p:nvSpPr>
+        <p:spPr>
+          <a:xfrm>
+            <a:off x="7608570" y="5126228"/>
+            <a:ext cx="264159" cy="308610"/>
           </a:xfrm>
           <a:prstGeom prst="rect">
             <a:avLst/>
@@ -15635,14 +16139,14 @@
       </p:sp>
       <p:sp>
         <p:nvSpPr>
-          <p:cNvPr id="35" name="TextBox 34"/>
-          <p:cNvSpPr txBox="1"/>
-          <p:nvPr/>
-        </p:nvSpPr>
-        <p:spPr>
-          <a:xfrm>
-            <a:off x="9005570" y="3246628"/>
-            <a:ext cx="264033" cy="308610"/>
+          <p:cNvPr id="54" name="TextBox 53"/>
+          <p:cNvSpPr txBox="1"/>
+          <p:nvPr/>
+        </p:nvSpPr>
+        <p:spPr>
+          <a:xfrm>
+            <a:off x="9005570" y="5126228"/>
+            <a:ext cx="467359" cy="308610"/>
           </a:xfrm>
           <a:prstGeom prst="rect">
             <a:avLst/>
@@ -15664,546 +16168,6 @@
                 <a:latin typeface="Noto Sans SC"/>
                 <a:ea typeface="Noto Sans SC"/>
               </a:rPr>
-              <a:t>0</a:t>
-            </a:r>
-          </a:p>
-        </p:txBody>
-      </p:sp>
-      <p:sp>
-        <p:nvSpPr>
-          <p:cNvPr id="36" name="TextBox 35"/>
-          <p:cNvSpPr txBox="1"/>
-          <p:nvPr/>
-        </p:nvSpPr>
-        <p:spPr>
-          <a:xfrm>
-            <a:off x="9894570" y="3246628"/>
-            <a:ext cx="390906" cy="308610"/>
-          </a:xfrm>
-          <a:prstGeom prst="rect">
-            <a:avLst/>
-          </a:prstGeom>
-          <a:noFill/>
-        </p:spPr>
-        <p:txBody>
-          <a:bodyPr wrap="none" lIns="0" rIns="0" tIns="0" bIns="0">
-            <a:spAutoFit/>
-          </a:bodyPr>
-          <a:lstStyle/>
-          <a:p>
-            <a:pPr algn="l"/>
-            <a:r>
-              <a:rPr sz="1800" b="0">
-                <a:solidFill>
-                  <a:srgbClr val="F2F3E9"/>
-                </a:solidFill>
-                <a:latin typeface="Noto Sans SC"/>
-                <a:ea typeface="Noto Sans SC"/>
-              </a:rPr>
-              <a:t>+7</a:t>
-            </a:r>
-          </a:p>
-        </p:txBody>
-      </p:sp>
-      <p:sp>
-        <p:nvSpPr>
-          <p:cNvPr id="37" name="TextBox 36"/>
-          <p:cNvSpPr txBox="1"/>
-          <p:nvPr/>
-        </p:nvSpPr>
-        <p:spPr>
-          <a:xfrm>
-            <a:off x="6084570" y="3716528"/>
-            <a:ext cx="276148" cy="308610"/>
-          </a:xfrm>
-          <a:prstGeom prst="rect">
-            <a:avLst/>
-          </a:prstGeom>
-          <a:noFill/>
-        </p:spPr>
-        <p:txBody>
-          <a:bodyPr wrap="none" lIns="0" rIns="0" tIns="0" bIns="0">
-            <a:spAutoFit/>
-          </a:bodyPr>
-          <a:lstStyle/>
-          <a:p>
-            <a:pPr algn="l"/>
-            <a:r>
-              <a:rPr sz="1800" b="0">
-                <a:solidFill>
-                  <a:srgbClr val="F2F3E9"/>
-                </a:solidFill>
-                <a:latin typeface="Noto Sans SC"/>
-                <a:ea typeface="Noto Sans SC"/>
-              </a:rPr>
-              <a:t>A</a:t>
-            </a:r>
-          </a:p>
-        </p:txBody>
-      </p:sp>
-      <p:sp>
-        <p:nvSpPr>
-          <p:cNvPr id="38" name="TextBox 37"/>
-          <p:cNvSpPr txBox="1"/>
-          <p:nvPr/>
-        </p:nvSpPr>
-        <p:spPr>
-          <a:xfrm>
-            <a:off x="6846570" y="3716528"/>
-            <a:ext cx="283006" cy="308610"/>
-          </a:xfrm>
-          <a:prstGeom prst="rect">
-            <a:avLst/>
-          </a:prstGeom>
-          <a:noFill/>
-        </p:spPr>
-        <p:txBody>
-          <a:bodyPr wrap="none" lIns="0" rIns="0" tIns="0" bIns="0">
-            <a:spAutoFit/>
-          </a:bodyPr>
-          <a:lstStyle/>
-          <a:p>
-            <a:pPr algn="l"/>
-            <a:r>
-              <a:rPr sz="1800" b="0">
-                <a:solidFill>
-                  <a:srgbClr val="F2F3E9"/>
-                </a:solidFill>
-                <a:latin typeface="Noto Sans SC"/>
-                <a:ea typeface="Noto Sans SC"/>
-              </a:rPr>
-              <a:t>C</a:t>
-            </a:r>
-          </a:p>
-        </p:txBody>
-      </p:sp>
-      <p:sp>
-        <p:nvSpPr>
-          <p:cNvPr id="39" name="TextBox 38"/>
-          <p:cNvSpPr txBox="1"/>
-          <p:nvPr/>
-        </p:nvSpPr>
-        <p:spPr>
-          <a:xfrm>
-            <a:off x="7608570" y="3716528"/>
-            <a:ext cx="264033" cy="308610"/>
-          </a:xfrm>
-          <a:prstGeom prst="rect">
-            <a:avLst/>
-          </a:prstGeom>
-          <a:noFill/>
-        </p:spPr>
-        <p:txBody>
-          <a:bodyPr wrap="none" lIns="0" rIns="0" tIns="0" bIns="0">
-            <a:spAutoFit/>
-          </a:bodyPr>
-          <a:lstStyle/>
-          <a:p>
-            <a:pPr algn="l"/>
-            <a:r>
-              <a:rPr sz="1800" b="0">
-                <a:solidFill>
-                  <a:srgbClr val="F2F3E9"/>
-                </a:solidFill>
-                <a:latin typeface="Noto Sans SC"/>
-                <a:ea typeface="Noto Sans SC"/>
-              </a:rPr>
-              <a:t>2</a:t>
-            </a:r>
-          </a:p>
-        </p:txBody>
-      </p:sp>
-      <p:sp>
-        <p:nvSpPr>
-          <p:cNvPr id="40" name="TextBox 39"/>
-          <p:cNvSpPr txBox="1"/>
-          <p:nvPr/>
-        </p:nvSpPr>
-        <p:spPr>
-          <a:xfrm>
-            <a:off x="9005570" y="3716528"/>
-            <a:ext cx="343357" cy="308610"/>
-          </a:xfrm>
-          <a:prstGeom prst="rect">
-            <a:avLst/>
-          </a:prstGeom>
-          <a:noFill/>
-        </p:spPr>
-        <p:txBody>
-          <a:bodyPr wrap="none" lIns="0" rIns="0" tIns="0" bIns="0">
-            <a:spAutoFit/>
-          </a:bodyPr>
-          <a:lstStyle/>
-          <a:p>
-            <a:pPr algn="l"/>
-            <a:r>
-              <a:rPr sz="1800" b="0">
-                <a:solidFill>
-                  <a:srgbClr val="F2F3E9"/>
-                </a:solidFill>
-                <a:latin typeface="Noto Sans SC"/>
-                <a:ea typeface="Noto Sans SC"/>
-              </a:rPr>
-              <a:t>-2</a:t>
-            </a:r>
-          </a:p>
-        </p:txBody>
-      </p:sp>
-      <p:sp>
-        <p:nvSpPr>
-          <p:cNvPr id="41" name="TextBox 40"/>
-          <p:cNvSpPr txBox="1"/>
-          <p:nvPr/>
-        </p:nvSpPr>
-        <p:spPr>
-          <a:xfrm>
-            <a:off x="9894570" y="3716528"/>
-            <a:ext cx="390906" cy="308610"/>
-          </a:xfrm>
-          <a:prstGeom prst="rect">
-            <a:avLst/>
-          </a:prstGeom>
-          <a:noFill/>
-        </p:spPr>
-        <p:txBody>
-          <a:bodyPr wrap="none" lIns="0" rIns="0" tIns="0" bIns="0">
-            <a:spAutoFit/>
-          </a:bodyPr>
-          <a:lstStyle/>
-          <a:p>
-            <a:pPr algn="l"/>
-            <a:r>
-              <a:rPr sz="1800" b="0">
-                <a:solidFill>
-                  <a:srgbClr val="F2F3E9"/>
-                </a:solidFill>
-                <a:latin typeface="Noto Sans SC"/>
-                <a:ea typeface="Noto Sans SC"/>
-              </a:rPr>
-              <a:t>+0</a:t>
-            </a:r>
-          </a:p>
-        </p:txBody>
-      </p:sp>
-      <p:sp>
-        <p:nvSpPr>
-          <p:cNvPr id="42" name="TextBox 41"/>
-          <p:cNvSpPr txBox="1"/>
-          <p:nvPr/>
-        </p:nvSpPr>
-        <p:spPr>
-          <a:xfrm>
-            <a:off x="6084570" y="4186428"/>
-            <a:ext cx="271805" cy="308610"/>
-          </a:xfrm>
-          <a:prstGeom prst="rect">
-            <a:avLst/>
-          </a:prstGeom>
-          <a:noFill/>
-        </p:spPr>
-        <p:txBody>
-          <a:bodyPr wrap="none" lIns="0" rIns="0" tIns="0" bIns="0">
-            <a:spAutoFit/>
-          </a:bodyPr>
-          <a:lstStyle/>
-          <a:p>
-            <a:pPr algn="l"/>
-            <a:r>
-              <a:rPr sz="1800" b="0">
-                <a:solidFill>
-                  <a:srgbClr val="F2F3E9"/>
-                </a:solidFill>
-                <a:latin typeface="Noto Sans SC"/>
-                <a:ea typeface="Noto Sans SC"/>
-              </a:rPr>
-              <a:t>E</a:t>
-            </a:r>
-          </a:p>
-        </p:txBody>
-      </p:sp>
-      <p:sp>
-        <p:nvSpPr>
-          <p:cNvPr id="43" name="TextBox 42"/>
-          <p:cNvSpPr txBox="1"/>
-          <p:nvPr/>
-        </p:nvSpPr>
-        <p:spPr>
-          <a:xfrm>
-            <a:off x="6846570" y="4186428"/>
-            <a:ext cx="283006" cy="308610"/>
-          </a:xfrm>
-          <a:prstGeom prst="rect">
-            <a:avLst/>
-          </a:prstGeom>
-          <a:noFill/>
-        </p:spPr>
-        <p:txBody>
-          <a:bodyPr wrap="none" lIns="0" rIns="0" tIns="0" bIns="0">
-            <a:spAutoFit/>
-          </a:bodyPr>
-          <a:lstStyle/>
-          <a:p>
-            <a:pPr algn="l"/>
-            <a:r>
-              <a:rPr sz="1800" b="0">
-                <a:solidFill>
-                  <a:srgbClr val="F2F3E9"/>
-                </a:solidFill>
-                <a:latin typeface="Noto Sans SC"/>
-                <a:ea typeface="Noto Sans SC"/>
-              </a:rPr>
-              <a:t>C</a:t>
-            </a:r>
-          </a:p>
-        </p:txBody>
-      </p:sp>
-      <p:sp>
-        <p:nvSpPr>
-          <p:cNvPr id="44" name="TextBox 43"/>
-          <p:cNvSpPr txBox="1"/>
-          <p:nvPr/>
-        </p:nvSpPr>
-        <p:spPr>
-          <a:xfrm>
-            <a:off x="7608570" y="4186428"/>
-            <a:ext cx="264033" cy="308610"/>
-          </a:xfrm>
-          <a:prstGeom prst="rect">
-            <a:avLst/>
-          </a:prstGeom>
-          <a:noFill/>
-        </p:spPr>
-        <p:txBody>
-          <a:bodyPr wrap="none" lIns="0" rIns="0" tIns="0" bIns="0">
-            <a:spAutoFit/>
-          </a:bodyPr>
-          <a:lstStyle/>
-          <a:p>
-            <a:pPr algn="l"/>
-            <a:r>
-              <a:rPr sz="1800" b="0">
-                <a:solidFill>
-                  <a:srgbClr val="F2F3E9"/>
-                </a:solidFill>
-                <a:latin typeface="Noto Sans SC"/>
-                <a:ea typeface="Noto Sans SC"/>
-              </a:rPr>
-              <a:t>2</a:t>
-            </a:r>
-          </a:p>
-        </p:txBody>
-      </p:sp>
-      <p:sp>
-        <p:nvSpPr>
-          <p:cNvPr id="45" name="TextBox 44"/>
-          <p:cNvSpPr txBox="1"/>
-          <p:nvPr/>
-        </p:nvSpPr>
-        <p:spPr>
-          <a:xfrm>
-            <a:off x="9005570" y="4186428"/>
-            <a:ext cx="343357" cy="308610"/>
-          </a:xfrm>
-          <a:prstGeom prst="rect">
-            <a:avLst/>
-          </a:prstGeom>
-          <a:noFill/>
-        </p:spPr>
-        <p:txBody>
-          <a:bodyPr wrap="none" lIns="0" rIns="0" tIns="0" bIns="0">
-            <a:spAutoFit/>
-          </a:bodyPr>
-          <a:lstStyle/>
-          <a:p>
-            <a:pPr algn="l"/>
-            <a:r>
-              <a:rPr sz="1800" b="0">
-                <a:solidFill>
-                  <a:srgbClr val="F2F3E9"/>
-                </a:solidFill>
-                <a:latin typeface="Noto Sans SC"/>
-                <a:ea typeface="Noto Sans SC"/>
-              </a:rPr>
-              <a:t>-2</a:t>
-            </a:r>
-          </a:p>
-        </p:txBody>
-      </p:sp>
-      <p:sp>
-        <p:nvSpPr>
-          <p:cNvPr id="46" name="TextBox 45"/>
-          <p:cNvSpPr txBox="1"/>
-          <p:nvPr/>
-        </p:nvSpPr>
-        <p:spPr>
-          <a:xfrm>
-            <a:off x="9894570" y="4186428"/>
-            <a:ext cx="390906" cy="308610"/>
-          </a:xfrm>
-          <a:prstGeom prst="rect">
-            <a:avLst/>
-          </a:prstGeom>
-          <a:noFill/>
-        </p:spPr>
-        <p:txBody>
-          <a:bodyPr wrap="none" lIns="0" rIns="0" tIns="0" bIns="0">
-            <a:spAutoFit/>
-          </a:bodyPr>
-          <a:lstStyle/>
-          <a:p>
-            <a:pPr algn="l"/>
-            <a:r>
-              <a:rPr sz="1800" b="0">
-                <a:solidFill>
-                  <a:srgbClr val="F2F3E9"/>
-                </a:solidFill>
-                <a:latin typeface="Noto Sans SC"/>
-                <a:ea typeface="Noto Sans SC"/>
-              </a:rPr>
-              <a:t>+0</a:t>
-            </a:r>
-          </a:p>
-        </p:txBody>
-      </p:sp>
-      <p:sp>
-        <p:nvSpPr>
-          <p:cNvPr id="47" name="TextBox 46"/>
-          <p:cNvSpPr txBox="1"/>
-          <p:nvPr/>
-        </p:nvSpPr>
-        <p:spPr>
-          <a:xfrm>
-            <a:off x="6084570" y="4656328"/>
-            <a:ext cx="271805" cy="308610"/>
-          </a:xfrm>
-          <a:prstGeom prst="rect">
-            <a:avLst/>
-          </a:prstGeom>
-          <a:noFill/>
-        </p:spPr>
-        <p:txBody>
-          <a:bodyPr wrap="none" lIns="0" rIns="0" tIns="0" bIns="0">
-            <a:spAutoFit/>
-          </a:bodyPr>
-          <a:lstStyle/>
-          <a:p>
-            <a:pPr algn="l"/>
-            <a:r>
-              <a:rPr sz="1800" b="0">
-                <a:solidFill>
-                  <a:srgbClr val="F2F3E9"/>
-                </a:solidFill>
-                <a:latin typeface="Noto Sans SC"/>
-                <a:ea typeface="Noto Sans SC"/>
-              </a:rPr>
-              <a:t>E</a:t>
-            </a:r>
-          </a:p>
-        </p:txBody>
-      </p:sp>
-      <p:sp>
-        <p:nvSpPr>
-          <p:cNvPr id="48" name="TextBox 47"/>
-          <p:cNvSpPr txBox="1"/>
-          <p:nvPr/>
-        </p:nvSpPr>
-        <p:spPr>
-          <a:xfrm>
-            <a:off x="6846570" y="4656328"/>
-            <a:ext cx="294436" cy="308610"/>
-          </a:xfrm>
-          <a:prstGeom prst="rect">
-            <a:avLst/>
-          </a:prstGeom>
-          <a:noFill/>
-        </p:spPr>
-        <p:txBody>
-          <a:bodyPr wrap="none" lIns="0" rIns="0" tIns="0" bIns="0">
-            <a:spAutoFit/>
-          </a:bodyPr>
-          <a:lstStyle/>
-          <a:p>
-            <a:pPr algn="l"/>
-            <a:r>
-              <a:rPr sz="1800" b="0">
-                <a:solidFill>
-                  <a:srgbClr val="F2F3E9"/>
-                </a:solidFill>
-                <a:latin typeface="Noto Sans SC"/>
-                <a:ea typeface="Noto Sans SC"/>
-              </a:rPr>
-              <a:t>D</a:t>
-            </a:r>
-          </a:p>
-        </p:txBody>
-      </p:sp>
-      <p:sp>
-        <p:nvSpPr>
-          <p:cNvPr id="49" name="TextBox 48"/>
-          <p:cNvSpPr txBox="1"/>
-          <p:nvPr/>
-        </p:nvSpPr>
-        <p:spPr>
-          <a:xfrm>
-            <a:off x="7608570" y="4656328"/>
-            <a:ext cx="264033" cy="308610"/>
-          </a:xfrm>
-          <a:prstGeom prst="rect">
-            <a:avLst/>
-          </a:prstGeom>
-          <a:noFill/>
-        </p:spPr>
-        <p:txBody>
-          <a:bodyPr wrap="none" lIns="0" rIns="0" tIns="0" bIns="0">
-            <a:spAutoFit/>
-          </a:bodyPr>
-          <a:lstStyle/>
-          <a:p>
-            <a:pPr algn="l"/>
-            <a:r>
-              <a:rPr sz="1800" b="0">
-                <a:solidFill>
-                  <a:srgbClr val="F2F3E9"/>
-                </a:solidFill>
-                <a:latin typeface="Noto Sans SC"/>
-                <a:ea typeface="Noto Sans SC"/>
-              </a:rPr>
-              <a:t>9</a:t>
-            </a:r>
-          </a:p>
-        </p:txBody>
-      </p:sp>
-      <p:sp>
-        <p:nvSpPr>
-          <p:cNvPr id="50" name="TextBox 49"/>
-          <p:cNvSpPr txBox="1"/>
-          <p:nvPr/>
-        </p:nvSpPr>
-        <p:spPr>
-          <a:xfrm>
-            <a:off x="9005570" y="4656328"/>
-            <a:ext cx="470230" cy="308610"/>
-          </a:xfrm>
-          <a:prstGeom prst="rect">
-            <a:avLst/>
-          </a:prstGeom>
-          <a:noFill/>
-        </p:spPr>
-        <p:txBody>
-          <a:bodyPr wrap="none" lIns="0" rIns="0" tIns="0" bIns="0">
-            <a:spAutoFit/>
-          </a:bodyPr>
-          <a:lstStyle/>
-          <a:p>
-            <a:pPr algn="l"/>
-            <a:r>
-              <a:rPr sz="1800" b="0">
-                <a:solidFill>
-                  <a:srgbClr val="F2F3E9"/>
-                </a:solidFill>
-                <a:latin typeface="Noto Sans SC"/>
-                <a:ea typeface="Noto Sans SC"/>
-              </a:rPr>
               <a:t>-10</a:t>
             </a:r>
           </a:p>
@@ -16211,194 +16175,14 @@
       </p:sp>
       <p:sp>
         <p:nvSpPr>
-          <p:cNvPr id="51" name="TextBox 50"/>
-          <p:cNvSpPr txBox="1"/>
-          <p:nvPr/>
-        </p:nvSpPr>
-        <p:spPr>
-          <a:xfrm>
-            <a:off x="9894570" y="4656328"/>
-            <a:ext cx="343357" cy="308610"/>
-          </a:xfrm>
-          <a:prstGeom prst="rect">
-            <a:avLst/>
-          </a:prstGeom>
-          <a:noFill/>
-        </p:spPr>
-        <p:txBody>
-          <a:bodyPr wrap="none" lIns="0" rIns="0" tIns="0" bIns="0">
-            <a:spAutoFit/>
-          </a:bodyPr>
-          <a:lstStyle/>
-          <a:p>
-            <a:pPr algn="l"/>
-            <a:r>
-              <a:rPr sz="1800" b="0">
-                <a:solidFill>
-                  <a:srgbClr val="F2F3E9"/>
-                </a:solidFill>
-                <a:latin typeface="Noto Sans SC"/>
-                <a:ea typeface="Noto Sans SC"/>
-              </a:rPr>
-              <a:t>-1</a:t>
-            </a:r>
-          </a:p>
-        </p:txBody>
-      </p:sp>
-      <p:sp>
-        <p:nvSpPr>
-          <p:cNvPr id="52" name="TextBox 51"/>
-          <p:cNvSpPr txBox="1"/>
-          <p:nvPr/>
-        </p:nvSpPr>
-        <p:spPr>
-          <a:xfrm>
-            <a:off x="6084570" y="5126228"/>
-            <a:ext cx="276148" cy="308610"/>
-          </a:xfrm>
-          <a:prstGeom prst="rect">
-            <a:avLst/>
-          </a:prstGeom>
-          <a:noFill/>
-        </p:spPr>
-        <p:txBody>
-          <a:bodyPr wrap="none" lIns="0" rIns="0" tIns="0" bIns="0">
-            <a:spAutoFit/>
-          </a:bodyPr>
-          <a:lstStyle/>
-          <a:p>
-            <a:pPr algn="l"/>
-            <a:r>
-              <a:rPr sz="1800" b="0">
-                <a:solidFill>
-                  <a:srgbClr val="F2F3E9"/>
-                </a:solidFill>
-                <a:latin typeface="Noto Sans SC"/>
-                <a:ea typeface="Noto Sans SC"/>
-              </a:rPr>
-              <a:t>A</a:t>
-            </a:r>
-          </a:p>
-        </p:txBody>
-      </p:sp>
-      <p:sp>
-        <p:nvSpPr>
-          <p:cNvPr id="53" name="TextBox 52"/>
-          <p:cNvSpPr txBox="1"/>
-          <p:nvPr/>
-        </p:nvSpPr>
-        <p:spPr>
-          <a:xfrm>
-            <a:off x="6846570" y="5126228"/>
-            <a:ext cx="287350" cy="308610"/>
-          </a:xfrm>
-          <a:prstGeom prst="rect">
-            <a:avLst/>
-          </a:prstGeom>
-          <a:noFill/>
-        </p:spPr>
-        <p:txBody>
-          <a:bodyPr wrap="none" lIns="0" rIns="0" tIns="0" bIns="0">
-            <a:spAutoFit/>
-          </a:bodyPr>
-          <a:lstStyle/>
-          <a:p>
-            <a:pPr algn="l"/>
-            <a:r>
-              <a:rPr sz="1800" b="0">
-                <a:solidFill>
-                  <a:srgbClr val="F2F3E9"/>
-                </a:solidFill>
-                <a:latin typeface="Noto Sans SC"/>
-                <a:ea typeface="Noto Sans SC"/>
-              </a:rPr>
-              <a:t>B</a:t>
-            </a:r>
-          </a:p>
-        </p:txBody>
-      </p:sp>
-      <p:sp>
-        <p:nvSpPr>
-          <p:cNvPr id="54" name="TextBox 53"/>
-          <p:cNvSpPr txBox="1"/>
-          <p:nvPr/>
-        </p:nvSpPr>
-        <p:spPr>
-          <a:xfrm>
-            <a:off x="7608570" y="5126228"/>
-            <a:ext cx="264033" cy="308610"/>
-          </a:xfrm>
-          <a:prstGeom prst="rect">
-            <a:avLst/>
-          </a:prstGeom>
-          <a:noFill/>
-        </p:spPr>
-        <p:txBody>
-          <a:bodyPr wrap="none" lIns="0" rIns="0" tIns="0" bIns="0">
-            <a:spAutoFit/>
-          </a:bodyPr>
-          <a:lstStyle/>
-          <a:p>
-            <a:pPr algn="l"/>
-            <a:r>
-              <a:rPr sz="1800" b="0">
-                <a:solidFill>
-                  <a:srgbClr val="F2F3E9"/>
-                </a:solidFill>
-                <a:latin typeface="Noto Sans SC"/>
-                <a:ea typeface="Noto Sans SC"/>
-              </a:rPr>
-              <a:t>7</a:t>
-            </a:r>
-          </a:p>
-        </p:txBody>
-      </p:sp>
-      <p:sp>
-        <p:nvSpPr>
           <p:cNvPr id="55" name="TextBox 54"/>
           <p:cNvSpPr txBox="1"/>
           <p:nvPr/>
         </p:nvSpPr>
         <p:spPr>
           <a:xfrm>
-            <a:off x="9005570" y="5126228"/>
-            <a:ext cx="470230" cy="308610"/>
-          </a:xfrm>
-          <a:prstGeom prst="rect">
-            <a:avLst/>
-          </a:prstGeom>
-          <a:noFill/>
-        </p:spPr>
-        <p:txBody>
-          <a:bodyPr wrap="none" lIns="0" rIns="0" tIns="0" bIns="0">
-            <a:spAutoFit/>
-          </a:bodyPr>
-          <a:lstStyle/>
-          <a:p>
-            <a:pPr algn="l"/>
-            <a:r>
-              <a:rPr sz="1800" b="0">
-                <a:solidFill>
-                  <a:srgbClr val="F2F3E9"/>
-                </a:solidFill>
-                <a:latin typeface="Noto Sans SC"/>
-                <a:ea typeface="Noto Sans SC"/>
-              </a:rPr>
-              <a:t>-10</a:t>
-            </a:r>
-          </a:p>
-        </p:txBody>
-      </p:sp>
-      <p:sp>
-        <p:nvSpPr>
-          <p:cNvPr id="56" name="TextBox 55"/>
-          <p:cNvSpPr txBox="1"/>
-          <p:nvPr/>
-        </p:nvSpPr>
-        <p:spPr>
-          <a:xfrm>
             <a:off x="9894570" y="5126228"/>
-            <a:ext cx="343357" cy="308610"/>
+            <a:ext cx="340359" cy="308610"/>
           </a:xfrm>
           <a:prstGeom prst="rect">
             <a:avLst/>
@@ -16538,7 +16322,7 @@
         <p:spPr>
           <a:xfrm>
             <a:off x="553720" y="450088"/>
-            <a:ext cx="2553563" cy="480060"/>
+            <a:ext cx="2556510" cy="480060"/>
           </a:xfrm>
           <a:prstGeom prst="rect">
             <a:avLst/>
@@ -16651,7 +16435,7 @@
         <p:spPr>
           <a:xfrm>
             <a:off x="563880" y="6512052"/>
-            <a:ext cx="2418587" cy="205740"/>
+            <a:ext cx="2428240" cy="205740"/>
           </a:xfrm>
           <a:prstGeom prst="rect">
             <a:avLst/>
@@ -16686,8 +16470,8 @@
         </p:nvSpPr>
         <p:spPr>
           <a:xfrm>
-            <a:off x="11108524" y="6499098"/>
-            <a:ext cx="561505" cy="222885"/>
+            <a:off x="11113770" y="6499098"/>
+            <a:ext cx="556260" cy="222885"/>
           </a:xfrm>
           <a:prstGeom prst="rect">
             <a:avLst/>
@@ -16716,43 +16500,7 @@
       </p:sp>
       <p:sp>
         <p:nvSpPr>
-          <p:cNvPr id="9" name="TextBox 8"/>
-          <p:cNvSpPr txBox="1"/>
-          <p:nvPr/>
-        </p:nvSpPr>
-        <p:spPr>
-          <a:xfrm>
-            <a:off x="10855147" y="377952"/>
-            <a:ext cx="811072" cy="205740"/>
-          </a:xfrm>
-          <a:prstGeom prst="rect">
-            <a:avLst/>
-          </a:prstGeom>
-          <a:noFill/>
-        </p:spPr>
-        <p:txBody>
-          <a:bodyPr wrap="none" lIns="0" rIns="0" tIns="0" bIns="0">
-            <a:spAutoFit/>
-          </a:bodyPr>
-          <a:lstStyle/>
-          <a:p>
-            <a:pPr algn="r"/>
-            <a:r>
-              <a:rPr sz="1200" b="0">
-                <a:solidFill>
-                  <a:srgbClr val="6F8F8F"/>
-                </a:solidFill>
-                <a:latin typeface="Noto Sans SC"/>
-                <a:ea typeface="Noto Sans SC"/>
-              </a:rPr>
-              <a:t>影片 00:56</a:t>
-            </a:r>
-          </a:p>
-        </p:txBody>
-      </p:sp>
-      <p:sp>
-        <p:nvSpPr>
-          <p:cNvPr id="10" name="Oval 9"/>
+          <p:cNvPr id="9" name="Oval 8"/>
           <p:cNvSpPr/>
           <p:nvPr/>
         </p:nvSpPr>
@@ -16794,7 +16542,7 @@
       </p:sp>
       <p:sp>
         <p:nvSpPr>
-          <p:cNvPr id="11" name="TextBox 10"/>
+          <p:cNvPr id="10" name="TextBox 9"/>
           <p:cNvSpPr txBox="1"/>
           <p:nvPr/>
         </p:nvSpPr>
@@ -16834,7 +16582,7 @@
       </p:sp>
       <p:sp>
         <p:nvSpPr>
-          <p:cNvPr id="12" name="Oval 11"/>
+          <p:cNvPr id="11" name="Oval 10"/>
           <p:cNvSpPr/>
           <p:nvPr/>
         </p:nvSpPr>
@@ -16876,7 +16624,7 @@
       </p:sp>
       <p:sp>
         <p:nvSpPr>
-          <p:cNvPr id="13" name="TextBox 12"/>
+          <p:cNvPr id="12" name="TextBox 11"/>
           <p:cNvSpPr txBox="1"/>
           <p:nvPr/>
         </p:nvSpPr>
@@ -16916,7 +16664,7 @@
       </p:sp>
       <p:sp>
         <p:nvSpPr>
-          <p:cNvPr id="14" name="Oval 13"/>
+          <p:cNvPr id="13" name="Oval 12"/>
           <p:cNvSpPr/>
           <p:nvPr/>
         </p:nvSpPr>
@@ -16958,7 +16706,7 @@
       </p:sp>
       <p:sp>
         <p:nvSpPr>
-          <p:cNvPr id="15" name="TextBox 14"/>
+          <p:cNvPr id="14" name="TextBox 13"/>
           <p:cNvSpPr txBox="1"/>
           <p:nvPr/>
         </p:nvSpPr>
@@ -16998,7 +16746,7 @@
       </p:sp>
       <p:sp>
         <p:nvSpPr>
-          <p:cNvPr id="16" name="Oval 15"/>
+          <p:cNvPr id="15" name="Oval 14"/>
           <p:cNvSpPr/>
           <p:nvPr/>
         </p:nvSpPr>
@@ -17040,7 +16788,7 @@
       </p:sp>
       <p:sp>
         <p:nvSpPr>
-          <p:cNvPr id="17" name="TextBox 16"/>
+          <p:cNvPr id="16" name="TextBox 15"/>
           <p:cNvSpPr txBox="1"/>
           <p:nvPr/>
         </p:nvSpPr>
@@ -17080,7 +16828,7 @@
       </p:sp>
       <p:sp>
         <p:nvSpPr>
-          <p:cNvPr id="18" name="Oval 17"/>
+          <p:cNvPr id="17" name="Oval 16"/>
           <p:cNvSpPr/>
           <p:nvPr/>
         </p:nvSpPr>
@@ -17122,7 +16870,7 @@
       </p:sp>
       <p:sp>
         <p:nvSpPr>
-          <p:cNvPr id="19" name="TextBox 18"/>
+          <p:cNvPr id="18" name="TextBox 17"/>
           <p:cNvSpPr txBox="1"/>
           <p:nvPr/>
         </p:nvSpPr>
@@ -17162,7 +16910,7 @@
       </p:sp>
       <p:sp>
         <p:nvSpPr>
-          <p:cNvPr id="20" name="Rounded Rectangle 19"/>
+          <p:cNvPr id="19" name="Rounded Rectangle 18"/>
           <p:cNvSpPr/>
           <p:nvPr/>
         </p:nvSpPr>
@@ -17207,6 +16955,42 @@
       </p:sp>
       <p:sp>
         <p:nvSpPr>
+          <p:cNvPr id="20" name="TextBox 19"/>
+          <p:cNvSpPr txBox="1"/>
+          <p:nvPr/>
+        </p:nvSpPr>
+        <p:spPr>
+          <a:xfrm>
+            <a:off x="6361525" y="1511338"/>
+            <a:ext cx="1234249" cy="211740"/>
+          </a:xfrm>
+          <a:prstGeom prst="rect">
+            <a:avLst/>
+          </a:prstGeom>
+          <a:noFill/>
+        </p:spPr>
+        <p:txBody>
+          <a:bodyPr wrap="none" lIns="0" rIns="0" tIns="0" bIns="0">
+            <a:spAutoFit/>
+          </a:bodyPr>
+          <a:lstStyle/>
+          <a:p>
+            <a:pPr algn="ctr"/>
+            <a:r>
+              <a:rPr sz="1235" b="1">
+                <a:solidFill>
+                  <a:srgbClr val="BCD2D0"/>
+                </a:solidFill>
+                <a:latin typeface="Noto Sans SC"/>
+                <a:ea typeface="Noto Sans SC"/>
+              </a:rPr>
+              <a:t>左侧 · 2 个位置</a:t>
+            </a:r>
+          </a:p>
+        </p:txBody>
+      </p:sp>
+      <p:sp>
+        <p:nvSpPr>
           <p:cNvPr id="21" name="Rounded Rectangle 20"/>
           <p:cNvSpPr/>
           <p:nvPr/>
@@ -17258,44 +17042,8 @@
         </p:nvSpPr>
         <p:spPr>
           <a:xfrm>
-            <a:off x="6361386" y="1511338"/>
-            <a:ext cx="1234526" cy="211740"/>
-          </a:xfrm>
-          <a:prstGeom prst="rect">
-            <a:avLst/>
-          </a:prstGeom>
-          <a:noFill/>
-        </p:spPr>
-        <p:txBody>
-          <a:bodyPr wrap="none" lIns="0" rIns="0" tIns="0" bIns="0">
-            <a:spAutoFit/>
-          </a:bodyPr>
-          <a:lstStyle/>
-          <a:p>
-            <a:pPr algn="ctr"/>
-            <a:r>
-              <a:rPr sz="1235" b="1">
-                <a:solidFill>
-                  <a:srgbClr val="BCD2D0"/>
-                </a:solidFill>
-                <a:latin typeface="Noto Sans SC"/>
-                <a:ea typeface="Noto Sans SC"/>
-              </a:rPr>
-              <a:t>左侧 · 2 个位置</a:t>
-            </a:r>
-          </a:p>
-        </p:txBody>
-      </p:sp>
-      <p:sp>
-        <p:nvSpPr>
-          <p:cNvPr id="23" name="TextBox 22"/>
-          <p:cNvSpPr txBox="1"/>
-          <p:nvPr/>
-        </p:nvSpPr>
-        <p:spPr>
-          <a:xfrm>
-            <a:off x="9498286" y="1511338"/>
-            <a:ext cx="1234526" cy="211740"/>
+            <a:off x="9498425" y="1511338"/>
+            <a:ext cx="1234249" cy="211740"/>
           </a:xfrm>
           <a:prstGeom prst="rect">
             <a:avLst/>
@@ -17324,7 +17072,7 @@
       </p:sp>
       <p:cxnSp>
         <p:nvCxnSpPr>
-          <p:cNvPr id="24" name="Connector 23"/>
+          <p:cNvPr id="23" name="Connector 22"/>
           <p:cNvCxnSpPr/>
           <p:nvPr/>
         </p:nvCxnSpPr>
@@ -17360,7 +17108,7 @@
       </p:cxnSp>
       <p:sp>
         <p:nvSpPr>
-          <p:cNvPr id="25" name="Oval 24"/>
+          <p:cNvPr id="24" name="Oval 23"/>
           <p:cNvSpPr/>
           <p:nvPr/>
         </p:nvSpPr>
@@ -17404,14 +17152,14 @@
       </p:sp>
       <p:sp>
         <p:nvSpPr>
-          <p:cNvPr id="26" name="TextBox 25"/>
-          <p:cNvSpPr txBox="1"/>
-          <p:nvPr/>
-        </p:nvSpPr>
-        <p:spPr>
-          <a:xfrm>
-            <a:off x="8408391" y="1886453"/>
-            <a:ext cx="229717" cy="260604"/>
+          <p:cNvPr id="25" name="TextBox 24"/>
+          <p:cNvSpPr txBox="1"/>
+          <p:nvPr/>
+        </p:nvSpPr>
+        <p:spPr>
+          <a:xfrm>
+            <a:off x="8408029" y="1886453"/>
+            <a:ext cx="230441" cy="260604"/>
           </a:xfrm>
           <a:prstGeom prst="rect">
             <a:avLst/>
@@ -17440,7 +17188,7 @@
       </p:sp>
       <p:cxnSp>
         <p:nvCxnSpPr>
-          <p:cNvPr id="27" name="Connector 26"/>
+          <p:cNvPr id="26" name="Connector 25"/>
           <p:cNvCxnSpPr/>
           <p:nvPr/>
         </p:nvCxnSpPr>
@@ -17476,7 +17224,7 @@
       </p:cxnSp>
       <p:sp>
         <p:nvSpPr>
-          <p:cNvPr id="28" name="Oval 27"/>
+          <p:cNvPr id="27" name="Oval 26"/>
           <p:cNvSpPr/>
           <p:nvPr/>
         </p:nvSpPr>
@@ -17520,14 +17268,14 @@
       </p:sp>
       <p:sp>
         <p:nvSpPr>
-          <p:cNvPr id="29" name="TextBox 28"/>
-          <p:cNvSpPr txBox="1"/>
-          <p:nvPr/>
-        </p:nvSpPr>
-        <p:spPr>
-          <a:xfrm>
-            <a:off x="8473016" y="2553597"/>
-            <a:ext cx="229717" cy="260604"/>
+          <p:cNvPr id="28" name="TextBox 27"/>
+          <p:cNvSpPr txBox="1"/>
+          <p:nvPr/>
+        </p:nvSpPr>
+        <p:spPr>
+          <a:xfrm>
+            <a:off x="8472654" y="2553597"/>
+            <a:ext cx="230441" cy="260604"/>
           </a:xfrm>
           <a:prstGeom prst="rect">
             <a:avLst/>
@@ -17556,7 +17304,7 @@
       </p:sp>
       <p:cxnSp>
         <p:nvCxnSpPr>
-          <p:cNvPr id="30" name="Connector 29"/>
+          <p:cNvPr id="29" name="Connector 28"/>
           <p:cNvCxnSpPr/>
           <p:nvPr/>
         </p:nvCxnSpPr>
@@ -17591,7 +17339,7 @@
       </p:cxnSp>
       <p:sp>
         <p:nvSpPr>
-          <p:cNvPr id="31" name="Oval 30"/>
+          <p:cNvPr id="30" name="Oval 29"/>
           <p:cNvSpPr/>
           <p:nvPr/>
         </p:nvSpPr>
@@ -17635,14 +17383,14 @@
       </p:sp>
       <p:sp>
         <p:nvSpPr>
-          <p:cNvPr id="32" name="TextBox 31"/>
-          <p:cNvSpPr txBox="1"/>
-          <p:nvPr/>
-        </p:nvSpPr>
-        <p:spPr>
-          <a:xfrm>
-            <a:off x="10157536" y="2463749"/>
-            <a:ext cx="229717" cy="260604"/>
+          <p:cNvPr id="31" name="TextBox 30"/>
+          <p:cNvSpPr txBox="1"/>
+          <p:nvPr/>
+        </p:nvSpPr>
+        <p:spPr>
+          <a:xfrm>
+            <a:off x="10157174" y="2463749"/>
+            <a:ext cx="230441" cy="260604"/>
           </a:xfrm>
           <a:prstGeom prst="rect">
             <a:avLst/>
@@ -17671,7 +17419,7 @@
       </p:sp>
       <p:cxnSp>
         <p:nvCxnSpPr>
-          <p:cNvPr id="33" name="Connector 32"/>
+          <p:cNvPr id="32" name="Connector 31"/>
           <p:cNvCxnSpPr/>
           <p:nvPr/>
         </p:nvCxnSpPr>
@@ -17706,7 +17454,7 @@
       </p:cxnSp>
       <p:sp>
         <p:nvSpPr>
-          <p:cNvPr id="34" name="Oval 33"/>
+          <p:cNvPr id="33" name="Oval 32"/>
           <p:cNvSpPr/>
           <p:nvPr/>
         </p:nvSpPr>
@@ -17750,14 +17498,14 @@
       </p:sp>
       <p:sp>
         <p:nvSpPr>
-          <p:cNvPr id="35" name="TextBox 34"/>
-          <p:cNvSpPr txBox="1"/>
-          <p:nvPr/>
-        </p:nvSpPr>
-        <p:spPr>
-          <a:xfrm>
-            <a:off x="10157536" y="3790899"/>
-            <a:ext cx="229717" cy="260604"/>
+          <p:cNvPr id="34" name="TextBox 33"/>
+          <p:cNvSpPr txBox="1"/>
+          <p:nvPr/>
+        </p:nvSpPr>
+        <p:spPr>
+          <a:xfrm>
+            <a:off x="10157174" y="3790899"/>
+            <a:ext cx="230441" cy="260604"/>
           </a:xfrm>
           <a:prstGeom prst="rect">
             <a:avLst/>
@@ -17786,7 +17534,7 @@
       </p:sp>
       <p:cxnSp>
         <p:nvCxnSpPr>
-          <p:cNvPr id="36" name="Connector 35"/>
+          <p:cNvPr id="35" name="Connector 34"/>
           <p:cNvCxnSpPr/>
           <p:nvPr/>
         </p:nvCxnSpPr>
@@ -17822,7 +17570,7 @@
       </p:cxnSp>
       <p:sp>
         <p:nvSpPr>
-          <p:cNvPr id="37" name="Oval 36"/>
+          <p:cNvPr id="36" name="Oval 35"/>
           <p:cNvSpPr/>
           <p:nvPr/>
         </p:nvSpPr>
@@ -17866,14 +17614,14 @@
       </p:sp>
       <p:sp>
         <p:nvSpPr>
-          <p:cNvPr id="38" name="TextBox 37"/>
-          <p:cNvSpPr txBox="1"/>
-          <p:nvPr/>
-        </p:nvSpPr>
-        <p:spPr>
-          <a:xfrm>
-            <a:off x="8475712" y="3730462"/>
-            <a:ext cx="229717" cy="260604"/>
+          <p:cNvPr id="37" name="TextBox 36"/>
+          <p:cNvSpPr txBox="1"/>
+          <p:nvPr/>
+        </p:nvSpPr>
+        <p:spPr>
+          <a:xfrm>
+            <a:off x="8475350" y="3730462"/>
+            <a:ext cx="230441" cy="260604"/>
           </a:xfrm>
           <a:prstGeom prst="rect">
             <a:avLst/>
@@ -17902,7 +17650,7 @@
       </p:sp>
       <p:cxnSp>
         <p:nvCxnSpPr>
-          <p:cNvPr id="39" name="Connector 38"/>
+          <p:cNvPr id="38" name="Connector 37"/>
           <p:cNvCxnSpPr/>
           <p:nvPr/>
         </p:nvCxnSpPr>
@@ -17937,7 +17685,7 @@
       </p:cxnSp>
       <p:sp>
         <p:nvSpPr>
-          <p:cNvPr id="40" name="Oval 39"/>
+          <p:cNvPr id="39" name="Oval 38"/>
           <p:cNvSpPr/>
           <p:nvPr/>
         </p:nvSpPr>
@@ -17981,14 +17729,14 @@
       </p:sp>
       <p:sp>
         <p:nvSpPr>
-          <p:cNvPr id="41" name="TextBox 40"/>
-          <p:cNvSpPr txBox="1"/>
-          <p:nvPr/>
-        </p:nvSpPr>
-        <p:spPr>
-          <a:xfrm>
-            <a:off x="8411316" y="4398779"/>
-            <a:ext cx="229717" cy="260604"/>
+          <p:cNvPr id="40" name="TextBox 39"/>
+          <p:cNvSpPr txBox="1"/>
+          <p:nvPr/>
+        </p:nvSpPr>
+        <p:spPr>
+          <a:xfrm>
+            <a:off x="8410954" y="4398779"/>
+            <a:ext cx="230441" cy="260604"/>
           </a:xfrm>
           <a:prstGeom prst="rect">
             <a:avLst/>
@@ -18017,7 +17765,7 @@
       </p:sp>
       <p:sp>
         <p:nvSpPr>
-          <p:cNvPr id="42" name="Oval 41"/>
+          <p:cNvPr id="41" name="Oval 40"/>
           <p:cNvSpPr/>
           <p:nvPr/>
         </p:nvSpPr>
@@ -18061,14 +17809,14 @@
       </p:sp>
       <p:sp>
         <p:nvSpPr>
-          <p:cNvPr id="43" name="TextBox 42"/>
-          <p:cNvSpPr txBox="1"/>
-          <p:nvPr/>
-        </p:nvSpPr>
-        <p:spPr>
-          <a:xfrm>
-            <a:off x="6850561" y="2344305"/>
-            <a:ext cx="256176" cy="276891"/>
+          <p:cNvPr id="42" name="TextBox 41"/>
+          <p:cNvSpPr txBox="1"/>
+          <p:nvPr/>
+        </p:nvSpPr>
+        <p:spPr>
+          <a:xfrm>
+            <a:off x="6850760" y="2344305"/>
+            <a:ext cx="255778" cy="276891"/>
           </a:xfrm>
           <a:prstGeom prst="rect">
             <a:avLst/>
@@ -18097,7 +17845,7 @@
       </p:sp>
       <p:sp>
         <p:nvSpPr>
-          <p:cNvPr id="44" name="Oval 43"/>
+          <p:cNvPr id="43" name="Oval 42"/>
           <p:cNvSpPr/>
           <p:nvPr/>
         </p:nvSpPr>
@@ -18141,14 +17889,14 @@
       </p:sp>
       <p:sp>
         <p:nvSpPr>
-          <p:cNvPr id="45" name="TextBox 44"/>
-          <p:cNvSpPr txBox="1"/>
-          <p:nvPr/>
-        </p:nvSpPr>
-        <p:spPr>
-          <a:xfrm>
-            <a:off x="9984180" y="1861705"/>
-            <a:ext cx="262739" cy="276891"/>
+          <p:cNvPr id="44" name="TextBox 43"/>
+          <p:cNvSpPr txBox="1"/>
+          <p:nvPr/>
+        </p:nvSpPr>
+        <p:spPr>
+          <a:xfrm>
+            <a:off x="9984644" y="1861705"/>
+            <a:ext cx="261810" cy="276891"/>
           </a:xfrm>
           <a:prstGeom prst="rect">
             <a:avLst/>
@@ -18177,7 +17925,7 @@
       </p:sp>
       <p:sp>
         <p:nvSpPr>
-          <p:cNvPr id="46" name="Oval 45"/>
+          <p:cNvPr id="45" name="Oval 44"/>
           <p:cNvSpPr/>
           <p:nvPr/>
         </p:nvSpPr>
@@ -18221,14 +17969,14 @@
       </p:sp>
       <p:sp>
         <p:nvSpPr>
-          <p:cNvPr id="47" name="TextBox 46"/>
-          <p:cNvSpPr txBox="1"/>
-          <p:nvPr/>
-        </p:nvSpPr>
-        <p:spPr>
-          <a:xfrm>
-            <a:off x="9986744" y="3188855"/>
-            <a:ext cx="257611" cy="276891"/>
+          <p:cNvPr id="46" name="TextBox 45"/>
+          <p:cNvSpPr txBox="1"/>
+          <p:nvPr/>
+        </p:nvSpPr>
+        <p:spPr>
+          <a:xfrm>
+            <a:off x="9987661" y="3188855"/>
+            <a:ext cx="255778" cy="276891"/>
           </a:xfrm>
           <a:prstGeom prst="rect">
             <a:avLst/>
@@ -18257,7 +18005,7 @@
       </p:sp>
       <p:sp>
         <p:nvSpPr>
-          <p:cNvPr id="48" name="Oval 47"/>
+          <p:cNvPr id="47" name="Oval 46"/>
           <p:cNvSpPr/>
           <p:nvPr/>
         </p:nvSpPr>
@@ -18299,7 +18047,7 @@
       </p:sp>
       <p:sp>
         <p:nvSpPr>
-          <p:cNvPr id="49" name="Oval 48"/>
+          <p:cNvPr id="48" name="Oval 47"/>
           <p:cNvSpPr/>
           <p:nvPr/>
         </p:nvSpPr>
@@ -18343,14 +18091,14 @@
       </p:sp>
       <p:sp>
         <p:nvSpPr>
-          <p:cNvPr id="50" name="TextBox 49"/>
-          <p:cNvSpPr txBox="1"/>
-          <p:nvPr/>
-        </p:nvSpPr>
-        <p:spPr>
-          <a:xfrm>
-            <a:off x="9980796" y="4516005"/>
-            <a:ext cx="269507" cy="276891"/>
+          <p:cNvPr id="49" name="TextBox 48"/>
+          <p:cNvSpPr txBox="1"/>
+          <p:nvPr/>
+        </p:nvSpPr>
+        <p:spPr>
+          <a:xfrm>
+            <a:off x="9981628" y="4516005"/>
+            <a:ext cx="267842" cy="276891"/>
           </a:xfrm>
           <a:prstGeom prst="rect">
             <a:avLst/>
@@ -18379,7 +18127,7 @@
       </p:sp>
       <p:sp>
         <p:nvSpPr>
-          <p:cNvPr id="51" name="Oval 50"/>
+          <p:cNvPr id="50" name="Oval 49"/>
           <p:cNvSpPr/>
           <p:nvPr/>
         </p:nvSpPr>
@@ -18421,7 +18169,7 @@
       </p:sp>
       <p:sp>
         <p:nvSpPr>
-          <p:cNvPr id="52" name="Oval 51"/>
+          <p:cNvPr id="51" name="Oval 50"/>
           <p:cNvSpPr/>
           <p:nvPr/>
         </p:nvSpPr>
@@ -18465,43 +18213,43 @@
       </p:sp>
       <p:sp>
         <p:nvSpPr>
+          <p:cNvPr id="52" name="TextBox 51"/>
+          <p:cNvSpPr txBox="1"/>
+          <p:nvPr/>
+        </p:nvSpPr>
+        <p:spPr>
+          <a:xfrm>
+            <a:off x="6853777" y="4093730"/>
+            <a:ext cx="249745" cy="276891"/>
+          </a:xfrm>
+          <a:prstGeom prst="rect">
+            <a:avLst/>
+          </a:prstGeom>
+          <a:noFill/>
+        </p:spPr>
+        <p:txBody>
+          <a:bodyPr wrap="none" lIns="0" rIns="0" tIns="0" bIns="0">
+            <a:spAutoFit/>
+          </a:bodyPr>
+          <a:lstStyle/>
+          <a:p>
+            <a:pPr algn="ctr"/>
+            <a:r>
+              <a:rPr sz="1614" b="1">
+                <a:solidFill>
+                  <a:srgbClr val="0B1B1F"/>
+                </a:solidFill>
+                <a:latin typeface="Noto Sans SC"/>
+                <a:ea typeface="Noto Sans SC"/>
+              </a:rPr>
+              <a:t>E</a:t>
+            </a:r>
+          </a:p>
+        </p:txBody>
+      </p:sp>
+      <p:sp>
+        <p:nvSpPr>
           <p:cNvPr id="53" name="TextBox 52"/>
-          <p:cNvSpPr txBox="1"/>
-          <p:nvPr/>
-        </p:nvSpPr>
-        <p:spPr>
-          <a:xfrm>
-            <a:off x="6854048" y="4093730"/>
-            <a:ext cx="249202" cy="276891"/>
-          </a:xfrm>
-          <a:prstGeom prst="rect">
-            <a:avLst/>
-          </a:prstGeom>
-          <a:noFill/>
-        </p:spPr>
-        <p:txBody>
-          <a:bodyPr wrap="none" lIns="0" rIns="0" tIns="0" bIns="0">
-            <a:spAutoFit/>
-          </a:bodyPr>
-          <a:lstStyle/>
-          <a:p>
-            <a:pPr algn="ctr"/>
-            <a:r>
-              <a:rPr sz="1614" b="1">
-                <a:solidFill>
-                  <a:srgbClr val="0B1B1F"/>
-                </a:solidFill>
-                <a:latin typeface="Noto Sans SC"/>
-                <a:ea typeface="Noto Sans SC"/>
-              </a:rPr>
-              <a:t>E</a:t>
-            </a:r>
-          </a:p>
-        </p:txBody>
-      </p:sp>
-      <p:sp>
-        <p:nvSpPr>
-          <p:cNvPr id="54" name="TextBox 53"/>
           <p:cNvSpPr txBox="1"/>
           <p:nvPr/>
         </p:nvSpPr>
@@ -18761,7 +18509,7 @@
         <p:spPr>
           <a:xfrm>
             <a:off x="563880" y="6512052"/>
-            <a:ext cx="2418587" cy="205740"/>
+            <a:ext cx="2428240" cy="205740"/>
           </a:xfrm>
           <a:prstGeom prst="rect">
             <a:avLst/>
@@ -18796,8 +18544,8 @@
         </p:nvSpPr>
         <p:spPr>
           <a:xfrm>
-            <a:off x="11108524" y="6499098"/>
-            <a:ext cx="561505" cy="222885"/>
+            <a:off x="11113770" y="6499098"/>
+            <a:ext cx="556260" cy="222885"/>
           </a:xfrm>
           <a:prstGeom prst="rect">
             <a:avLst/>
@@ -18826,43 +18574,7 @@
       </p:sp>
       <p:sp>
         <p:nvSpPr>
-          <p:cNvPr id="9" name="TextBox 8"/>
-          <p:cNvSpPr txBox="1"/>
-          <p:nvPr/>
-        </p:nvSpPr>
-        <p:spPr>
-          <a:xfrm>
-            <a:off x="10855147" y="377952"/>
-            <a:ext cx="811072" cy="205740"/>
-          </a:xfrm>
-          <a:prstGeom prst="rect">
-            <a:avLst/>
-          </a:prstGeom>
-          <a:noFill/>
-        </p:spPr>
-        <p:txBody>
-          <a:bodyPr wrap="none" lIns="0" rIns="0" tIns="0" bIns="0">
-            <a:spAutoFit/>
-          </a:bodyPr>
-          <a:lstStyle/>
-          <a:p>
-            <a:pPr algn="r"/>
-            <a:r>
-              <a:rPr sz="1200" b="0">
-                <a:solidFill>
-                  <a:srgbClr val="6F8F8F"/>
-                </a:solidFill>
-                <a:latin typeface="Noto Sans SC"/>
-                <a:ea typeface="Noto Sans SC"/>
-              </a:rPr>
-              <a:t>影片 01:24</a:t>
-            </a:r>
-          </a:p>
-        </p:txBody>
-      </p:sp>
-      <p:sp>
-        <p:nvSpPr>
-          <p:cNvPr id="10" name="Oval 9"/>
+          <p:cNvPr id="9" name="Oval 8"/>
           <p:cNvSpPr/>
           <p:nvPr/>
         </p:nvSpPr>
@@ -18904,7 +18616,7 @@
       </p:sp>
       <p:sp>
         <p:nvSpPr>
-          <p:cNvPr id="11" name="TextBox 10"/>
+          <p:cNvPr id="10" name="TextBox 9"/>
           <p:cNvSpPr txBox="1"/>
           <p:nvPr/>
         </p:nvSpPr>
@@ -18944,7 +18656,7 @@
       </p:sp>
       <p:sp>
         <p:nvSpPr>
-          <p:cNvPr id="12" name="Oval 11"/>
+          <p:cNvPr id="11" name="Oval 10"/>
           <p:cNvSpPr/>
           <p:nvPr/>
         </p:nvSpPr>
@@ -18986,7 +18698,7 @@
       </p:sp>
       <p:sp>
         <p:nvSpPr>
-          <p:cNvPr id="13" name="TextBox 12"/>
+          <p:cNvPr id="12" name="TextBox 11"/>
           <p:cNvSpPr txBox="1"/>
           <p:nvPr/>
         </p:nvSpPr>
@@ -19026,7 +18738,7 @@
       </p:sp>
       <p:sp>
         <p:nvSpPr>
-          <p:cNvPr id="14" name="Oval 13"/>
+          <p:cNvPr id="13" name="Oval 12"/>
           <p:cNvSpPr/>
           <p:nvPr/>
         </p:nvSpPr>
@@ -19068,7 +18780,7 @@
       </p:sp>
       <p:sp>
         <p:nvSpPr>
-          <p:cNvPr id="15" name="TextBox 14"/>
+          <p:cNvPr id="14" name="TextBox 13"/>
           <p:cNvSpPr txBox="1"/>
           <p:nvPr/>
         </p:nvSpPr>
@@ -19108,7 +18820,7 @@
       </p:sp>
       <p:sp>
         <p:nvSpPr>
-          <p:cNvPr id="16" name="Oval 15"/>
+          <p:cNvPr id="15" name="Oval 14"/>
           <p:cNvSpPr/>
           <p:nvPr/>
         </p:nvSpPr>
@@ -19150,7 +18862,7 @@
       </p:sp>
       <p:sp>
         <p:nvSpPr>
-          <p:cNvPr id="17" name="TextBox 16"/>
+          <p:cNvPr id="16" name="TextBox 15"/>
           <p:cNvSpPr txBox="1"/>
           <p:nvPr/>
         </p:nvSpPr>
@@ -19190,7 +18902,7 @@
       </p:sp>
       <p:sp>
         <p:nvSpPr>
-          <p:cNvPr id="18" name="Rounded Rectangle 17"/>
+          <p:cNvPr id="17" name="Rounded Rectangle 16"/>
           <p:cNvSpPr/>
           <p:nvPr/>
         </p:nvSpPr>
@@ -19235,6 +18947,42 @@
       </p:sp>
       <p:sp>
         <p:nvSpPr>
+          <p:cNvPr id="18" name="TextBox 17"/>
+          <p:cNvSpPr txBox="1"/>
+          <p:nvPr/>
+        </p:nvSpPr>
+        <p:spPr>
+          <a:xfrm>
+            <a:off x="6361525" y="1511338"/>
+            <a:ext cx="1234249" cy="211740"/>
+          </a:xfrm>
+          <a:prstGeom prst="rect">
+            <a:avLst/>
+          </a:prstGeom>
+          <a:noFill/>
+        </p:spPr>
+        <p:txBody>
+          <a:bodyPr wrap="none" lIns="0" rIns="0" tIns="0" bIns="0">
+            <a:spAutoFit/>
+          </a:bodyPr>
+          <a:lstStyle/>
+          <a:p>
+            <a:pPr algn="ctr"/>
+            <a:r>
+              <a:rPr sz="1235" b="1">
+                <a:solidFill>
+                  <a:srgbClr val="BCD2D0"/>
+                </a:solidFill>
+                <a:latin typeface="Noto Sans SC"/>
+                <a:ea typeface="Noto Sans SC"/>
+              </a:rPr>
+              <a:t>左侧 · 2 个位置</a:t>
+            </a:r>
+          </a:p>
+        </p:txBody>
+      </p:sp>
+      <p:sp>
+        <p:nvSpPr>
           <p:cNvPr id="19" name="Rounded Rectangle 18"/>
           <p:cNvSpPr/>
           <p:nvPr/>
@@ -19286,44 +19034,8 @@
         </p:nvSpPr>
         <p:spPr>
           <a:xfrm>
-            <a:off x="6361386" y="1511338"/>
-            <a:ext cx="1234526" cy="211740"/>
-          </a:xfrm>
-          <a:prstGeom prst="rect">
-            <a:avLst/>
-          </a:prstGeom>
-          <a:noFill/>
-        </p:spPr>
-        <p:txBody>
-          <a:bodyPr wrap="none" lIns="0" rIns="0" tIns="0" bIns="0">
-            <a:spAutoFit/>
-          </a:bodyPr>
-          <a:lstStyle/>
-          <a:p>
-            <a:pPr algn="ctr"/>
-            <a:r>
-              <a:rPr sz="1235" b="1">
-                <a:solidFill>
-                  <a:srgbClr val="BCD2D0"/>
-                </a:solidFill>
-                <a:latin typeface="Noto Sans SC"/>
-                <a:ea typeface="Noto Sans SC"/>
-              </a:rPr>
-              <a:t>左侧 · 2 个位置</a:t>
-            </a:r>
-          </a:p>
-        </p:txBody>
-      </p:sp>
-      <p:sp>
-        <p:nvSpPr>
-          <p:cNvPr id="21" name="TextBox 20"/>
-          <p:cNvSpPr txBox="1"/>
-          <p:nvPr/>
-        </p:nvSpPr>
-        <p:spPr>
-          <a:xfrm>
-            <a:off x="9498286" y="1511338"/>
-            <a:ext cx="1234526" cy="211740"/>
+            <a:off x="9498425" y="1511338"/>
+            <a:ext cx="1234249" cy="211740"/>
           </a:xfrm>
           <a:prstGeom prst="rect">
             <a:avLst/>
@@ -19352,14 +19064,14 @@
       </p:sp>
       <p:cxnSp>
         <p:nvCxnSpPr>
-          <p:cNvPr id="22" name="Connector 21"/>
+          <p:cNvPr id="21" name="Connector 20"/>
           <p:cNvCxnSpPr/>
           <p:nvPr/>
         </p:nvCxnSpPr>
         <p:spPr>
-          <a:xfrm flipV="1">
+          <a:xfrm>
             <a:off x="10115550" y="1997075"/>
-            <a:ext cx="0" cy="2654300"/>
+            <a:ext cx="0" cy="1327150"/>
           </a:xfrm>
           <a:prstGeom prst="line">
             <a:avLst/>
@@ -19387,13 +19099,13 @@
       </p:cxnSp>
       <p:sp>
         <p:nvSpPr>
-          <p:cNvPr id="23" name="Oval 22"/>
+          <p:cNvPr id="22" name="Oval 21"/>
           <p:cNvSpPr/>
           <p:nvPr/>
         </p:nvSpPr>
         <p:spPr>
           <a:xfrm>
-            <a:off x="9819716" y="3119602"/>
+            <a:off x="10133406" y="2456027"/>
             <a:ext cx="277977" cy="277977"/>
           </a:xfrm>
           <a:prstGeom prst="ellipse">
@@ -19431,14 +19143,14 @@
       </p:sp>
       <p:sp>
         <p:nvSpPr>
-          <p:cNvPr id="24" name="TextBox 23"/>
-          <p:cNvSpPr txBox="1"/>
-          <p:nvPr/>
-        </p:nvSpPr>
-        <p:spPr>
-          <a:xfrm>
-            <a:off x="9843846" y="3127324"/>
-            <a:ext cx="229717" cy="260604"/>
+          <p:cNvPr id="23" name="TextBox 22"/>
+          <p:cNvSpPr txBox="1"/>
+          <p:nvPr/>
+        </p:nvSpPr>
+        <p:spPr>
+          <a:xfrm>
+            <a:off x="10157174" y="2463749"/>
+            <a:ext cx="230441" cy="260604"/>
           </a:xfrm>
           <a:prstGeom prst="rect">
             <a:avLst/>
@@ -19467,14 +19179,14 @@
       </p:sp>
       <p:cxnSp>
         <p:nvCxnSpPr>
-          <p:cNvPr id="25" name="Connector 24"/>
+          <p:cNvPr id="24" name="Connector 23"/>
           <p:cNvCxnSpPr/>
           <p:nvPr/>
         </p:nvCxnSpPr>
         <p:spPr>
-          <a:xfrm flipV="1">
-            <a:off x="10115550" y="3324225"/>
-            <a:ext cx="0" cy="1327150"/>
+          <a:xfrm>
+            <a:off x="10115550" y="1997075"/>
+            <a:ext cx="0" cy="2654300"/>
           </a:xfrm>
           <a:prstGeom prst="line">
             <a:avLst/>
@@ -19502,13 +19214,13 @@
       </p:cxnSp>
       <p:sp>
         <p:nvSpPr>
-          <p:cNvPr id="26" name="Oval 25"/>
+          <p:cNvPr id="25" name="Oval 24"/>
           <p:cNvSpPr/>
           <p:nvPr/>
         </p:nvSpPr>
         <p:spPr>
           <a:xfrm>
-            <a:off x="9819716" y="3783177"/>
+            <a:off x="10133406" y="3119602"/>
             <a:ext cx="277977" cy="277977"/>
           </a:xfrm>
           <a:prstGeom prst="ellipse">
@@ -19546,14 +19258,14 @@
       </p:sp>
       <p:sp>
         <p:nvSpPr>
-          <p:cNvPr id="27" name="TextBox 26"/>
-          <p:cNvSpPr txBox="1"/>
-          <p:nvPr/>
-        </p:nvSpPr>
-        <p:spPr>
-          <a:xfrm>
-            <a:off x="9843846" y="3790899"/>
-            <a:ext cx="229717" cy="260604"/>
+          <p:cNvPr id="26" name="TextBox 25"/>
+          <p:cNvSpPr txBox="1"/>
+          <p:nvPr/>
+        </p:nvSpPr>
+        <p:spPr>
+          <a:xfrm>
+            <a:off x="10157174" y="3127324"/>
+            <a:ext cx="230441" cy="260604"/>
           </a:xfrm>
           <a:prstGeom prst="rect">
             <a:avLst/>
@@ -19582,13 +19294,13 @@
       </p:sp>
       <p:cxnSp>
         <p:nvCxnSpPr>
-          <p:cNvPr id="28" name="Connector 27"/>
+          <p:cNvPr id="27" name="Connector 26"/>
           <p:cNvCxnSpPr/>
           <p:nvPr/>
         </p:nvCxnSpPr>
         <p:spPr>
           <a:xfrm>
-            <a:off x="10115550" y="1997075"/>
+            <a:off x="10115550" y="3324225"/>
             <a:ext cx="0" cy="1327150"/>
           </a:xfrm>
           <a:prstGeom prst="line">
@@ -19617,13 +19329,13 @@
       </p:cxnSp>
       <p:sp>
         <p:nvSpPr>
-          <p:cNvPr id="29" name="Oval 28"/>
+          <p:cNvPr id="28" name="Oval 27"/>
           <p:cNvSpPr/>
           <p:nvPr/>
         </p:nvSpPr>
         <p:spPr>
           <a:xfrm>
-            <a:off x="10133406" y="2456027"/>
+            <a:off x="10133406" y="3783177"/>
             <a:ext cx="277977" cy="277977"/>
           </a:xfrm>
           <a:prstGeom prst="ellipse">
@@ -19661,14 +19373,14 @@
       </p:sp>
       <p:sp>
         <p:nvSpPr>
-          <p:cNvPr id="30" name="TextBox 29"/>
-          <p:cNvSpPr txBox="1"/>
-          <p:nvPr/>
-        </p:nvSpPr>
-        <p:spPr>
-          <a:xfrm>
-            <a:off x="10157536" y="2463749"/>
-            <a:ext cx="229717" cy="260604"/>
+          <p:cNvPr id="29" name="TextBox 28"/>
+          <p:cNvSpPr txBox="1"/>
+          <p:nvPr/>
+        </p:nvSpPr>
+        <p:spPr>
+          <a:xfrm>
+            <a:off x="10157174" y="3790899"/>
+            <a:ext cx="230441" cy="260604"/>
           </a:xfrm>
           <a:prstGeom prst="rect">
             <a:avLst/>
@@ -19697,14 +19409,14 @@
       </p:sp>
       <p:cxnSp>
         <p:nvCxnSpPr>
-          <p:cNvPr id="31" name="Connector 30"/>
+          <p:cNvPr id="30" name="Connector 29"/>
           <p:cNvCxnSpPr/>
           <p:nvPr/>
         </p:nvCxnSpPr>
         <p:spPr>
           <a:xfrm flipH="1" flipV="1">
             <a:off x="6978650" y="2479675"/>
-            <a:ext cx="3136900" cy="844550"/>
+            <a:ext cx="3136900" cy="2171700"/>
           </a:xfrm>
           <a:prstGeom prst="line">
             <a:avLst/>
@@ -19733,13 +19445,13 @@
       </p:cxnSp>
       <p:sp>
         <p:nvSpPr>
-          <p:cNvPr id="32" name="Oval 31"/>
+          <p:cNvPr id="31" name="Oval 30"/>
           <p:cNvSpPr/>
           <p:nvPr/>
         </p:nvSpPr>
         <p:spPr>
           <a:xfrm>
-            <a:off x="8367335" y="2848779"/>
+            <a:off x="8318833" y="3489859"/>
             <a:ext cx="277977" cy="277977"/>
           </a:xfrm>
           <a:prstGeom prst="ellipse">
@@ -19777,14 +19489,14 @@
       </p:sp>
       <p:sp>
         <p:nvSpPr>
-          <p:cNvPr id="33" name="TextBox 32"/>
-          <p:cNvSpPr txBox="1"/>
-          <p:nvPr/>
-        </p:nvSpPr>
-        <p:spPr>
-          <a:xfrm>
-            <a:off x="8391465" y="2856501"/>
-            <a:ext cx="229717" cy="260604"/>
+          <p:cNvPr id="32" name="TextBox 31"/>
+          <p:cNvSpPr txBox="1"/>
+          <p:nvPr/>
+        </p:nvSpPr>
+        <p:spPr>
+          <a:xfrm>
+            <a:off x="8342601" y="3497580"/>
+            <a:ext cx="230441" cy="260604"/>
           </a:xfrm>
           <a:prstGeom prst="rect">
             <a:avLst/>
@@ -19813,14 +19525,14 @@
       </p:sp>
       <p:cxnSp>
         <p:nvCxnSpPr>
-          <p:cNvPr id="34" name="Connector 33"/>
+          <p:cNvPr id="33" name="Connector 32"/>
           <p:cNvCxnSpPr/>
           <p:nvPr/>
         </p:nvCxnSpPr>
         <p:spPr>
-          <a:xfrm flipH="1">
-            <a:off x="6978650" y="3324225"/>
-            <a:ext cx="3136900" cy="904875"/>
+          <a:xfrm flipH="1" flipV="1">
+            <a:off x="6978650" y="4229100"/>
+            <a:ext cx="3136900" cy="422275"/>
           </a:xfrm>
           <a:prstGeom prst="line">
             <a:avLst/>
@@ -19849,13 +19561,13 @@
       </p:cxnSp>
       <p:sp>
         <p:nvSpPr>
-          <p:cNvPr id="35" name="Oval 34"/>
+          <p:cNvPr id="34" name="Oval 33"/>
           <p:cNvSpPr/>
           <p:nvPr/>
         </p:nvSpPr>
         <p:spPr>
           <a:xfrm>
-            <a:off x="8451582" y="3722740"/>
+            <a:off x="8387186" y="4391058"/>
             <a:ext cx="277977" cy="277977"/>
           </a:xfrm>
           <a:prstGeom prst="ellipse">
@@ -19893,14 +19605,14 @@
       </p:sp>
       <p:sp>
         <p:nvSpPr>
-          <p:cNvPr id="36" name="TextBox 35"/>
-          <p:cNvSpPr txBox="1"/>
-          <p:nvPr/>
-        </p:nvSpPr>
-        <p:spPr>
-          <a:xfrm>
-            <a:off x="8475712" y="3730462"/>
-            <a:ext cx="229717" cy="260604"/>
+          <p:cNvPr id="35" name="TextBox 34"/>
+          <p:cNvSpPr txBox="1"/>
+          <p:nvPr/>
+        </p:nvSpPr>
+        <p:spPr>
+          <a:xfrm>
+            <a:off x="8410954" y="4398779"/>
+            <a:ext cx="230441" cy="260604"/>
           </a:xfrm>
           <a:prstGeom prst="rect">
             <a:avLst/>
@@ -19929,7 +19641,7 @@
       </p:sp>
       <p:cxnSp>
         <p:nvCxnSpPr>
-          <p:cNvPr id="37" name="Connector 36"/>
+          <p:cNvPr id="36" name="Connector 35"/>
           <p:cNvCxnSpPr/>
           <p:nvPr/>
         </p:nvCxnSpPr>
@@ -19964,7 +19676,7 @@
       </p:cxnSp>
       <p:sp>
         <p:nvSpPr>
-          <p:cNvPr id="38" name="Oval 37"/>
+          <p:cNvPr id="37" name="Oval 36"/>
           <p:cNvSpPr/>
           <p:nvPr/>
         </p:nvSpPr>
@@ -20008,14 +19720,14 @@
       </p:sp>
       <p:sp>
         <p:nvSpPr>
-          <p:cNvPr id="39" name="TextBox 38"/>
-          <p:cNvSpPr txBox="1"/>
-          <p:nvPr/>
-        </p:nvSpPr>
-        <p:spPr>
-          <a:xfrm>
-            <a:off x="7020636" y="3157486"/>
-            <a:ext cx="229717" cy="260604"/>
+          <p:cNvPr id="38" name="TextBox 37"/>
+          <p:cNvSpPr txBox="1"/>
+          <p:nvPr/>
+        </p:nvSpPr>
+        <p:spPr>
+          <a:xfrm>
+            <a:off x="7020274" y="3157486"/>
+            <a:ext cx="230441" cy="260604"/>
           </a:xfrm>
           <a:prstGeom prst="rect">
             <a:avLst/>
@@ -20044,13 +19756,13 @@
       </p:sp>
       <p:sp>
         <p:nvSpPr>
-          <p:cNvPr id="40" name="Oval 39"/>
+          <p:cNvPr id="39" name="Oval 38"/>
           <p:cNvSpPr/>
           <p:nvPr/>
         </p:nvSpPr>
         <p:spPr>
           <a:xfrm>
-            <a:off x="9862185" y="4398010"/>
+            <a:off x="9862185" y="1743710"/>
             <a:ext cx="506730" cy="506730"/>
           </a:xfrm>
           <a:prstGeom prst="ellipse">
@@ -20088,13 +19800,13 @@
       </p:sp>
       <p:sp>
         <p:nvSpPr>
-          <p:cNvPr id="41" name="Oval 40"/>
+          <p:cNvPr id="40" name="Oval 39"/>
           <p:cNvSpPr/>
           <p:nvPr/>
         </p:nvSpPr>
         <p:spPr>
           <a:xfrm>
-            <a:off x="9856152" y="4391977"/>
+            <a:off x="9856152" y="1737677"/>
             <a:ext cx="518795" cy="518795"/>
           </a:xfrm>
           <a:prstGeom prst="ellipse">
@@ -20131,14 +19843,14 @@
       </p:sp>
       <p:sp>
         <p:nvSpPr>
-          <p:cNvPr id="42" name="TextBox 41"/>
-          <p:cNvSpPr txBox="1"/>
-          <p:nvPr/>
-        </p:nvSpPr>
-        <p:spPr>
-          <a:xfrm>
-            <a:off x="9987461" y="4516005"/>
-            <a:ext cx="256176" cy="276891"/>
+          <p:cNvPr id="41" name="TextBox 40"/>
+          <p:cNvSpPr txBox="1"/>
+          <p:nvPr/>
+        </p:nvSpPr>
+        <p:spPr>
+          <a:xfrm>
+            <a:off x="9987661" y="1861705"/>
+            <a:ext cx="255778" cy="276891"/>
           </a:xfrm>
           <a:prstGeom prst="rect">
             <a:avLst/>
@@ -20167,13 +19879,13 @@
       </p:sp>
       <p:sp>
         <p:nvSpPr>
-          <p:cNvPr id="43" name="Oval 42"/>
+          <p:cNvPr id="42" name="Oval 41"/>
           <p:cNvSpPr/>
           <p:nvPr/>
         </p:nvSpPr>
         <p:spPr>
           <a:xfrm>
-            <a:off x="9862185" y="1743710"/>
+            <a:off x="9862185" y="3070860"/>
             <a:ext cx="506730" cy="506730"/>
           </a:xfrm>
           <a:prstGeom prst="ellipse">
@@ -20211,14 +19923,14 @@
       </p:sp>
       <p:sp>
         <p:nvSpPr>
-          <p:cNvPr id="44" name="TextBox 43"/>
-          <p:cNvSpPr txBox="1"/>
-          <p:nvPr/>
-        </p:nvSpPr>
-        <p:spPr>
-          <a:xfrm>
-            <a:off x="9984180" y="1861705"/>
-            <a:ext cx="262739" cy="276891"/>
+          <p:cNvPr id="43" name="TextBox 42"/>
+          <p:cNvSpPr txBox="1"/>
+          <p:nvPr/>
+        </p:nvSpPr>
+        <p:spPr>
+          <a:xfrm>
+            <a:off x="9984644" y="3188855"/>
+            <a:ext cx="261810" cy="276891"/>
           </a:xfrm>
           <a:prstGeom prst="rect">
             <a:avLst/>
@@ -20247,13 +19959,13 @@
       </p:sp>
       <p:sp>
         <p:nvSpPr>
-          <p:cNvPr id="45" name="Oval 44"/>
+          <p:cNvPr id="44" name="Oval 43"/>
           <p:cNvSpPr/>
           <p:nvPr/>
         </p:nvSpPr>
         <p:spPr>
           <a:xfrm>
-            <a:off x="9862185" y="3070860"/>
+            <a:off x="9862185" y="4398010"/>
             <a:ext cx="506730" cy="506730"/>
           </a:xfrm>
           <a:prstGeom prst="ellipse">
@@ -20291,14 +20003,14 @@
       </p:sp>
       <p:sp>
         <p:nvSpPr>
-          <p:cNvPr id="46" name="TextBox 45"/>
-          <p:cNvSpPr txBox="1"/>
-          <p:nvPr/>
-        </p:nvSpPr>
-        <p:spPr>
-          <a:xfrm>
-            <a:off x="9986744" y="3188855"/>
-            <a:ext cx="257611" cy="276891"/>
+          <p:cNvPr id="45" name="TextBox 44"/>
+          <p:cNvSpPr txBox="1"/>
+          <p:nvPr/>
+        </p:nvSpPr>
+        <p:spPr>
+          <a:xfrm>
+            <a:off x="9987661" y="4516005"/>
+            <a:ext cx="255778" cy="276891"/>
           </a:xfrm>
           <a:prstGeom prst="rect">
             <a:avLst/>
@@ -20327,7 +20039,7 @@
       </p:sp>
       <p:sp>
         <p:nvSpPr>
-          <p:cNvPr id="47" name="Oval 46"/>
+          <p:cNvPr id="46" name="Oval 45"/>
           <p:cNvSpPr/>
           <p:nvPr/>
         </p:nvSpPr>
@@ -20371,7 +20083,7 @@
       </p:sp>
       <p:sp>
         <p:nvSpPr>
-          <p:cNvPr id="48" name="Oval 47"/>
+          <p:cNvPr id="47" name="Oval 46"/>
           <p:cNvSpPr/>
           <p:nvPr/>
         </p:nvSpPr>
@@ -20414,14 +20126,14 @@
       </p:sp>
       <p:sp>
         <p:nvSpPr>
-          <p:cNvPr id="49" name="TextBox 48"/>
-          <p:cNvSpPr txBox="1"/>
-          <p:nvPr/>
-        </p:nvSpPr>
-        <p:spPr>
-          <a:xfrm>
-            <a:off x="6843896" y="2344305"/>
-            <a:ext cx="269507" cy="276891"/>
+          <p:cNvPr id="48" name="TextBox 47"/>
+          <p:cNvSpPr txBox="1"/>
+          <p:nvPr/>
+        </p:nvSpPr>
+        <p:spPr>
+          <a:xfrm>
+            <a:off x="6844728" y="2344305"/>
+            <a:ext cx="267842" cy="276891"/>
           </a:xfrm>
           <a:prstGeom prst="rect">
             <a:avLst/>
@@ -20450,7 +20162,7 @@
       </p:sp>
       <p:sp>
         <p:nvSpPr>
-          <p:cNvPr id="50" name="Oval 49"/>
+          <p:cNvPr id="49" name="Oval 48"/>
           <p:cNvSpPr/>
           <p:nvPr/>
         </p:nvSpPr>
@@ -20494,50 +20206,50 @@
       </p:sp>
       <p:sp>
         <p:nvSpPr>
+          <p:cNvPr id="50" name="TextBox 49"/>
+          <p:cNvSpPr txBox="1"/>
+          <p:nvPr/>
+        </p:nvSpPr>
+        <p:spPr>
+          <a:xfrm>
+            <a:off x="6853777" y="4093730"/>
+            <a:ext cx="249745" cy="276891"/>
+          </a:xfrm>
+          <a:prstGeom prst="rect">
+            <a:avLst/>
+          </a:prstGeom>
+          <a:noFill/>
+        </p:spPr>
+        <p:txBody>
+          <a:bodyPr wrap="none" lIns="0" rIns="0" tIns="0" bIns="0">
+            <a:spAutoFit/>
+          </a:bodyPr>
+          <a:lstStyle/>
+          <a:p>
+            <a:pPr algn="ctr"/>
+            <a:r>
+              <a:rPr sz="1614" b="1">
+                <a:solidFill>
+                  <a:srgbClr val="0B1B1F"/>
+                </a:solidFill>
+                <a:latin typeface="Noto Sans SC"/>
+                <a:ea typeface="Noto Sans SC"/>
+              </a:rPr>
+              <a:t>E</a:t>
+            </a:r>
+          </a:p>
+        </p:txBody>
+      </p:sp>
+      <p:sp>
+        <p:nvSpPr>
           <p:cNvPr id="51" name="TextBox 50"/>
           <p:cNvSpPr txBox="1"/>
           <p:nvPr/>
         </p:nvSpPr>
         <p:spPr>
           <a:xfrm>
-            <a:off x="6854048" y="4093730"/>
-            <a:ext cx="249202" cy="276891"/>
-          </a:xfrm>
-          <a:prstGeom prst="rect">
-            <a:avLst/>
-          </a:prstGeom>
-          <a:noFill/>
-        </p:spPr>
-        <p:txBody>
-          <a:bodyPr wrap="none" lIns="0" rIns="0" tIns="0" bIns="0">
-            <a:spAutoFit/>
-          </a:bodyPr>
-          <a:lstStyle/>
-          <a:p>
-            <a:pPr algn="ctr"/>
-            <a:r>
-              <a:rPr sz="1614" b="1">
-                <a:solidFill>
-                  <a:srgbClr val="0B1B1F"/>
-                </a:solidFill>
-                <a:latin typeface="Noto Sans SC"/>
-                <a:ea typeface="Noto Sans SC"/>
-              </a:rPr>
-              <a:t>E</a:t>
-            </a:r>
-          </a:p>
-        </p:txBody>
-      </p:sp>
-      <p:sp>
-        <p:nvSpPr>
-          <p:cNvPr id="52" name="TextBox 51"/>
-          <p:cNvSpPr txBox="1"/>
-          <p:nvPr/>
-        </p:nvSpPr>
-        <p:spPr>
-          <a:xfrm>
-            <a:off x="7011974" y="5507736"/>
-            <a:ext cx="3057550" cy="274320"/>
+            <a:off x="7016115" y="5507736"/>
+            <a:ext cx="3049270" cy="274320"/>
           </a:xfrm>
           <a:prstGeom prst="rect">
             <a:avLst/>
@@ -20790,7 +20502,7 @@
         <p:spPr>
           <a:xfrm>
             <a:off x="563880" y="6512052"/>
-            <a:ext cx="2418587" cy="205740"/>
+            <a:ext cx="2428240" cy="205740"/>
           </a:xfrm>
           <a:prstGeom prst="rect">
             <a:avLst/>
@@ -20825,8 +20537,8 @@
         </p:nvSpPr>
         <p:spPr>
           <a:xfrm>
-            <a:off x="11108524" y="6499098"/>
-            <a:ext cx="561505" cy="222885"/>
+            <a:off x="11113770" y="6499098"/>
+            <a:ext cx="556260" cy="222885"/>
           </a:xfrm>
           <a:prstGeom prst="rect">
             <a:avLst/>
@@ -20855,43 +20567,7 @@
       </p:sp>
       <p:sp>
         <p:nvSpPr>
-          <p:cNvPr id="9" name="TextBox 8"/>
-          <p:cNvSpPr txBox="1"/>
-          <p:nvPr/>
-        </p:nvSpPr>
-        <p:spPr>
-          <a:xfrm>
-            <a:off x="10855147" y="377952"/>
-            <a:ext cx="811072" cy="205740"/>
-          </a:xfrm>
-          <a:prstGeom prst="rect">
-            <a:avLst/>
-          </a:prstGeom>
-          <a:noFill/>
-        </p:spPr>
-        <p:txBody>
-          <a:bodyPr wrap="none" lIns="0" rIns="0" tIns="0" bIns="0">
-            <a:spAutoFit/>
-          </a:bodyPr>
-          <a:lstStyle/>
-          <a:p>
-            <a:pPr algn="r"/>
-            <a:r>
-              <a:rPr sz="1200" b="0">
-                <a:solidFill>
-                  <a:srgbClr val="6F8F8F"/>
-                </a:solidFill>
-                <a:latin typeface="Noto Sans SC"/>
-                <a:ea typeface="Noto Sans SC"/>
-              </a:rPr>
-              <a:t>影片 01:36</a:t>
-            </a:r>
-          </a:p>
-        </p:txBody>
-      </p:sp>
-      <p:sp>
-        <p:nvSpPr>
-          <p:cNvPr id="10" name="Oval 9"/>
+          <p:cNvPr id="9" name="Oval 8"/>
           <p:cNvSpPr/>
           <p:nvPr/>
         </p:nvSpPr>
@@ -20933,7 +20609,7 @@
       </p:sp>
       <p:sp>
         <p:nvSpPr>
-          <p:cNvPr id="11" name="TextBox 10"/>
+          <p:cNvPr id="10" name="TextBox 9"/>
           <p:cNvSpPr txBox="1"/>
           <p:nvPr/>
         </p:nvSpPr>
@@ -20973,7 +20649,7 @@
       </p:sp>
       <p:sp>
         <p:nvSpPr>
-          <p:cNvPr id="12" name="Oval 11"/>
+          <p:cNvPr id="11" name="Oval 10"/>
           <p:cNvSpPr/>
           <p:nvPr/>
         </p:nvSpPr>
@@ -21015,7 +20691,7 @@
       </p:sp>
       <p:sp>
         <p:nvSpPr>
-          <p:cNvPr id="13" name="TextBox 12"/>
+          <p:cNvPr id="12" name="TextBox 11"/>
           <p:cNvSpPr txBox="1"/>
           <p:nvPr/>
         </p:nvSpPr>
@@ -21055,7 +20731,7 @@
       </p:sp>
       <p:sp>
         <p:nvSpPr>
-          <p:cNvPr id="14" name="Oval 13"/>
+          <p:cNvPr id="13" name="Oval 12"/>
           <p:cNvSpPr/>
           <p:nvPr/>
         </p:nvSpPr>
@@ -21097,7 +20773,7 @@
       </p:sp>
       <p:sp>
         <p:nvSpPr>
-          <p:cNvPr id="15" name="TextBox 14"/>
+          <p:cNvPr id="14" name="TextBox 13"/>
           <p:cNvSpPr txBox="1"/>
           <p:nvPr/>
         </p:nvSpPr>
@@ -21137,7 +20813,7 @@
       </p:sp>
       <p:sp>
         <p:nvSpPr>
-          <p:cNvPr id="16" name="Oval 15"/>
+          <p:cNvPr id="15" name="Oval 14"/>
           <p:cNvSpPr/>
           <p:nvPr/>
         </p:nvSpPr>
@@ -21179,7 +20855,7 @@
       </p:sp>
       <p:sp>
         <p:nvSpPr>
-          <p:cNvPr id="17" name="TextBox 16"/>
+          <p:cNvPr id="16" name="TextBox 15"/>
           <p:cNvSpPr txBox="1"/>
           <p:nvPr/>
         </p:nvSpPr>
@@ -21219,7 +20895,7 @@
       </p:sp>
       <p:sp>
         <p:nvSpPr>
-          <p:cNvPr id="18" name="TextBox 17"/>
+          <p:cNvPr id="17" name="TextBox 16"/>
           <p:cNvSpPr txBox="1"/>
           <p:nvPr/>
         </p:nvSpPr>
@@ -21259,7 +20935,7 @@
       </p:sp>
       <p:sp>
         <p:nvSpPr>
-          <p:cNvPr id="19" name="Rounded Rectangle 18"/>
+          <p:cNvPr id="18" name="Rounded Rectangle 17"/>
           <p:cNvSpPr/>
           <p:nvPr/>
         </p:nvSpPr>
@@ -21304,6 +20980,42 @@
       </p:sp>
       <p:sp>
         <p:nvSpPr>
+          <p:cNvPr id="19" name="TextBox 18"/>
+          <p:cNvSpPr txBox="1"/>
+          <p:nvPr/>
+        </p:nvSpPr>
+        <p:spPr>
+          <a:xfrm>
+            <a:off x="6361525" y="1511338"/>
+            <a:ext cx="1234249" cy="211740"/>
+          </a:xfrm>
+          <a:prstGeom prst="rect">
+            <a:avLst/>
+          </a:prstGeom>
+          <a:noFill/>
+        </p:spPr>
+        <p:txBody>
+          <a:bodyPr wrap="none" lIns="0" rIns="0" tIns="0" bIns="0">
+            <a:spAutoFit/>
+          </a:bodyPr>
+          <a:lstStyle/>
+          <a:p>
+            <a:pPr algn="ctr"/>
+            <a:r>
+              <a:rPr sz="1235" b="1">
+                <a:solidFill>
+                  <a:srgbClr val="BCD2D0"/>
+                </a:solidFill>
+                <a:latin typeface="Noto Sans SC"/>
+                <a:ea typeface="Noto Sans SC"/>
+              </a:rPr>
+              <a:t>左侧 · 2 个位置</a:t>
+            </a:r>
+          </a:p>
+        </p:txBody>
+      </p:sp>
+      <p:sp>
+        <p:nvSpPr>
           <p:cNvPr id="20" name="Rounded Rectangle 19"/>
           <p:cNvSpPr/>
           <p:nvPr/>
@@ -21355,44 +21067,8 @@
         </p:nvSpPr>
         <p:spPr>
           <a:xfrm>
-            <a:off x="6361386" y="1511338"/>
-            <a:ext cx="1234526" cy="211740"/>
-          </a:xfrm>
-          <a:prstGeom prst="rect">
-            <a:avLst/>
-          </a:prstGeom>
-          <a:noFill/>
-        </p:spPr>
-        <p:txBody>
-          <a:bodyPr wrap="none" lIns="0" rIns="0" tIns="0" bIns="0">
-            <a:spAutoFit/>
-          </a:bodyPr>
-          <a:lstStyle/>
-          <a:p>
-            <a:pPr algn="ctr"/>
-            <a:r>
-              <a:rPr sz="1235" b="1">
-                <a:solidFill>
-                  <a:srgbClr val="BCD2D0"/>
-                </a:solidFill>
-                <a:latin typeface="Noto Sans SC"/>
-                <a:ea typeface="Noto Sans SC"/>
-              </a:rPr>
-              <a:t>左侧 · 2 个位置</a:t>
-            </a:r>
-          </a:p>
-        </p:txBody>
-      </p:sp>
-      <p:sp>
-        <p:nvSpPr>
-          <p:cNvPr id="22" name="TextBox 21"/>
-          <p:cNvSpPr txBox="1"/>
-          <p:nvPr/>
-        </p:nvSpPr>
-        <p:spPr>
-          <a:xfrm>
-            <a:off x="9498286" y="1511338"/>
-            <a:ext cx="1234526" cy="211740"/>
+            <a:off x="9498425" y="1511338"/>
+            <a:ext cx="1234249" cy="211740"/>
           </a:xfrm>
           <a:prstGeom prst="rect">
             <a:avLst/>
@@ -21421,14 +21097,14 @@
       </p:sp>
       <p:cxnSp>
         <p:nvCxnSpPr>
-          <p:cNvPr id="23" name="Connector 22"/>
+          <p:cNvPr id="22" name="Connector 21"/>
           <p:cNvCxnSpPr/>
           <p:nvPr/>
         </p:nvCxnSpPr>
         <p:spPr>
-          <a:xfrm flipV="1">
+          <a:xfrm>
             <a:off x="10115550" y="1997075"/>
-            <a:ext cx="0" cy="2654300"/>
+            <a:ext cx="0" cy="1327150"/>
           </a:xfrm>
           <a:prstGeom prst="line">
             <a:avLst/>
@@ -21456,13 +21132,13 @@
       </p:cxnSp>
       <p:sp>
         <p:nvSpPr>
-          <p:cNvPr id="24" name="Oval 23"/>
+          <p:cNvPr id="23" name="Oval 22"/>
           <p:cNvSpPr/>
           <p:nvPr/>
         </p:nvSpPr>
         <p:spPr>
           <a:xfrm>
-            <a:off x="9819716" y="3119602"/>
+            <a:off x="10133406" y="2456027"/>
             <a:ext cx="277977" cy="277977"/>
           </a:xfrm>
           <a:prstGeom prst="ellipse">
@@ -21500,14 +21176,14 @@
       </p:sp>
       <p:sp>
         <p:nvSpPr>
-          <p:cNvPr id="25" name="TextBox 24"/>
-          <p:cNvSpPr txBox="1"/>
-          <p:nvPr/>
-        </p:nvSpPr>
-        <p:spPr>
-          <a:xfrm>
-            <a:off x="9843846" y="3127324"/>
-            <a:ext cx="229717" cy="260604"/>
+          <p:cNvPr id="24" name="TextBox 23"/>
+          <p:cNvSpPr txBox="1"/>
+          <p:nvPr/>
+        </p:nvSpPr>
+        <p:spPr>
+          <a:xfrm>
+            <a:off x="10157174" y="2463749"/>
+            <a:ext cx="230441" cy="260604"/>
           </a:xfrm>
           <a:prstGeom prst="rect">
             <a:avLst/>
@@ -21536,14 +21212,14 @@
       </p:sp>
       <p:cxnSp>
         <p:nvCxnSpPr>
-          <p:cNvPr id="26" name="Connector 25"/>
+          <p:cNvPr id="25" name="Connector 24"/>
           <p:cNvCxnSpPr/>
           <p:nvPr/>
         </p:nvCxnSpPr>
         <p:spPr>
-          <a:xfrm flipH="1" flipV="1">
-            <a:off x="6978650" y="4229100"/>
-            <a:ext cx="3136900" cy="422275"/>
+          <a:xfrm flipH="1">
+            <a:off x="6978650" y="1997075"/>
+            <a:ext cx="3136900" cy="482600"/>
           </a:xfrm>
           <a:prstGeom prst="line">
             <a:avLst/>
@@ -21572,13 +21248,13 @@
       </p:cxnSp>
       <p:sp>
         <p:nvSpPr>
-          <p:cNvPr id="27" name="Oval 26"/>
+          <p:cNvPr id="26" name="Oval 25"/>
           <p:cNvSpPr/>
           <p:nvPr/>
         </p:nvSpPr>
         <p:spPr>
           <a:xfrm>
-            <a:off x="8387186" y="4391058"/>
+            <a:off x="8431960" y="2188773"/>
             <a:ext cx="277977" cy="277977"/>
           </a:xfrm>
           <a:prstGeom prst="ellipse">
@@ -21616,14 +21292,14 @@
       </p:sp>
       <p:sp>
         <p:nvSpPr>
-          <p:cNvPr id="28" name="TextBox 27"/>
-          <p:cNvSpPr txBox="1"/>
-          <p:nvPr/>
-        </p:nvSpPr>
-        <p:spPr>
-          <a:xfrm>
-            <a:off x="8411316" y="4398779"/>
-            <a:ext cx="229717" cy="260604"/>
+          <p:cNvPr id="27" name="TextBox 26"/>
+          <p:cNvSpPr txBox="1"/>
+          <p:nvPr/>
+        </p:nvSpPr>
+        <p:spPr>
+          <a:xfrm>
+            <a:off x="8455728" y="2196495"/>
+            <a:ext cx="230441" cy="260604"/>
           </a:xfrm>
           <a:prstGeom prst="rect">
             <a:avLst/>
@@ -21652,14 +21328,14 @@
       </p:sp>
       <p:cxnSp>
         <p:nvCxnSpPr>
-          <p:cNvPr id="29" name="Connector 28"/>
+          <p:cNvPr id="28" name="Connector 27"/>
           <p:cNvCxnSpPr/>
           <p:nvPr/>
         </p:nvCxnSpPr>
         <p:spPr>
-          <a:xfrm flipH="1">
-            <a:off x="6978650" y="1997075"/>
-            <a:ext cx="3136900" cy="2232025"/>
+          <a:xfrm flipH="1" flipV="1">
+            <a:off x="6978650" y="2479675"/>
+            <a:ext cx="3136900" cy="844550"/>
           </a:xfrm>
           <a:prstGeom prst="line">
             <a:avLst/>
@@ -21688,13 +21364,13 @@
       </p:cxnSp>
       <p:sp>
         <p:nvSpPr>
-          <p:cNvPr id="30" name="Oval 29"/>
+          <p:cNvPr id="29" name="Oval 28"/>
           <p:cNvSpPr/>
           <p:nvPr/>
         </p:nvSpPr>
         <p:spPr>
           <a:xfrm>
-            <a:off x="8499042" y="3036260"/>
+            <a:off x="8367335" y="2848779"/>
             <a:ext cx="277977" cy="277977"/>
           </a:xfrm>
           <a:prstGeom prst="ellipse">
@@ -21732,14 +21408,14 @@
       </p:sp>
       <p:sp>
         <p:nvSpPr>
-          <p:cNvPr id="31" name="TextBox 30"/>
-          <p:cNvSpPr txBox="1"/>
-          <p:nvPr/>
-        </p:nvSpPr>
-        <p:spPr>
-          <a:xfrm>
-            <a:off x="8523172" y="3043982"/>
-            <a:ext cx="229717" cy="260604"/>
+          <p:cNvPr id="30" name="TextBox 29"/>
+          <p:cNvSpPr txBox="1"/>
+          <p:nvPr/>
+        </p:nvSpPr>
+        <p:spPr>
+          <a:xfrm>
+            <a:off x="8391103" y="2856501"/>
+            <a:ext cx="230441" cy="260604"/>
           </a:xfrm>
           <a:prstGeom prst="rect">
             <a:avLst/>
@@ -21768,12 +21444,12 @@
       </p:sp>
       <p:cxnSp>
         <p:nvCxnSpPr>
-          <p:cNvPr id="32" name="Connector 31"/>
+          <p:cNvPr id="31" name="Connector 30"/>
           <p:cNvCxnSpPr/>
           <p:nvPr/>
         </p:nvCxnSpPr>
         <p:spPr>
-          <a:xfrm flipV="1">
+          <a:xfrm>
             <a:off x="6978650" y="2479675"/>
             <a:ext cx="0" cy="1749425"/>
           </a:xfrm>
@@ -21803,13 +21479,13 @@
       </p:cxnSp>
       <p:sp>
         <p:nvSpPr>
-          <p:cNvPr id="33" name="Oval 32"/>
+          <p:cNvPr id="32" name="Oval 31"/>
           <p:cNvSpPr/>
           <p:nvPr/>
         </p:nvSpPr>
         <p:spPr>
           <a:xfrm>
-            <a:off x="6682816" y="3149765"/>
+            <a:off x="6996506" y="3149765"/>
             <a:ext cx="277977" cy="277977"/>
           </a:xfrm>
           <a:prstGeom prst="ellipse">
@@ -21847,14 +21523,14 @@
       </p:sp>
       <p:sp>
         <p:nvSpPr>
-          <p:cNvPr id="34" name="TextBox 33"/>
-          <p:cNvSpPr txBox="1"/>
-          <p:nvPr/>
-        </p:nvSpPr>
-        <p:spPr>
-          <a:xfrm>
-            <a:off x="6706946" y="3157486"/>
-            <a:ext cx="229717" cy="260604"/>
+          <p:cNvPr id="33" name="TextBox 32"/>
+          <p:cNvSpPr txBox="1"/>
+          <p:nvPr/>
+        </p:nvSpPr>
+        <p:spPr>
+          <a:xfrm>
+            <a:off x="7020274" y="3157486"/>
+            <a:ext cx="230441" cy="260604"/>
           </a:xfrm>
           <a:prstGeom prst="rect">
             <a:avLst/>
@@ -21883,14 +21559,14 @@
       </p:sp>
       <p:cxnSp>
         <p:nvCxnSpPr>
-          <p:cNvPr id="35" name="Connector 34"/>
+          <p:cNvPr id="34" name="Connector 33"/>
           <p:cNvCxnSpPr/>
           <p:nvPr/>
         </p:nvCxnSpPr>
         <p:spPr>
-          <a:xfrm flipV="1">
-            <a:off x="6978650" y="3324225"/>
-            <a:ext cx="3136900" cy="904875"/>
+          <a:xfrm>
+            <a:off x="6978650" y="2479675"/>
+            <a:ext cx="3136900" cy="2171700"/>
           </a:xfrm>
           <a:prstGeom prst="line">
             <a:avLst/>
@@ -21919,13 +21595,13 @@
       </p:cxnSp>
       <p:sp>
         <p:nvSpPr>
-          <p:cNvPr id="36" name="Oval 35"/>
+          <p:cNvPr id="35" name="Oval 34"/>
           <p:cNvSpPr/>
           <p:nvPr/>
         </p:nvSpPr>
         <p:spPr>
           <a:xfrm>
-            <a:off x="8364639" y="3421339"/>
+            <a:off x="8497388" y="3231945"/>
             <a:ext cx="277977" cy="277977"/>
           </a:xfrm>
           <a:prstGeom prst="ellipse">
@@ -21963,14 +21639,14 @@
       </p:sp>
       <p:sp>
         <p:nvSpPr>
-          <p:cNvPr id="37" name="TextBox 36"/>
-          <p:cNvSpPr txBox="1"/>
-          <p:nvPr/>
-        </p:nvSpPr>
-        <p:spPr>
-          <a:xfrm>
-            <a:off x="8388769" y="3429061"/>
-            <a:ext cx="229717" cy="260604"/>
+          <p:cNvPr id="36" name="TextBox 35"/>
+          <p:cNvSpPr txBox="1"/>
+          <p:nvPr/>
+        </p:nvSpPr>
+        <p:spPr>
+          <a:xfrm>
+            <a:off x="8521156" y="3239667"/>
+            <a:ext cx="230441" cy="260604"/>
           </a:xfrm>
           <a:prstGeom prst="rect">
             <a:avLst/>
@@ -21999,14 +21675,14 @@
       </p:sp>
       <p:cxnSp>
         <p:nvCxnSpPr>
-          <p:cNvPr id="38" name="Connector 37"/>
+          <p:cNvPr id="37" name="Connector 36"/>
           <p:cNvCxnSpPr/>
           <p:nvPr/>
         </p:nvCxnSpPr>
         <p:spPr>
           <a:xfrm>
-            <a:off x="6978650" y="2479675"/>
-            <a:ext cx="3136900" cy="844550"/>
+            <a:off x="6978650" y="4229100"/>
+            <a:ext cx="3136900" cy="422275"/>
           </a:xfrm>
           <a:prstGeom prst="line">
             <a:avLst/>
@@ -22035,13 +21711,13 @@
       </p:cxnSp>
       <p:sp>
         <p:nvSpPr>
-          <p:cNvPr id="39" name="Oval 38"/>
+          <p:cNvPr id="38" name="Oval 37"/>
           <p:cNvSpPr/>
           <p:nvPr/>
         </p:nvSpPr>
         <p:spPr>
           <a:xfrm>
-            <a:off x="8448886" y="2545875"/>
+            <a:off x="8429036" y="4080172"/>
             <a:ext cx="277977" cy="277977"/>
           </a:xfrm>
           <a:prstGeom prst="ellipse">
@@ -22079,14 +21755,14 @@
       </p:sp>
       <p:sp>
         <p:nvSpPr>
-          <p:cNvPr id="40" name="TextBox 39"/>
-          <p:cNvSpPr txBox="1"/>
-          <p:nvPr/>
-        </p:nvSpPr>
-        <p:spPr>
-          <a:xfrm>
-            <a:off x="8473016" y="2553597"/>
-            <a:ext cx="229717" cy="260604"/>
+          <p:cNvPr id="39" name="TextBox 38"/>
+          <p:cNvSpPr txBox="1"/>
+          <p:nvPr/>
+        </p:nvSpPr>
+        <p:spPr>
+          <a:xfrm>
+            <a:off x="8452804" y="4087893"/>
+            <a:ext cx="230441" cy="260604"/>
           </a:xfrm>
           <a:prstGeom prst="rect">
             <a:avLst/>
@@ -22115,13 +21791,13 @@
       </p:sp>
       <p:sp>
         <p:nvSpPr>
-          <p:cNvPr id="41" name="Oval 40"/>
+          <p:cNvPr id="40" name="Oval 39"/>
           <p:cNvSpPr/>
           <p:nvPr/>
         </p:nvSpPr>
         <p:spPr>
           <a:xfrm>
-            <a:off x="9862185" y="4398010"/>
+            <a:off x="9862185" y="1743710"/>
             <a:ext cx="506730" cy="506730"/>
           </a:xfrm>
           <a:prstGeom prst="ellipse">
@@ -22159,13 +21835,13 @@
       </p:sp>
       <p:sp>
         <p:nvSpPr>
-          <p:cNvPr id="42" name="Oval 41"/>
+          <p:cNvPr id="41" name="Oval 40"/>
           <p:cNvSpPr/>
           <p:nvPr/>
         </p:nvSpPr>
         <p:spPr>
           <a:xfrm>
-            <a:off x="9856152" y="4391977"/>
+            <a:off x="9856152" y="1737677"/>
             <a:ext cx="518795" cy="518795"/>
           </a:xfrm>
           <a:prstGeom prst="ellipse">
@@ -22202,14 +21878,14 @@
       </p:sp>
       <p:sp>
         <p:nvSpPr>
-          <p:cNvPr id="43" name="TextBox 42"/>
-          <p:cNvSpPr txBox="1"/>
-          <p:nvPr/>
-        </p:nvSpPr>
-        <p:spPr>
-          <a:xfrm>
-            <a:off x="9987461" y="4516005"/>
-            <a:ext cx="256176" cy="276891"/>
+          <p:cNvPr id="42" name="TextBox 41"/>
+          <p:cNvSpPr txBox="1"/>
+          <p:nvPr/>
+        </p:nvSpPr>
+        <p:spPr>
+          <a:xfrm>
+            <a:off x="9987661" y="1861705"/>
+            <a:ext cx="255778" cy="276891"/>
           </a:xfrm>
           <a:prstGeom prst="rect">
             <a:avLst/>
@@ -22238,13 +21914,13 @@
       </p:sp>
       <p:sp>
         <p:nvSpPr>
-          <p:cNvPr id="44" name="Oval 43"/>
+          <p:cNvPr id="43" name="Oval 42"/>
           <p:cNvSpPr/>
           <p:nvPr/>
         </p:nvSpPr>
         <p:spPr>
           <a:xfrm>
-            <a:off x="9862185" y="1743710"/>
+            <a:off x="9862185" y="3070860"/>
             <a:ext cx="506730" cy="506730"/>
           </a:xfrm>
           <a:prstGeom prst="ellipse">
@@ -22282,14 +21958,14 @@
       </p:sp>
       <p:sp>
         <p:nvSpPr>
-          <p:cNvPr id="45" name="TextBox 44"/>
-          <p:cNvSpPr txBox="1"/>
-          <p:nvPr/>
-        </p:nvSpPr>
-        <p:spPr>
-          <a:xfrm>
-            <a:off x="9984180" y="1861705"/>
-            <a:ext cx="262739" cy="276891"/>
+          <p:cNvPr id="44" name="TextBox 43"/>
+          <p:cNvSpPr txBox="1"/>
+          <p:nvPr/>
+        </p:nvSpPr>
+        <p:spPr>
+          <a:xfrm>
+            <a:off x="9984644" y="3188855"/>
+            <a:ext cx="261810" cy="276891"/>
           </a:xfrm>
           <a:prstGeom prst="rect">
             <a:avLst/>
@@ -22318,13 +21994,13 @@
       </p:sp>
       <p:sp>
         <p:nvSpPr>
-          <p:cNvPr id="46" name="Oval 45"/>
+          <p:cNvPr id="45" name="Oval 44"/>
           <p:cNvSpPr/>
           <p:nvPr/>
         </p:nvSpPr>
         <p:spPr>
           <a:xfrm>
-            <a:off x="6725284" y="3975735"/>
+            <a:off x="6725284" y="2226310"/>
             <a:ext cx="506730" cy="506730"/>
           </a:xfrm>
           <a:prstGeom prst="ellipse">
@@ -22362,13 +22038,13 @@
       </p:sp>
       <p:sp>
         <p:nvSpPr>
-          <p:cNvPr id="47" name="Oval 46"/>
+          <p:cNvPr id="46" name="Oval 45"/>
           <p:cNvSpPr/>
           <p:nvPr/>
         </p:nvSpPr>
         <p:spPr>
           <a:xfrm>
-            <a:off x="6719252" y="3969702"/>
+            <a:off x="6719252" y="2220277"/>
             <a:ext cx="518795" cy="518795"/>
           </a:xfrm>
           <a:prstGeom prst="ellipse">
@@ -22405,14 +22081,14 @@
       </p:sp>
       <p:sp>
         <p:nvSpPr>
-          <p:cNvPr id="48" name="TextBox 47"/>
-          <p:cNvSpPr txBox="1"/>
-          <p:nvPr/>
-        </p:nvSpPr>
-        <p:spPr>
-          <a:xfrm>
-            <a:off x="6849844" y="4093730"/>
-            <a:ext cx="257611" cy="276891"/>
+          <p:cNvPr id="47" name="TextBox 46"/>
+          <p:cNvSpPr txBox="1"/>
+          <p:nvPr/>
+        </p:nvSpPr>
+        <p:spPr>
+          <a:xfrm>
+            <a:off x="6850760" y="2344305"/>
+            <a:ext cx="255778" cy="276891"/>
           </a:xfrm>
           <a:prstGeom prst="rect">
             <a:avLst/>
@@ -22441,13 +22117,13 @@
       </p:sp>
       <p:sp>
         <p:nvSpPr>
-          <p:cNvPr id="49" name="Oval 48"/>
+          <p:cNvPr id="48" name="Oval 47"/>
           <p:cNvSpPr/>
           <p:nvPr/>
         </p:nvSpPr>
         <p:spPr>
           <a:xfrm>
-            <a:off x="6725284" y="2226310"/>
+            <a:off x="6725284" y="3975735"/>
             <a:ext cx="506730" cy="506730"/>
           </a:xfrm>
           <a:prstGeom prst="ellipse">
@@ -22485,13 +22161,13 @@
       </p:sp>
       <p:sp>
         <p:nvSpPr>
-          <p:cNvPr id="50" name="Oval 49"/>
+          <p:cNvPr id="49" name="Oval 48"/>
           <p:cNvSpPr/>
           <p:nvPr/>
         </p:nvSpPr>
         <p:spPr>
           <a:xfrm>
-            <a:off x="6719252" y="2220277"/>
+            <a:off x="6719252" y="3969702"/>
             <a:ext cx="518795" cy="518795"/>
           </a:xfrm>
           <a:prstGeom prst="ellipse">
@@ -22528,14 +22204,14 @@
       </p:sp>
       <p:sp>
         <p:nvSpPr>
-          <p:cNvPr id="51" name="TextBox 50"/>
-          <p:cNvSpPr txBox="1"/>
-          <p:nvPr/>
-        </p:nvSpPr>
-        <p:spPr>
-          <a:xfrm>
-            <a:off x="6843896" y="2344305"/>
-            <a:ext cx="269507" cy="276891"/>
+          <p:cNvPr id="50" name="TextBox 49"/>
+          <p:cNvSpPr txBox="1"/>
+          <p:nvPr/>
+        </p:nvSpPr>
+        <p:spPr>
+          <a:xfrm>
+            <a:off x="6844728" y="4093730"/>
+            <a:ext cx="267842" cy="276891"/>
           </a:xfrm>
           <a:prstGeom prst="rect">
             <a:avLst/>
@@ -22564,13 +22240,13 @@
       </p:sp>
       <p:sp>
         <p:nvSpPr>
-          <p:cNvPr id="52" name="Oval 51"/>
+          <p:cNvPr id="51" name="Oval 50"/>
           <p:cNvSpPr/>
           <p:nvPr/>
         </p:nvSpPr>
         <p:spPr>
           <a:xfrm>
-            <a:off x="9862185" y="3070860"/>
+            <a:off x="9862185" y="4398010"/>
             <a:ext cx="506730" cy="506730"/>
           </a:xfrm>
           <a:prstGeom prst="ellipse">
@@ -22608,13 +22284,13 @@
       </p:sp>
       <p:sp>
         <p:nvSpPr>
-          <p:cNvPr id="53" name="Oval 52"/>
+          <p:cNvPr id="52" name="Oval 51"/>
           <p:cNvSpPr/>
           <p:nvPr/>
         </p:nvSpPr>
         <p:spPr>
           <a:xfrm>
-            <a:off x="9856152" y="3064827"/>
+            <a:off x="9856152" y="4391977"/>
             <a:ext cx="518795" cy="518795"/>
           </a:xfrm>
           <a:prstGeom prst="ellipse">
@@ -22651,50 +22327,50 @@
       </p:sp>
       <p:sp>
         <p:nvSpPr>
+          <p:cNvPr id="53" name="TextBox 52"/>
+          <p:cNvSpPr txBox="1"/>
+          <p:nvPr/>
+        </p:nvSpPr>
+        <p:spPr>
+          <a:xfrm>
+            <a:off x="9990677" y="4516005"/>
+            <a:ext cx="249745" cy="276891"/>
+          </a:xfrm>
+          <a:prstGeom prst="rect">
+            <a:avLst/>
+          </a:prstGeom>
+          <a:noFill/>
+        </p:spPr>
+        <p:txBody>
+          <a:bodyPr wrap="none" lIns="0" rIns="0" tIns="0" bIns="0">
+            <a:spAutoFit/>
+          </a:bodyPr>
+          <a:lstStyle/>
+          <a:p>
+            <a:pPr algn="ctr"/>
+            <a:r>
+              <a:rPr sz="1614" b="1">
+                <a:solidFill>
+                  <a:srgbClr val="0B1B1F"/>
+                </a:solidFill>
+                <a:latin typeface="Noto Sans SC"/>
+                <a:ea typeface="Noto Sans SC"/>
+              </a:rPr>
+              <a:t>E</a:t>
+            </a:r>
+          </a:p>
+        </p:txBody>
+      </p:sp>
+      <p:sp>
+        <p:nvSpPr>
           <p:cNvPr id="54" name="TextBox 53"/>
           <p:cNvSpPr txBox="1"/>
           <p:nvPr/>
         </p:nvSpPr>
         <p:spPr>
           <a:xfrm>
-            <a:off x="9990948" y="3188855"/>
-            <a:ext cx="249202" cy="276891"/>
-          </a:xfrm>
-          <a:prstGeom prst="rect">
-            <a:avLst/>
-          </a:prstGeom>
-          <a:noFill/>
-        </p:spPr>
-        <p:txBody>
-          <a:bodyPr wrap="none" lIns="0" rIns="0" tIns="0" bIns="0">
-            <a:spAutoFit/>
-          </a:bodyPr>
-          <a:lstStyle/>
-          <a:p>
-            <a:pPr algn="ctr"/>
-            <a:r>
-              <a:rPr sz="1614" b="1">
-                <a:solidFill>
-                  <a:srgbClr val="0B1B1F"/>
-                </a:solidFill>
-                <a:latin typeface="Noto Sans SC"/>
-                <a:ea typeface="Noto Sans SC"/>
-              </a:rPr>
-              <a:t>E</a:t>
-            </a:r>
-          </a:p>
-        </p:txBody>
-      </p:sp>
-      <p:sp>
-        <p:nvSpPr>
-          <p:cNvPr id="55" name="TextBox 54"/>
-          <p:cNvSpPr txBox="1"/>
-          <p:nvPr/>
-        </p:nvSpPr>
-        <p:spPr>
-          <a:xfrm>
-            <a:off x="6901129" y="5507736"/>
-            <a:ext cx="3279241" cy="274320"/>
+            <a:off x="6904990" y="5507736"/>
+            <a:ext cx="3271520" cy="274320"/>
           </a:xfrm>
           <a:prstGeom prst="rect">
             <a:avLst/>
@@ -22947,7 +22623,7 @@
         <p:spPr>
           <a:xfrm>
             <a:off x="563880" y="6512052"/>
-            <a:ext cx="2418587" cy="205740"/>
+            <a:ext cx="2428240" cy="205740"/>
           </a:xfrm>
           <a:prstGeom prst="rect">
             <a:avLst/>
@@ -22982,8 +22658,8 @@
         </p:nvSpPr>
         <p:spPr>
           <a:xfrm>
-            <a:off x="11108524" y="6499098"/>
-            <a:ext cx="561505" cy="222885"/>
+            <a:off x="11113770" y="6499098"/>
+            <a:ext cx="556260" cy="222885"/>
           </a:xfrm>
           <a:prstGeom prst="rect">
             <a:avLst/>
@@ -23012,43 +22688,7 @@
       </p:sp>
       <p:sp>
         <p:nvSpPr>
-          <p:cNvPr id="9" name="TextBox 8"/>
-          <p:cNvSpPr txBox="1"/>
-          <p:nvPr/>
-        </p:nvSpPr>
-        <p:spPr>
-          <a:xfrm>
-            <a:off x="10855147" y="377952"/>
-            <a:ext cx="811072" cy="205740"/>
-          </a:xfrm>
-          <a:prstGeom prst="rect">
-            <a:avLst/>
-          </a:prstGeom>
-          <a:noFill/>
-        </p:spPr>
-        <p:txBody>
-          <a:bodyPr wrap="none" lIns="0" rIns="0" tIns="0" bIns="0">
-            <a:spAutoFit/>
-          </a:bodyPr>
-          <a:lstStyle/>
-          <a:p>
-            <a:pPr algn="r"/>
-            <a:r>
-              <a:rPr sz="1200" b="0">
-                <a:solidFill>
-                  <a:srgbClr val="6F8F8F"/>
-                </a:solidFill>
-                <a:latin typeface="Noto Sans SC"/>
-                <a:ea typeface="Noto Sans SC"/>
-              </a:rPr>
-              <a:t>影片 01:52</a:t>
-            </a:r>
-          </a:p>
-        </p:txBody>
-      </p:sp>
-      <p:sp>
-        <p:nvSpPr>
-          <p:cNvPr id="10" name="Oval 9"/>
+          <p:cNvPr id="9" name="Oval 8"/>
           <p:cNvSpPr/>
           <p:nvPr/>
         </p:nvSpPr>
@@ -23090,7 +22730,7 @@
       </p:sp>
       <p:sp>
         <p:nvSpPr>
-          <p:cNvPr id="11" name="TextBox 10"/>
+          <p:cNvPr id="10" name="TextBox 9"/>
           <p:cNvSpPr txBox="1"/>
           <p:nvPr/>
         </p:nvSpPr>
@@ -23130,7 +22770,7 @@
       </p:sp>
       <p:sp>
         <p:nvSpPr>
-          <p:cNvPr id="12" name="Oval 11"/>
+          <p:cNvPr id="11" name="Oval 10"/>
           <p:cNvSpPr/>
           <p:nvPr/>
         </p:nvSpPr>
@@ -23172,7 +22812,7 @@
       </p:sp>
       <p:sp>
         <p:nvSpPr>
-          <p:cNvPr id="13" name="TextBox 12"/>
+          <p:cNvPr id="12" name="TextBox 11"/>
           <p:cNvSpPr txBox="1"/>
           <p:nvPr/>
         </p:nvSpPr>
@@ -23212,7 +22852,7 @@
       </p:sp>
       <p:sp>
         <p:nvSpPr>
-          <p:cNvPr id="14" name="Oval 13"/>
+          <p:cNvPr id="13" name="Oval 12"/>
           <p:cNvSpPr/>
           <p:nvPr/>
         </p:nvSpPr>
@@ -23254,7 +22894,7 @@
       </p:sp>
       <p:sp>
         <p:nvSpPr>
-          <p:cNvPr id="15" name="TextBox 14"/>
+          <p:cNvPr id="14" name="TextBox 13"/>
           <p:cNvSpPr txBox="1"/>
           <p:nvPr/>
         </p:nvSpPr>
@@ -23294,7 +22934,7 @@
       </p:sp>
       <p:sp>
         <p:nvSpPr>
-          <p:cNvPr id="16" name="Oval 15"/>
+          <p:cNvPr id="15" name="Oval 14"/>
           <p:cNvSpPr/>
           <p:nvPr/>
         </p:nvSpPr>
@@ -23336,7 +22976,7 @@
       </p:sp>
       <p:sp>
         <p:nvSpPr>
-          <p:cNvPr id="17" name="TextBox 16"/>
+          <p:cNvPr id="16" name="TextBox 15"/>
           <p:cNvSpPr txBox="1"/>
           <p:nvPr/>
         </p:nvSpPr>
@@ -23376,7 +23016,7 @@
       </p:sp>
       <p:sp>
         <p:nvSpPr>
-          <p:cNvPr id="18" name="Rounded Rectangle 17"/>
+          <p:cNvPr id="17" name="Rounded Rectangle 16"/>
           <p:cNvSpPr/>
           <p:nvPr/>
         </p:nvSpPr>
@@ -23426,14 +23066,14 @@
       </p:sp>
       <p:sp>
         <p:nvSpPr>
-          <p:cNvPr id="19" name="TextBox 18"/>
+          <p:cNvPr id="18" name="TextBox 17"/>
           <p:cNvSpPr txBox="1"/>
           <p:nvPr/>
         </p:nvSpPr>
         <p:spPr>
           <a:xfrm>
             <a:off x="6506209" y="1698244"/>
-            <a:ext cx="1717192" cy="240030"/>
+            <a:ext cx="1713230" cy="240030"/>
           </a:xfrm>
           <a:prstGeom prst="rect">
             <a:avLst/>
@@ -23462,13 +23102,13 @@
       </p:sp>
       <p:cxnSp>
         <p:nvCxnSpPr>
-          <p:cNvPr id="20" name="Connector 19"/>
+          <p:cNvPr id="19" name="Connector 18"/>
           <p:cNvCxnSpPr/>
           <p:nvPr/>
         </p:nvCxnSpPr>
         <p:spPr>
           <a:xfrm>
-            <a:off x="6667500" y="3492500"/>
+            <a:off x="6667500" y="3378200"/>
             <a:ext cx="3492500" cy="0"/>
           </a:xfrm>
           <a:prstGeom prst="line">
@@ -23497,14 +23137,14 @@
       </p:cxnSp>
       <p:sp>
         <p:nvSpPr>
-          <p:cNvPr id="21" name="TextBox 20"/>
-          <p:cNvSpPr txBox="1"/>
-          <p:nvPr/>
-        </p:nvSpPr>
-        <p:spPr>
-          <a:xfrm>
-            <a:off x="6473698" y="3400552"/>
-            <a:ext cx="176022" cy="205740"/>
+          <p:cNvPr id="20" name="TextBox 19"/>
+          <p:cNvSpPr txBox="1"/>
+          <p:nvPr/>
+        </p:nvSpPr>
+        <p:spPr>
+          <a:xfrm>
+            <a:off x="6475730" y="3286252"/>
+            <a:ext cx="173990" cy="205740"/>
           </a:xfrm>
           <a:prstGeom prst="rect">
             <a:avLst/>
@@ -23533,13 +23173,13 @@
       </p:sp>
       <p:sp>
         <p:nvSpPr>
-          <p:cNvPr id="22" name="Rounded Rectangle 21"/>
+          <p:cNvPr id="21" name="Rounded Rectangle 20"/>
           <p:cNvSpPr/>
           <p:nvPr/>
         </p:nvSpPr>
         <p:spPr>
           <a:xfrm>
-            <a:off x="6921500" y="3473450"/>
+            <a:off x="6921500" y="3359150"/>
             <a:ext cx="571500" cy="38100"/>
           </a:xfrm>
           <a:prstGeom prst="roundRect">
@@ -23577,14 +23217,50 @@
       </p:sp>
       <p:sp>
         <p:nvSpPr>
+          <p:cNvPr id="22" name="TextBox 21"/>
+          <p:cNvSpPr txBox="1"/>
+          <p:nvPr/>
+        </p:nvSpPr>
+        <p:spPr>
+          <a:xfrm>
+            <a:off x="7085965" y="3082036"/>
+            <a:ext cx="242570" cy="274320"/>
+          </a:xfrm>
+          <a:prstGeom prst="rect">
+            <a:avLst/>
+          </a:prstGeom>
+          <a:noFill/>
+        </p:spPr>
+        <p:txBody>
+          <a:bodyPr wrap="none" lIns="0" rIns="0" tIns="0" bIns="0">
+            <a:spAutoFit/>
+          </a:bodyPr>
+          <a:lstStyle/>
+          <a:p>
+            <a:pPr algn="ctr"/>
+            <a:r>
+              <a:rPr sz="1600" b="1">
+                <a:solidFill>
+                  <a:srgbClr val="BCD2D0"/>
+                </a:solidFill>
+                <a:latin typeface="Noto Sans SC"/>
+                <a:ea typeface="Noto Sans SC"/>
+              </a:rPr>
+              <a:t>0</a:t>
+            </a:r>
+          </a:p>
+        </p:txBody>
+      </p:sp>
+      <p:sp>
+        <p:nvSpPr>
           <p:cNvPr id="23" name="TextBox 22"/>
           <p:cNvSpPr txBox="1"/>
           <p:nvPr/>
         </p:nvSpPr>
         <p:spPr>
           <a:xfrm>
-            <a:off x="7086346" y="3196336"/>
-            <a:ext cx="241808" cy="274320"/>
+            <a:off x="6986270" y="4086098"/>
+            <a:ext cx="441959" cy="222885"/>
           </a:xfrm>
           <a:prstGeom prst="rect">
             <a:avLst/>
@@ -23599,49 +23275,13 @@
           <a:p>
             <a:pPr algn="ctr"/>
             <a:r>
-              <a:rPr sz="1600" b="1">
+              <a:rPr sz="1300" b="0">
                 <a:solidFill>
                   <a:srgbClr val="BCD2D0"/>
                 </a:solidFill>
                 <a:latin typeface="Noto Sans SC"/>
                 <a:ea typeface="Noto Sans SC"/>
               </a:rPr>
-              <a:t>0</a:t>
-            </a:r>
-          </a:p>
-        </p:txBody>
-      </p:sp>
-      <p:sp>
-        <p:nvSpPr>
-          <p:cNvPr id="24" name="TextBox 23"/>
-          <p:cNvSpPr txBox="1"/>
-          <p:nvPr/>
-        </p:nvSpPr>
-        <p:spPr>
-          <a:xfrm>
-            <a:off x="6983539" y="4086098"/>
-            <a:ext cx="447420" cy="222885"/>
-          </a:xfrm>
-          <a:prstGeom prst="rect">
-            <a:avLst/>
-          </a:prstGeom>
-          <a:noFill/>
-        </p:spPr>
-        <p:txBody>
-          <a:bodyPr wrap="none" lIns="0" rIns="0" tIns="0" bIns="0">
-            <a:spAutoFit/>
-          </a:bodyPr>
-          <a:lstStyle/>
-          <a:p>
-            <a:pPr algn="ctr"/>
-            <a:r>
-              <a:rPr sz="1300" b="0">
-                <a:solidFill>
-                  <a:srgbClr val="BCD2D0"/>
-                </a:solidFill>
-                <a:latin typeface="Noto Sans SC"/>
-                <a:ea typeface="Noto Sans SC"/>
-              </a:rPr>
               <a:t>k = 0</a:t>
             </a:r>
           </a:p>
@@ -23649,13 +23289,13 @@
       </p:sp>
       <p:sp>
         <p:nvSpPr>
-          <p:cNvPr id="25" name="Rounded Rectangle 24"/>
+          <p:cNvPr id="24" name="Rounded Rectangle 23"/>
           <p:cNvSpPr/>
           <p:nvPr/>
         </p:nvSpPr>
         <p:spPr>
           <a:xfrm>
-            <a:off x="7937500" y="2463800"/>
+            <a:off x="7937500" y="2349500"/>
             <a:ext cx="571500" cy="1028700"/>
           </a:xfrm>
           <a:prstGeom prst="roundRect">
@@ -23693,14 +23333,50 @@
       </p:sp>
       <p:sp>
         <p:nvSpPr>
+          <p:cNvPr id="25" name="TextBox 24"/>
+          <p:cNvSpPr txBox="1"/>
+          <p:nvPr/>
+        </p:nvSpPr>
+        <p:spPr>
+          <a:xfrm>
+            <a:off x="8041640" y="2053336"/>
+            <a:ext cx="363220" cy="274320"/>
+          </a:xfrm>
+          <a:prstGeom prst="rect">
+            <a:avLst/>
+          </a:prstGeom>
+          <a:noFill/>
+        </p:spPr>
+        <p:txBody>
+          <a:bodyPr wrap="none" lIns="0" rIns="0" tIns="0" bIns="0">
+            <a:spAutoFit/>
+          </a:bodyPr>
+          <a:lstStyle/>
+          <a:p>
+            <a:pPr algn="ctr"/>
+            <a:r>
+              <a:rPr sz="1600" b="1">
+                <a:solidFill>
+                  <a:srgbClr val="D8BB78"/>
+                </a:solidFill>
+                <a:latin typeface="Noto Sans SC"/>
+                <a:ea typeface="Noto Sans SC"/>
+              </a:rPr>
+              <a:t>+9</a:t>
+            </a:r>
+          </a:p>
+        </p:txBody>
+      </p:sp>
+      <p:sp>
+        <p:nvSpPr>
           <p:cNvPr id="26" name="TextBox 25"/>
           <p:cNvSpPr txBox="1"/>
           <p:nvPr/>
         </p:nvSpPr>
         <p:spPr>
           <a:xfrm>
-            <a:off x="8042402" y="2167636"/>
-            <a:ext cx="361695" cy="274320"/>
+            <a:off x="8002270" y="4086098"/>
+            <a:ext cx="441959" cy="222885"/>
           </a:xfrm>
           <a:prstGeom prst="rect">
             <a:avLst/>
@@ -23715,42 +23391,6 @@
           <a:p>
             <a:pPr algn="ctr"/>
             <a:r>
-              <a:rPr sz="1600" b="1">
-                <a:solidFill>
-                  <a:srgbClr val="D8BB78"/>
-                </a:solidFill>
-                <a:latin typeface="Noto Sans SC"/>
-                <a:ea typeface="Noto Sans SC"/>
-              </a:rPr>
-              <a:t>+9</a:t>
-            </a:r>
-          </a:p>
-        </p:txBody>
-      </p:sp>
-      <p:sp>
-        <p:nvSpPr>
-          <p:cNvPr id="27" name="TextBox 26"/>
-          <p:cNvSpPr txBox="1"/>
-          <p:nvPr/>
-        </p:nvSpPr>
-        <p:spPr>
-          <a:xfrm>
-            <a:off x="7999539" y="4086098"/>
-            <a:ext cx="447420" cy="222885"/>
-          </a:xfrm>
-          <a:prstGeom prst="rect">
-            <a:avLst/>
-          </a:prstGeom>
-          <a:noFill/>
-        </p:spPr>
-        <p:txBody>
-          <a:bodyPr wrap="none" lIns="0" rIns="0" tIns="0" bIns="0">
-            <a:spAutoFit/>
-          </a:bodyPr>
-          <a:lstStyle/>
-          <a:p>
-            <a:pPr algn="ctr"/>
-            <a:r>
               <a:rPr sz="1300" b="0">
                 <a:solidFill>
                   <a:srgbClr val="BCD2D0"/>
@@ -23765,7 +23405,7 @@
       </p:sp>
       <p:sp>
         <p:nvSpPr>
-          <p:cNvPr id="28" name="Rounded Rectangle 27"/>
+          <p:cNvPr id="27" name="Rounded Rectangle 26"/>
           <p:cNvSpPr/>
           <p:nvPr/>
         </p:nvSpPr>
@@ -23810,13 +23450,13 @@
       </p:sp>
       <p:sp>
         <p:nvSpPr>
-          <p:cNvPr id="29" name="Rounded Rectangle 28"/>
+          <p:cNvPr id="28" name="Rounded Rectangle 27"/>
           <p:cNvSpPr/>
           <p:nvPr/>
         </p:nvSpPr>
         <p:spPr>
           <a:xfrm>
-            <a:off x="8953500" y="3378200"/>
+            <a:off x="8953500" y="3263900"/>
             <a:ext cx="571500" cy="114300"/>
           </a:xfrm>
           <a:prstGeom prst="roundRect">
@@ -23854,14 +23494,50 @@
       </p:sp>
       <p:sp>
         <p:nvSpPr>
+          <p:cNvPr id="29" name="TextBox 28"/>
+          <p:cNvSpPr txBox="1"/>
+          <p:nvPr/>
+        </p:nvSpPr>
+        <p:spPr>
+          <a:xfrm>
+            <a:off x="9057640" y="2967736"/>
+            <a:ext cx="363220" cy="274320"/>
+          </a:xfrm>
+          <a:prstGeom prst="rect">
+            <a:avLst/>
+          </a:prstGeom>
+          <a:noFill/>
+        </p:spPr>
+        <p:txBody>
+          <a:bodyPr wrap="none" lIns="0" rIns="0" tIns="0" bIns="0">
+            <a:spAutoFit/>
+          </a:bodyPr>
+          <a:lstStyle/>
+          <a:p>
+            <a:pPr algn="ctr"/>
+            <a:r>
+              <a:rPr sz="1600" b="1">
+                <a:solidFill>
+                  <a:srgbClr val="77CDBB"/>
+                </a:solidFill>
+                <a:latin typeface="Noto Sans SC"/>
+                <a:ea typeface="Noto Sans SC"/>
+              </a:rPr>
+              <a:t>+1</a:t>
+            </a:r>
+          </a:p>
+        </p:txBody>
+      </p:sp>
+      <p:sp>
+        <p:nvSpPr>
           <p:cNvPr id="30" name="TextBox 29"/>
           <p:cNvSpPr txBox="1"/>
           <p:nvPr/>
         </p:nvSpPr>
         <p:spPr>
           <a:xfrm>
-            <a:off x="9058402" y="3082036"/>
-            <a:ext cx="361695" cy="274320"/>
+            <a:off x="9018270" y="4086098"/>
+            <a:ext cx="441959" cy="222885"/>
           </a:xfrm>
           <a:prstGeom prst="rect">
             <a:avLst/>
@@ -23876,42 +23552,6 @@
           <a:p>
             <a:pPr algn="ctr"/>
             <a:r>
-              <a:rPr sz="1600" b="1">
-                <a:solidFill>
-                  <a:srgbClr val="77CDBB"/>
-                </a:solidFill>
-                <a:latin typeface="Noto Sans SC"/>
-                <a:ea typeface="Noto Sans SC"/>
-              </a:rPr>
-              <a:t>+1</a:t>
-            </a:r>
-          </a:p>
-        </p:txBody>
-      </p:sp>
-      <p:sp>
-        <p:nvSpPr>
-          <p:cNvPr id="31" name="TextBox 30"/>
-          <p:cNvSpPr txBox="1"/>
-          <p:nvPr/>
-        </p:nvSpPr>
-        <p:spPr>
-          <a:xfrm>
-            <a:off x="9015539" y="4086098"/>
-            <a:ext cx="447420" cy="222885"/>
-          </a:xfrm>
-          <a:prstGeom prst="rect">
-            <a:avLst/>
-          </a:prstGeom>
-          <a:noFill/>
-        </p:spPr>
-        <p:txBody>
-          <a:bodyPr wrap="none" lIns="0" rIns="0" tIns="0" bIns="0">
-            <a:spAutoFit/>
-          </a:bodyPr>
-          <a:lstStyle/>
-          <a:p>
-            <a:pPr algn="ctr"/>
-            <a:r>
               <a:rPr sz="1300" b="0">
                 <a:solidFill>
                   <a:srgbClr val="BCD2D0"/>
@@ -23926,14 +23566,14 @@
       </p:sp>
       <p:sp>
         <p:nvSpPr>
-          <p:cNvPr id="32" name="Rounded Rectangle 31"/>
+          <p:cNvPr id="31" name="Rounded Rectangle 30"/>
           <p:cNvSpPr/>
           <p:nvPr/>
         </p:nvSpPr>
         <p:spPr>
           <a:xfrm>
-            <a:off x="7171416" y="4864100"/>
-            <a:ext cx="2421166" cy="292100"/>
+            <a:off x="7165975" y="4864100"/>
+            <a:ext cx="2432050" cy="292100"/>
           </a:xfrm>
           <a:prstGeom prst="roundRect">
             <a:avLst>
@@ -23972,14 +23612,14 @@
       </p:sp>
       <p:sp>
         <p:nvSpPr>
-          <p:cNvPr id="33" name="TextBox 32"/>
-          <p:cNvSpPr txBox="1"/>
-          <p:nvPr/>
-        </p:nvSpPr>
-        <p:spPr>
-          <a:xfrm>
-            <a:off x="7217136" y="4924298"/>
-            <a:ext cx="2329726" cy="222885"/>
+          <p:cNvPr id="32" name="TextBox 31"/>
+          <p:cNvSpPr txBox="1"/>
+          <p:nvPr/>
+        </p:nvSpPr>
+        <p:spPr>
+          <a:xfrm>
+            <a:off x="7211695" y="4924298"/>
+            <a:ext cx="2340610" cy="222885"/>
           </a:xfrm>
           <a:prstGeom prst="rect">
             <a:avLst/>
